--- a/docs/rapports/Presentation-ImmoBell.pptx
+++ b/docs/rapports/Presentation-ImmoBell.pptx
@@ -4,20 +4,23 @@
   <p:sldMasterIdLst>
     <p:sldMasterId id="2147483648" r:id="rId1"/>
   </p:sldMasterIdLst>
+  <p:notesMasterIdLst>
+    <p:notesMasterId r:id="rId13"/>
+  </p:notesMasterIdLst>
   <p:sldIdLst>
-    <p:sldId id="256" r:id="rId7"/>
-    <p:sldId id="257" r:id="rId9"/>
-    <p:sldId id="258" r:id="rId10"/>
-    <p:sldId id="259" r:id="rId11"/>
-    <p:sldId id="260" r:id="rId12"/>
-    <p:sldId id="261" r:id="rId13"/>
-    <p:sldId id="262" r:id="rId14"/>
-    <p:sldId id="263" r:id="rId15"/>
-    <p:sldId id="264" r:id="rId16"/>
-    <p:sldId id="265" r:id="rId17"/>
-    <p:sldId id="266" r:id="rId18"/>
+    <p:sldId id="256" r:id="rId2"/>
+    <p:sldId id="257" r:id="rId3"/>
+    <p:sldId id="258" r:id="rId4"/>
+    <p:sldId id="259" r:id="rId5"/>
+    <p:sldId id="260" r:id="rId6"/>
+    <p:sldId id="261" r:id="rId7"/>
+    <p:sldId id="262" r:id="rId8"/>
+    <p:sldId id="263" r:id="rId9"/>
+    <p:sldId id="264" r:id="rId10"/>
+    <p:sldId id="265" r:id="rId11"/>
+    <p:sldId id="266" r:id="rId12"/>
   </p:sldIdLst>
-  <p:sldSz cx="12192000" cy="6858000" type="screen4x3"/>
+  <p:sldSz cx="12192000" cy="6858000"/>
   <p:notesSz cx="6858000" cy="9144000"/>
   <p:defaultTextStyle>
     <a:defPPr>
@@ -114,11 +117,27 @@
       </a:defRPr>
     </a:lvl9pPr>
   </p:defaultTextStyle>
+  <p:extLst>
+    <p:ext uri="{EFAFB233-063F-42B5-8137-9DF3F51BA10A}">
+      <p15:sldGuideLst xmlns:p15="http://schemas.microsoft.com/office/powerpoint/2012/main">
+        <p15:guide id="1" orient="horz" pos="2160">
+          <p15:clr>
+            <a:srgbClr val="A4A3A4"/>
+          </p15:clr>
+        </p15:guide>
+        <p15:guide id="2" pos="2880">
+          <p15:clr>
+            <a:srgbClr val="A4A3A4"/>
+          </p15:clr>
+        </p15:guide>
+      </p15:sldGuideLst>
+    </p:ext>
+  </p:extLst>
 </p:presentation>
 </file>
 
 <file path=ppt/notesMasters/notesMaster1.xml><?xml version="1.0" encoding="utf-8"?>
-<p:notesMaster xmlns:a="http://schemas.openxmlformats.org/drawingml/2006/main" xmlns:p="http://schemas.openxmlformats.org/presentationml/2006/main" xmlns:r="http://schemas.openxmlformats.org/officeDocument/2006/relationships">
+<p:notesMaster xmlns:a="http://schemas.openxmlformats.org/drawingml/2006/main" xmlns:r="http://schemas.openxmlformats.org/officeDocument/2006/relationships" xmlns:p="http://schemas.openxmlformats.org/presentationml/2006/main">
   <p:cSld>
     <p:bg>
       <p:bgRef idx="1001">
@@ -139,241 +158,16 @@
           <a:chExt cx="0" cy="0"/>
         </a:xfrm>
       </p:grpSpPr>
-      <p:sp>
-        <p:nvSpPr>
-          <p:cNvPr id="2" name="Header Placeholder 1"/>
-          <p:cNvSpPr>
-            <a:spLocks noGrp="1"/>
-          </p:cNvSpPr>
-          <p:nvPr>
-            <p:ph type="hdr" sz="quarter"/>
-          </p:nvPr>
-        </p:nvSpPr>
-        <p:spPr>
-          <a:xfrm>
-            <a:off x="0" y="0"/>
-            <a:ext cx="2971800" cy="457200"/>
-          </a:xfrm>
-          <a:prstGeom prst="rect">
-            <a:avLst/>
-          </a:prstGeom>
-        </p:spPr>
-        <p:txBody>
-          <a:bodyPr vert="horz" lIns="91440" tIns="45720" rIns="91440" bIns="45720" rtlCol="0"/>
-          <a:lstStyle>
-            <a:lvl1pPr algn="l">
-              <a:defRPr sz="1200"/>
-            </a:lvl1pPr>
-          </a:lstStyle>
-          <a:p>
-            <a:endParaRPr lang="en-US"/>
-          </a:p>
-        </p:txBody>
-      </p:sp>
-      <p:sp>
-        <p:nvSpPr>
-          <p:cNvPr id="3" name="Date Placeholder 2"/>
-          <p:cNvSpPr>
-            <a:spLocks noGrp="1"/>
-          </p:cNvSpPr>
-          <p:nvPr>
-            <p:ph type="dt" idx="1"/>
-          </p:nvPr>
-        </p:nvSpPr>
-        <p:spPr>
-          <a:xfrm>
-            <a:off x="3884613" y="0"/>
-            <a:ext cx="2971800" cy="457200"/>
-          </a:xfrm>
-          <a:prstGeom prst="rect">
-            <a:avLst/>
-          </a:prstGeom>
-        </p:spPr>
-        <p:txBody>
-          <a:bodyPr vert="horz" lIns="91440" tIns="45720" rIns="91440" bIns="45720" rtlCol="0"/>
-          <a:lstStyle>
-            <a:lvl1pPr algn="r">
-              <a:defRPr sz="1200"/>
-            </a:lvl1pPr>
-          </a:lstStyle>
-          <a:p>
-            <a:fld id="{0F89C1C7-3DCD-1040-A9CF-14679D8B5DDD}" type="datetimeFigureOut">
-              <a:rPr lang="en-US" smtClean="0"/>
-              <a:t>10/17/16</a:t>
-            </a:fld>
-            <a:endParaRPr lang="en-US"/>
-          </a:p>
-        </p:txBody>
-      </p:sp>
-      <p:sp>
-        <p:nvSpPr>
-          <p:cNvPr id="4" name="Slide Image Placeholder 3"/>
-          <p:cNvSpPr>
-            <a:spLocks noGrp="1" noRot="1" noChangeAspect="1"/>
-          </p:cNvSpPr>
-          <p:nvPr>
-            <p:ph type="sldImg" idx="2"/>
-          </p:nvPr>
-        </p:nvSpPr>
-        <p:spPr>
-          <a:xfrm>
-            <a:off x="1143000" y="685800"/>
-            <a:ext cx="4572000" cy="3429000"/>
-          </a:xfrm>
-          <a:prstGeom prst="rect">
-            <a:avLst/>
-          </a:prstGeom>
-          <a:noFill/>
-          <a:ln w="12700">
-            <a:solidFill>
-              <a:prstClr val="black"/>
-            </a:solidFill>
-          </a:ln>
-        </p:spPr>
-        <p:txBody>
-          <a:bodyPr vert="horz" lIns="91440" tIns="45720" rIns="91440" bIns="45720" rtlCol="0" anchor="ctr"/>
-          <a:lstStyle/>
-          <a:p>
-            <a:endParaRPr lang="en-US"/>
-          </a:p>
-        </p:txBody>
-      </p:sp>
-      <p:sp>
-        <p:nvSpPr>
-          <p:cNvPr id="5" name="Notes Placeholder 4"/>
-          <p:cNvSpPr>
-            <a:spLocks noGrp="1"/>
-          </p:cNvSpPr>
-          <p:nvPr>
-            <p:ph type="body" sz="quarter" idx="3"/>
-          </p:nvPr>
-        </p:nvSpPr>
-        <p:spPr>
-          <a:xfrm>
-            <a:off x="685800" y="4343400"/>
-            <a:ext cx="5486400" cy="4114800"/>
-          </a:xfrm>
-          <a:prstGeom prst="rect">
-            <a:avLst/>
-          </a:prstGeom>
-        </p:spPr>
-        <p:txBody>
-          <a:bodyPr vert="horz" lIns="91440" tIns="45720" rIns="91440" bIns="45720" rtlCol="0"/>
-          <a:lstStyle/>
-          <a:p>
-            <a:pPr lvl="0"/>
-            <a:r>
-              <a:rPr lang="en-US" smtClean="0"/>
-              <a:t>Click to edit Master text styles</a:t>
-            </a:r>
-          </a:p>
-          <a:p>
-            <a:pPr lvl="1"/>
-            <a:r>
-              <a:rPr lang="en-US" smtClean="0"/>
-              <a:t>Second level</a:t>
-            </a:r>
-          </a:p>
-          <a:p>
-            <a:pPr lvl="2"/>
-            <a:r>
-              <a:rPr lang="en-US" smtClean="0"/>
-              <a:t>Third level</a:t>
-            </a:r>
-          </a:p>
-          <a:p>
-            <a:pPr lvl="3"/>
-            <a:r>
-              <a:rPr lang="en-US" smtClean="0"/>
-              <a:t>Fourth level</a:t>
-            </a:r>
-          </a:p>
-          <a:p>
-            <a:pPr lvl="4"/>
-            <a:r>
-              <a:rPr lang="en-US" smtClean="0"/>
-              <a:t>Fifth level</a:t>
-            </a:r>
-            <a:endParaRPr lang="en-US"/>
-          </a:p>
-        </p:txBody>
-      </p:sp>
-      <p:sp>
-        <p:nvSpPr>
-          <p:cNvPr id="6" name="Footer Placeholder 5"/>
-          <p:cNvSpPr>
-            <a:spLocks noGrp="1"/>
-          </p:cNvSpPr>
-          <p:nvPr>
-            <p:ph type="ftr" sz="quarter" idx="4"/>
-          </p:nvPr>
-        </p:nvSpPr>
-        <p:spPr>
-          <a:xfrm>
-            <a:off x="0" y="8685213"/>
-            <a:ext cx="2971800" cy="457200"/>
-          </a:xfrm>
-          <a:prstGeom prst="rect">
-            <a:avLst/>
-          </a:prstGeom>
-        </p:spPr>
-        <p:txBody>
-          <a:bodyPr vert="horz" lIns="91440" tIns="45720" rIns="91440" bIns="45720" rtlCol="0" anchor="b"/>
-          <a:lstStyle>
-            <a:lvl1pPr algn="l">
-              <a:defRPr sz="1200"/>
-            </a:lvl1pPr>
-          </a:lstStyle>
-          <a:p>
-            <a:endParaRPr lang="en-US"/>
-          </a:p>
-        </p:txBody>
-      </p:sp>
-      <p:sp>
-        <p:nvSpPr>
-          <p:cNvPr id="7" name="Slide Number Placeholder 6"/>
-          <p:cNvSpPr>
-            <a:spLocks noGrp="1"/>
-          </p:cNvSpPr>
-          <p:nvPr>
-            <p:ph type="sldNum" sz="quarter" idx="5"/>
-          </p:nvPr>
-        </p:nvSpPr>
-        <p:spPr>
-          <a:xfrm>
-            <a:off x="3884613" y="8685213"/>
-            <a:ext cx="2971800" cy="457200"/>
-          </a:xfrm>
-          <a:prstGeom prst="rect">
-            <a:avLst/>
-          </a:prstGeom>
-        </p:spPr>
-        <p:txBody>
-          <a:bodyPr vert="horz" lIns="91440" tIns="45720" rIns="91440" bIns="45720" rtlCol="0" anchor="b"/>
-          <a:lstStyle>
-            <a:lvl1pPr algn="r">
-              <a:defRPr sz="1200"/>
-            </a:lvl1pPr>
-          </a:lstStyle>
-          <a:p>
-            <a:fld id="{BB5E49A5-4136-284D-997B-48E1D791AD67}" type="slidenum">
-              <a:rPr lang="en-US" smtClean="0"/>
-              <a:t>‹#›</a:t>
-            </a:fld>
-            <a:endParaRPr lang="en-US"/>
-          </a:p>
-        </p:txBody>
-      </p:sp>
     </p:spTree>
     <p:extLst>
       <p:ext uri="{BB962C8B-B14F-4D97-AF65-F5344CB8AC3E}">
-        <p14:creationId xmlns:p14="http://schemas.microsoft.com/office/powerpoint/2010/main" val="2623252185"/>
+        <p14:creationId xmlns:p14="http://schemas.microsoft.com/office/powerpoint/2010/main" val="1028339998"/>
       </p:ext>
     </p:extLst>
   </p:cSld>
   <p:clrMap bg1="lt1" tx1="dk1" bg2="lt2" tx2="dk2" accent1="accent1" accent2="accent2" accent3="accent3" accent4="accent4" accent5="accent5" accent6="accent6" hlink="hlink" folHlink="folHlink"/>
   <p:notesStyle>
-    <a:lvl1pPr marL="0" algn="l" defTabSz="457200" rtl="0" eaLnBrk="1" latinLnBrk="0" hangingPunct="1">
+    <a:lvl1pPr marL="0" algn="l" defTabSz="914400" rtl="0" eaLnBrk="1" latinLnBrk="0" hangingPunct="1">
       <a:defRPr sz="1200" kern="1200">
         <a:solidFill>
           <a:schemeClr val="tx1"/>
@@ -383,7 +177,7 @@
         <a:cs typeface="+mn-cs"/>
       </a:defRPr>
     </a:lvl1pPr>
-    <a:lvl2pPr marL="457200" algn="l" defTabSz="457200" rtl="0" eaLnBrk="1" latinLnBrk="0" hangingPunct="1">
+    <a:lvl2pPr marL="457200" algn="l" defTabSz="914400" rtl="0" eaLnBrk="1" latinLnBrk="0" hangingPunct="1">
       <a:defRPr sz="1200" kern="1200">
         <a:solidFill>
           <a:schemeClr val="tx1"/>
@@ -393,7 +187,7 @@
         <a:cs typeface="+mn-cs"/>
       </a:defRPr>
     </a:lvl2pPr>
-    <a:lvl3pPr marL="914400" algn="l" defTabSz="457200" rtl="0" eaLnBrk="1" latinLnBrk="0" hangingPunct="1">
+    <a:lvl3pPr marL="914400" algn="l" defTabSz="914400" rtl="0" eaLnBrk="1" latinLnBrk="0" hangingPunct="1">
       <a:defRPr sz="1200" kern="1200">
         <a:solidFill>
           <a:schemeClr val="tx1"/>
@@ -403,7 +197,7 @@
         <a:cs typeface="+mn-cs"/>
       </a:defRPr>
     </a:lvl3pPr>
-    <a:lvl4pPr marL="1371600" algn="l" defTabSz="457200" rtl="0" eaLnBrk="1" latinLnBrk="0" hangingPunct="1">
+    <a:lvl4pPr marL="1371600" algn="l" defTabSz="914400" rtl="0" eaLnBrk="1" latinLnBrk="0" hangingPunct="1">
       <a:defRPr sz="1200" kern="1200">
         <a:solidFill>
           <a:schemeClr val="tx1"/>
@@ -413,7 +207,7 @@
         <a:cs typeface="+mn-cs"/>
       </a:defRPr>
     </a:lvl4pPr>
-    <a:lvl5pPr marL="1828800" algn="l" defTabSz="457200" rtl="0" eaLnBrk="1" latinLnBrk="0" hangingPunct="1">
+    <a:lvl5pPr marL="1828800" algn="l" defTabSz="914400" rtl="0" eaLnBrk="1" latinLnBrk="0" hangingPunct="1">
       <a:defRPr sz="1200" kern="1200">
         <a:solidFill>
           <a:schemeClr val="tx1"/>
@@ -423,7 +217,7 @@
         <a:cs typeface="+mn-cs"/>
       </a:defRPr>
     </a:lvl5pPr>
-    <a:lvl6pPr marL="2286000" algn="l" defTabSz="457200" rtl="0" eaLnBrk="1" latinLnBrk="0" hangingPunct="1">
+    <a:lvl6pPr marL="2286000" algn="l" defTabSz="914400" rtl="0" eaLnBrk="1" latinLnBrk="0" hangingPunct="1">
       <a:defRPr sz="1200" kern="1200">
         <a:solidFill>
           <a:schemeClr val="tx1"/>
@@ -433,7 +227,7 @@
         <a:cs typeface="+mn-cs"/>
       </a:defRPr>
     </a:lvl6pPr>
-    <a:lvl7pPr marL="2743200" algn="l" defTabSz="457200" rtl="0" eaLnBrk="1" latinLnBrk="0" hangingPunct="1">
+    <a:lvl7pPr marL="2743200" algn="l" defTabSz="914400" rtl="0" eaLnBrk="1" latinLnBrk="0" hangingPunct="1">
       <a:defRPr sz="1200" kern="1200">
         <a:solidFill>
           <a:schemeClr val="tx1"/>
@@ -443,7 +237,7 @@
         <a:cs typeface="+mn-cs"/>
       </a:defRPr>
     </a:lvl7pPr>
-    <a:lvl8pPr marL="3200400" algn="l" defTabSz="457200" rtl="0" eaLnBrk="1" latinLnBrk="0" hangingPunct="1">
+    <a:lvl8pPr marL="3200400" algn="l" defTabSz="914400" rtl="0" eaLnBrk="1" latinLnBrk="0" hangingPunct="1">
       <a:defRPr sz="1200" kern="1200">
         <a:solidFill>
           <a:schemeClr val="tx1"/>
@@ -453,7 +247,7 @@
         <a:cs typeface="+mn-cs"/>
       </a:defRPr>
     </a:lvl8pPr>
-    <a:lvl9pPr marL="3657600" algn="l" defTabSz="457200" rtl="0" eaLnBrk="1" latinLnBrk="0" hangingPunct="1">
+    <a:lvl9pPr marL="3657600" algn="l" defTabSz="914400" rtl="0" eaLnBrk="1" latinLnBrk="0" hangingPunct="1">
       <a:defRPr sz="1200" kern="1200">
         <a:solidFill>
           <a:schemeClr val="tx1"/>
@@ -468,7 +262,7 @@
 </file>
 
 <file path=ppt/notesSlides/notesSlide1.xml><?xml version="1.0" encoding="utf-8"?>
-<p:notes xmlns:a="http://schemas.openxmlformats.org/drawingml/2006/main" xmlns:p="http://schemas.openxmlformats.org/presentationml/2006/main" xmlns:r="http://schemas.openxmlformats.org/officeDocument/2006/relationships">
+<p:notes xmlns:a="http://schemas.openxmlformats.org/drawingml/2006/main" xmlns:r="http://schemas.openxmlformats.org/officeDocument/2006/relationships" xmlns:p="http://schemas.openxmlformats.org/presentationml/2006/main">
   <p:cSld>
     <p:spTree>
       <p:nvGrpSpPr>
@@ -488,7 +282,7 @@
         <p:nvSpPr>
           <p:cNvPr id="2" name="Slide Image Placeholder 1"/>
           <p:cNvSpPr>
-            <a:spLocks noGrp="1"/>
+            <a:spLocks noGrp="1" noRot="1" noChangeAspect="1"/>
           </p:cNvSpPr>
           <p:nvPr>
             <p:ph type="sldImg" idx="2"/>
@@ -503,7 +297,7 @@
             <a:spLocks noGrp="1"/>
           </p:cNvSpPr>
           <p:nvPr>
-            <p:ph type="body" idx="3" sz="quarter"/>
+            <p:ph type="body" sz="quarter" idx="3"/>
           </p:nvPr>
         </p:nvSpPr>
         <p:spPr/>
@@ -524,7 +318,7 @@
             <a:spLocks noGrp="1"/>
           </p:cNvSpPr>
           <p:nvPr>
-            <p:ph type="sldNum" idx="5" sz="quarter"/>
+            <p:ph type="sldNum" sz="quarter" idx="5"/>
           </p:nvPr>
         </p:nvSpPr>
         <p:spPr/>
@@ -538,7 +332,7 @@
 </file>
 
 <file path=ppt/notesSlides/notesSlide10.xml><?xml version="1.0" encoding="utf-8"?>
-<p:notes xmlns:a="http://schemas.openxmlformats.org/drawingml/2006/main" xmlns:p="http://schemas.openxmlformats.org/presentationml/2006/main" xmlns:r="http://schemas.openxmlformats.org/officeDocument/2006/relationships">
+<p:notes xmlns:a="http://schemas.openxmlformats.org/drawingml/2006/main" xmlns:r="http://schemas.openxmlformats.org/officeDocument/2006/relationships" xmlns:p="http://schemas.openxmlformats.org/presentationml/2006/main">
   <p:cSld>
     <p:spTree>
       <p:nvGrpSpPr>
@@ -558,7 +352,7 @@
         <p:nvSpPr>
           <p:cNvPr id="2" name="Slide Image Placeholder 1"/>
           <p:cNvSpPr>
-            <a:spLocks noGrp="1"/>
+            <a:spLocks noGrp="1" noRot="1" noChangeAspect="1"/>
           </p:cNvSpPr>
           <p:nvPr>
             <p:ph type="sldImg" idx="2"/>
@@ -573,7 +367,7 @@
             <a:spLocks noGrp="1"/>
           </p:cNvSpPr>
           <p:nvPr>
-            <p:ph type="body" idx="3" sz="quarter"/>
+            <p:ph type="body" sz="quarter" idx="3"/>
           </p:nvPr>
         </p:nvSpPr>
         <p:spPr/>
@@ -594,7 +388,7 @@
             <a:spLocks noGrp="1"/>
           </p:cNvSpPr>
           <p:nvPr>
-            <p:ph type="sldNum" idx="5" sz="quarter"/>
+            <p:ph type="sldNum" sz="quarter" idx="5"/>
           </p:nvPr>
         </p:nvSpPr>
         <p:spPr/>
@@ -608,7 +402,7 @@
 </file>
 
 <file path=ppt/notesSlides/notesSlide11.xml><?xml version="1.0" encoding="utf-8"?>
-<p:notes xmlns:a="http://schemas.openxmlformats.org/drawingml/2006/main" xmlns:p="http://schemas.openxmlformats.org/presentationml/2006/main" xmlns:r="http://schemas.openxmlformats.org/officeDocument/2006/relationships">
+<p:notes xmlns:a="http://schemas.openxmlformats.org/drawingml/2006/main" xmlns:r="http://schemas.openxmlformats.org/officeDocument/2006/relationships" xmlns:p="http://schemas.openxmlformats.org/presentationml/2006/main">
   <p:cSld>
     <p:spTree>
       <p:nvGrpSpPr>
@@ -628,7 +422,7 @@
         <p:nvSpPr>
           <p:cNvPr id="2" name="Slide Image Placeholder 1"/>
           <p:cNvSpPr>
-            <a:spLocks noGrp="1"/>
+            <a:spLocks noGrp="1" noRot="1" noChangeAspect="1"/>
           </p:cNvSpPr>
           <p:nvPr>
             <p:ph type="sldImg" idx="2"/>
@@ -643,7 +437,7 @@
             <a:spLocks noGrp="1"/>
           </p:cNvSpPr>
           <p:nvPr>
-            <p:ph type="body" idx="3" sz="quarter"/>
+            <p:ph type="body" sz="quarter" idx="3"/>
           </p:nvPr>
         </p:nvSpPr>
         <p:spPr/>
@@ -664,7 +458,7 @@
             <a:spLocks noGrp="1"/>
           </p:cNvSpPr>
           <p:nvPr>
-            <p:ph type="sldNum" idx="5" sz="quarter"/>
+            <p:ph type="sldNum" sz="quarter" idx="5"/>
           </p:nvPr>
         </p:nvSpPr>
         <p:spPr/>
@@ -678,7 +472,7 @@
 </file>
 
 <file path=ppt/notesSlides/notesSlide2.xml><?xml version="1.0" encoding="utf-8"?>
-<p:notes xmlns:a="http://schemas.openxmlformats.org/drawingml/2006/main" xmlns:p="http://schemas.openxmlformats.org/presentationml/2006/main" xmlns:r="http://schemas.openxmlformats.org/officeDocument/2006/relationships">
+<p:notes xmlns:a="http://schemas.openxmlformats.org/drawingml/2006/main" xmlns:r="http://schemas.openxmlformats.org/officeDocument/2006/relationships" xmlns:p="http://schemas.openxmlformats.org/presentationml/2006/main">
   <p:cSld>
     <p:spTree>
       <p:nvGrpSpPr>
@@ -698,7 +492,7 @@
         <p:nvSpPr>
           <p:cNvPr id="2" name="Slide Image Placeholder 1"/>
           <p:cNvSpPr>
-            <a:spLocks noGrp="1"/>
+            <a:spLocks noGrp="1" noRot="1" noChangeAspect="1"/>
           </p:cNvSpPr>
           <p:nvPr>
             <p:ph type="sldImg" idx="2"/>
@@ -713,7 +507,7 @@
             <a:spLocks noGrp="1"/>
           </p:cNvSpPr>
           <p:nvPr>
-            <p:ph type="body" idx="3" sz="quarter"/>
+            <p:ph type="body" sz="quarter" idx="3"/>
           </p:nvPr>
         </p:nvSpPr>
         <p:spPr/>
@@ -734,7 +528,7 @@
             <a:spLocks noGrp="1"/>
           </p:cNvSpPr>
           <p:nvPr>
-            <p:ph type="sldNum" idx="5" sz="quarter"/>
+            <p:ph type="sldNum" sz="quarter" idx="5"/>
           </p:nvPr>
         </p:nvSpPr>
         <p:spPr/>
@@ -748,7 +542,7 @@
 </file>
 
 <file path=ppt/notesSlides/notesSlide3.xml><?xml version="1.0" encoding="utf-8"?>
-<p:notes xmlns:a="http://schemas.openxmlformats.org/drawingml/2006/main" xmlns:p="http://schemas.openxmlformats.org/presentationml/2006/main" xmlns:r="http://schemas.openxmlformats.org/officeDocument/2006/relationships">
+<p:notes xmlns:a="http://schemas.openxmlformats.org/drawingml/2006/main" xmlns:r="http://schemas.openxmlformats.org/officeDocument/2006/relationships" xmlns:p="http://schemas.openxmlformats.org/presentationml/2006/main">
   <p:cSld>
     <p:spTree>
       <p:nvGrpSpPr>
@@ -768,7 +562,7 @@
         <p:nvSpPr>
           <p:cNvPr id="2" name="Slide Image Placeholder 1"/>
           <p:cNvSpPr>
-            <a:spLocks noGrp="1"/>
+            <a:spLocks noGrp="1" noRot="1" noChangeAspect="1"/>
           </p:cNvSpPr>
           <p:nvPr>
             <p:ph type="sldImg" idx="2"/>
@@ -783,7 +577,7 @@
             <a:spLocks noGrp="1"/>
           </p:cNvSpPr>
           <p:nvPr>
-            <p:ph type="body" idx="3" sz="quarter"/>
+            <p:ph type="body" sz="quarter" idx="3"/>
           </p:nvPr>
         </p:nvSpPr>
         <p:spPr/>
@@ -804,7 +598,7 @@
             <a:spLocks noGrp="1"/>
           </p:cNvSpPr>
           <p:nvPr>
-            <p:ph type="sldNum" idx="5" sz="quarter"/>
+            <p:ph type="sldNum" sz="quarter" idx="5"/>
           </p:nvPr>
         </p:nvSpPr>
         <p:spPr/>
@@ -818,7 +612,7 @@
 </file>
 
 <file path=ppt/notesSlides/notesSlide4.xml><?xml version="1.0" encoding="utf-8"?>
-<p:notes xmlns:a="http://schemas.openxmlformats.org/drawingml/2006/main" xmlns:p="http://schemas.openxmlformats.org/presentationml/2006/main" xmlns:r="http://schemas.openxmlformats.org/officeDocument/2006/relationships">
+<p:notes xmlns:a="http://schemas.openxmlformats.org/drawingml/2006/main" xmlns:r="http://schemas.openxmlformats.org/officeDocument/2006/relationships" xmlns:p="http://schemas.openxmlformats.org/presentationml/2006/main">
   <p:cSld>
     <p:spTree>
       <p:nvGrpSpPr>
@@ -838,7 +632,7 @@
         <p:nvSpPr>
           <p:cNvPr id="2" name="Slide Image Placeholder 1"/>
           <p:cNvSpPr>
-            <a:spLocks noGrp="1"/>
+            <a:spLocks noGrp="1" noRot="1" noChangeAspect="1"/>
           </p:cNvSpPr>
           <p:nvPr>
             <p:ph type="sldImg" idx="2"/>
@@ -853,7 +647,7 @@
             <a:spLocks noGrp="1"/>
           </p:cNvSpPr>
           <p:nvPr>
-            <p:ph type="body" idx="3" sz="quarter"/>
+            <p:ph type="body" sz="quarter" idx="3"/>
           </p:nvPr>
         </p:nvSpPr>
         <p:spPr/>
@@ -874,7 +668,7 @@
             <a:spLocks noGrp="1"/>
           </p:cNvSpPr>
           <p:nvPr>
-            <p:ph type="sldNum" idx="5" sz="quarter"/>
+            <p:ph type="sldNum" sz="quarter" idx="5"/>
           </p:nvPr>
         </p:nvSpPr>
         <p:spPr/>
@@ -888,7 +682,7 @@
 </file>
 
 <file path=ppt/notesSlides/notesSlide5.xml><?xml version="1.0" encoding="utf-8"?>
-<p:notes xmlns:a="http://schemas.openxmlformats.org/drawingml/2006/main" xmlns:p="http://schemas.openxmlformats.org/presentationml/2006/main" xmlns:r="http://schemas.openxmlformats.org/officeDocument/2006/relationships">
+<p:notes xmlns:a="http://schemas.openxmlformats.org/drawingml/2006/main" xmlns:r="http://schemas.openxmlformats.org/officeDocument/2006/relationships" xmlns:p="http://schemas.openxmlformats.org/presentationml/2006/main">
   <p:cSld>
     <p:spTree>
       <p:nvGrpSpPr>
@@ -908,7 +702,7 @@
         <p:nvSpPr>
           <p:cNvPr id="2" name="Slide Image Placeholder 1"/>
           <p:cNvSpPr>
-            <a:spLocks noGrp="1"/>
+            <a:spLocks noGrp="1" noRot="1" noChangeAspect="1"/>
           </p:cNvSpPr>
           <p:nvPr>
             <p:ph type="sldImg" idx="2"/>
@@ -923,7 +717,7 @@
             <a:spLocks noGrp="1"/>
           </p:cNvSpPr>
           <p:nvPr>
-            <p:ph type="body" idx="3" sz="quarter"/>
+            <p:ph type="body" sz="quarter" idx="3"/>
           </p:nvPr>
         </p:nvSpPr>
         <p:spPr/>
@@ -944,7 +738,7 @@
             <a:spLocks noGrp="1"/>
           </p:cNvSpPr>
           <p:nvPr>
-            <p:ph type="sldNum" idx="5" sz="quarter"/>
+            <p:ph type="sldNum" sz="quarter" idx="5"/>
           </p:nvPr>
         </p:nvSpPr>
         <p:spPr/>
@@ -958,7 +752,7 @@
 </file>
 
 <file path=ppt/notesSlides/notesSlide6.xml><?xml version="1.0" encoding="utf-8"?>
-<p:notes xmlns:a="http://schemas.openxmlformats.org/drawingml/2006/main" xmlns:p="http://schemas.openxmlformats.org/presentationml/2006/main" xmlns:r="http://schemas.openxmlformats.org/officeDocument/2006/relationships">
+<p:notes xmlns:a="http://schemas.openxmlformats.org/drawingml/2006/main" xmlns:r="http://schemas.openxmlformats.org/officeDocument/2006/relationships" xmlns:p="http://schemas.openxmlformats.org/presentationml/2006/main">
   <p:cSld>
     <p:spTree>
       <p:nvGrpSpPr>
@@ -978,7 +772,7 @@
         <p:nvSpPr>
           <p:cNvPr id="2" name="Slide Image Placeholder 1"/>
           <p:cNvSpPr>
-            <a:spLocks noGrp="1"/>
+            <a:spLocks noGrp="1" noRot="1" noChangeAspect="1"/>
           </p:cNvSpPr>
           <p:nvPr>
             <p:ph type="sldImg" idx="2"/>
@@ -993,7 +787,7 @@
             <a:spLocks noGrp="1"/>
           </p:cNvSpPr>
           <p:nvPr>
-            <p:ph type="body" idx="3" sz="quarter"/>
+            <p:ph type="body" sz="quarter" idx="3"/>
           </p:nvPr>
         </p:nvSpPr>
         <p:spPr/>
@@ -1014,7 +808,7 @@
             <a:spLocks noGrp="1"/>
           </p:cNvSpPr>
           <p:nvPr>
-            <p:ph type="sldNum" idx="5" sz="quarter"/>
+            <p:ph type="sldNum" sz="quarter" idx="5"/>
           </p:nvPr>
         </p:nvSpPr>
         <p:spPr/>
@@ -1028,7 +822,7 @@
 </file>
 
 <file path=ppt/notesSlides/notesSlide7.xml><?xml version="1.0" encoding="utf-8"?>
-<p:notes xmlns:a="http://schemas.openxmlformats.org/drawingml/2006/main" xmlns:p="http://schemas.openxmlformats.org/presentationml/2006/main" xmlns:r="http://schemas.openxmlformats.org/officeDocument/2006/relationships">
+<p:notes xmlns:a="http://schemas.openxmlformats.org/drawingml/2006/main" xmlns:r="http://schemas.openxmlformats.org/officeDocument/2006/relationships" xmlns:p="http://schemas.openxmlformats.org/presentationml/2006/main">
   <p:cSld>
     <p:spTree>
       <p:nvGrpSpPr>
@@ -1048,7 +842,7 @@
         <p:nvSpPr>
           <p:cNvPr id="2" name="Slide Image Placeholder 1"/>
           <p:cNvSpPr>
-            <a:spLocks noGrp="1"/>
+            <a:spLocks noGrp="1" noRot="1" noChangeAspect="1"/>
           </p:cNvSpPr>
           <p:nvPr>
             <p:ph type="sldImg" idx="2"/>
@@ -1063,7 +857,7 @@
             <a:spLocks noGrp="1"/>
           </p:cNvSpPr>
           <p:nvPr>
-            <p:ph type="body" idx="3" sz="quarter"/>
+            <p:ph type="body" sz="quarter" idx="3"/>
           </p:nvPr>
         </p:nvSpPr>
         <p:spPr/>
@@ -1084,7 +878,7 @@
             <a:spLocks noGrp="1"/>
           </p:cNvSpPr>
           <p:nvPr>
-            <p:ph type="sldNum" idx="5" sz="quarter"/>
+            <p:ph type="sldNum" sz="quarter" idx="5"/>
           </p:nvPr>
         </p:nvSpPr>
         <p:spPr/>
@@ -1098,7 +892,7 @@
 </file>
 
 <file path=ppt/notesSlides/notesSlide8.xml><?xml version="1.0" encoding="utf-8"?>
-<p:notes xmlns:a="http://schemas.openxmlformats.org/drawingml/2006/main" xmlns:p="http://schemas.openxmlformats.org/presentationml/2006/main" xmlns:r="http://schemas.openxmlformats.org/officeDocument/2006/relationships">
+<p:notes xmlns:a="http://schemas.openxmlformats.org/drawingml/2006/main" xmlns:r="http://schemas.openxmlformats.org/officeDocument/2006/relationships" xmlns:p="http://schemas.openxmlformats.org/presentationml/2006/main">
   <p:cSld>
     <p:spTree>
       <p:nvGrpSpPr>
@@ -1118,7 +912,7 @@
         <p:nvSpPr>
           <p:cNvPr id="2" name="Slide Image Placeholder 1"/>
           <p:cNvSpPr>
-            <a:spLocks noGrp="1"/>
+            <a:spLocks noGrp="1" noRot="1" noChangeAspect="1"/>
           </p:cNvSpPr>
           <p:nvPr>
             <p:ph type="sldImg" idx="2"/>
@@ -1133,7 +927,7 @@
             <a:spLocks noGrp="1"/>
           </p:cNvSpPr>
           <p:nvPr>
-            <p:ph type="body" idx="3" sz="quarter"/>
+            <p:ph type="body" sz="quarter" idx="3"/>
           </p:nvPr>
         </p:nvSpPr>
         <p:spPr/>
@@ -1154,7 +948,7 @@
             <a:spLocks noGrp="1"/>
           </p:cNvSpPr>
           <p:nvPr>
-            <p:ph type="sldNum" idx="5" sz="quarter"/>
+            <p:ph type="sldNum" sz="quarter" idx="5"/>
           </p:nvPr>
         </p:nvSpPr>
         <p:spPr/>
@@ -1168,7 +962,7 @@
 </file>
 
 <file path=ppt/notesSlides/notesSlide9.xml><?xml version="1.0" encoding="utf-8"?>
-<p:notes xmlns:a="http://schemas.openxmlformats.org/drawingml/2006/main" xmlns:p="http://schemas.openxmlformats.org/presentationml/2006/main" xmlns:r="http://schemas.openxmlformats.org/officeDocument/2006/relationships">
+<p:notes xmlns:a="http://schemas.openxmlformats.org/drawingml/2006/main" xmlns:r="http://schemas.openxmlformats.org/officeDocument/2006/relationships" xmlns:p="http://schemas.openxmlformats.org/presentationml/2006/main">
   <p:cSld>
     <p:spTree>
       <p:nvGrpSpPr>
@@ -1188,7 +982,7 @@
         <p:nvSpPr>
           <p:cNvPr id="2" name="Slide Image Placeholder 1"/>
           <p:cNvSpPr>
-            <a:spLocks noGrp="1"/>
+            <a:spLocks noGrp="1" noRot="1" noChangeAspect="1"/>
           </p:cNvSpPr>
           <p:nvPr>
             <p:ph type="sldImg" idx="2"/>
@@ -1203,7 +997,7 @@
             <a:spLocks noGrp="1"/>
           </p:cNvSpPr>
           <p:nvPr>
-            <p:ph type="body" idx="3" sz="quarter"/>
+            <p:ph type="body" sz="quarter" idx="3"/>
           </p:nvPr>
         </p:nvSpPr>
         <p:spPr/>
@@ -1224,7 +1018,7 @@
             <a:spLocks noGrp="1"/>
           </p:cNvSpPr>
           <p:nvPr>
-            <p:ph type="sldNum" idx="5" sz="quarter"/>
+            <p:ph type="sldNum" sz="quarter" idx="5"/>
           </p:nvPr>
         </p:nvSpPr>
         <p:spPr/>
@@ -1275,10 +1069,9 @@
           <a:lstStyle/>
           <a:p>
             <a:r>
-              <a:rPr lang="en-US" smtClean="0"/>
+              <a:rPr lang="en-US"/>
               <a:t>Click to edit Master title style</a:t>
             </a:r>
-            <a:endParaRPr lang="en-US"/>
           </a:p>
         </p:txBody>
       </p:sp>
@@ -1394,10 +1187,9 @@
           </a:lstStyle>
           <a:p>
             <a:r>
-              <a:rPr lang="en-US" smtClean="0"/>
+              <a:rPr lang="en-US"/>
               <a:t>Click to edit Master subtitle style</a:t>
             </a:r>
-            <a:endParaRPr lang="en-US"/>
           </a:p>
         </p:txBody>
       </p:sp>
@@ -1418,7 +1210,7 @@
           <a:p>
             <a:fld id="{5BCAD085-E8A6-8845-BD4E-CB4CCA059FC4}" type="datetimeFigureOut">
               <a:rPr lang="en-US" smtClean="0"/>
-              <a:t>1/27/13</a:t>
+              <a:t>10/23/2026</a:t>
             </a:fld>
             <a:endParaRPr lang="en-US"/>
           </a:p>
@@ -1460,7 +1252,7 @@
           <a:p>
             <a:fld id="{C1FF6DA9-008F-8B48-92A6-B652298478BF}" type="slidenum">
               <a:rPr lang="en-US" smtClean="0"/>
-              <a:t>‹#›</a:t>
+              <a:t>‹N°›</a:t>
             </a:fld>
             <a:endParaRPr lang="en-US"/>
           </a:p>
@@ -1512,10 +1304,9 @@
           <a:lstStyle/>
           <a:p>
             <a:r>
-              <a:rPr lang="en-US" smtClean="0"/>
+              <a:rPr lang="en-US"/>
               <a:t>Click to edit Master title style</a:t>
             </a:r>
-            <a:endParaRPr lang="en-US"/>
           </a:p>
         </p:txBody>
       </p:sp>
@@ -1536,38 +1327,37 @@
           <a:p>
             <a:pPr lvl="0"/>
             <a:r>
-              <a:rPr lang="en-US" smtClean="0"/>
+              <a:rPr lang="en-US"/>
               <a:t>Click to edit Master text styles</a:t>
             </a:r>
           </a:p>
           <a:p>
             <a:pPr lvl="1"/>
             <a:r>
-              <a:rPr lang="en-US" smtClean="0"/>
+              <a:rPr lang="en-US"/>
               <a:t>Second level</a:t>
             </a:r>
           </a:p>
           <a:p>
             <a:pPr lvl="2"/>
             <a:r>
-              <a:rPr lang="en-US" smtClean="0"/>
+              <a:rPr lang="en-US"/>
               <a:t>Third level</a:t>
             </a:r>
           </a:p>
           <a:p>
             <a:pPr lvl="3"/>
             <a:r>
-              <a:rPr lang="en-US" smtClean="0"/>
+              <a:rPr lang="en-US"/>
               <a:t>Fourth level</a:t>
             </a:r>
           </a:p>
           <a:p>
             <a:pPr lvl="4"/>
             <a:r>
-              <a:rPr lang="en-US" smtClean="0"/>
+              <a:rPr lang="en-US"/>
               <a:t>Fifth level</a:t>
             </a:r>
-            <a:endParaRPr lang="en-US"/>
           </a:p>
         </p:txBody>
       </p:sp>
@@ -1588,7 +1378,7 @@
           <a:p>
             <a:fld id="{5BCAD085-E8A6-8845-BD4E-CB4CCA059FC4}" type="datetimeFigureOut">
               <a:rPr lang="en-US" smtClean="0"/>
-              <a:t>1/27/13</a:t>
+              <a:t>10/23/2026</a:t>
             </a:fld>
             <a:endParaRPr lang="en-US"/>
           </a:p>
@@ -1630,7 +1420,7 @@
           <a:p>
             <a:fld id="{C1FF6DA9-008F-8B48-92A6-B652298478BF}" type="slidenum">
               <a:rPr lang="en-US" smtClean="0"/>
-              <a:t>‹#›</a:t>
+              <a:t>‹N°›</a:t>
             </a:fld>
             <a:endParaRPr lang="en-US"/>
           </a:p>
@@ -1687,10 +1477,9 @@
           <a:lstStyle/>
           <a:p>
             <a:r>
-              <a:rPr lang="en-US" smtClean="0"/>
+              <a:rPr lang="en-US"/>
               <a:t>Click to edit Master title style</a:t>
             </a:r>
-            <a:endParaRPr lang="en-US"/>
           </a:p>
         </p:txBody>
       </p:sp>
@@ -1716,38 +1505,37 @@
           <a:p>
             <a:pPr lvl="0"/>
             <a:r>
-              <a:rPr lang="en-US" smtClean="0"/>
+              <a:rPr lang="en-US"/>
               <a:t>Click to edit Master text styles</a:t>
             </a:r>
           </a:p>
           <a:p>
             <a:pPr lvl="1"/>
             <a:r>
-              <a:rPr lang="en-US" smtClean="0"/>
+              <a:rPr lang="en-US"/>
               <a:t>Second level</a:t>
             </a:r>
           </a:p>
           <a:p>
             <a:pPr lvl="2"/>
             <a:r>
-              <a:rPr lang="en-US" smtClean="0"/>
+              <a:rPr lang="en-US"/>
               <a:t>Third level</a:t>
             </a:r>
           </a:p>
           <a:p>
             <a:pPr lvl="3"/>
             <a:r>
-              <a:rPr lang="en-US" smtClean="0"/>
+              <a:rPr lang="en-US"/>
               <a:t>Fourth level</a:t>
             </a:r>
           </a:p>
           <a:p>
             <a:pPr lvl="4"/>
             <a:r>
-              <a:rPr lang="en-US" smtClean="0"/>
+              <a:rPr lang="en-US"/>
               <a:t>Fifth level</a:t>
             </a:r>
-            <a:endParaRPr lang="en-US"/>
           </a:p>
         </p:txBody>
       </p:sp>
@@ -1768,7 +1556,7 @@
           <a:p>
             <a:fld id="{5BCAD085-E8A6-8845-BD4E-CB4CCA059FC4}" type="datetimeFigureOut">
               <a:rPr lang="en-US" smtClean="0"/>
-              <a:t>1/27/13</a:t>
+              <a:t>10/23/2026</a:t>
             </a:fld>
             <a:endParaRPr lang="en-US"/>
           </a:p>
@@ -1810,7 +1598,7 @@
           <a:p>
             <a:fld id="{C1FF6DA9-008F-8B48-92A6-B652298478BF}" type="slidenum">
               <a:rPr lang="en-US" smtClean="0"/>
-              <a:t>‹#›</a:t>
+              <a:t>‹N°›</a:t>
             </a:fld>
             <a:endParaRPr lang="en-US"/>
           </a:p>
@@ -1862,10 +1650,9 @@
           <a:lstStyle/>
           <a:p>
             <a:r>
-              <a:rPr lang="en-US" smtClean="0"/>
+              <a:rPr lang="en-US"/>
               <a:t>Click to edit Master title style</a:t>
             </a:r>
-            <a:endParaRPr lang="en-US"/>
           </a:p>
         </p:txBody>
       </p:sp>
@@ -1886,38 +1673,37 @@
           <a:p>
             <a:pPr lvl="0"/>
             <a:r>
-              <a:rPr lang="en-US" smtClean="0"/>
+              <a:rPr lang="en-US"/>
               <a:t>Click to edit Master text styles</a:t>
             </a:r>
           </a:p>
           <a:p>
             <a:pPr lvl="1"/>
             <a:r>
-              <a:rPr lang="en-US" smtClean="0"/>
+              <a:rPr lang="en-US"/>
               <a:t>Second level</a:t>
             </a:r>
           </a:p>
           <a:p>
             <a:pPr lvl="2"/>
             <a:r>
-              <a:rPr lang="en-US" smtClean="0"/>
+              <a:rPr lang="en-US"/>
               <a:t>Third level</a:t>
             </a:r>
           </a:p>
           <a:p>
             <a:pPr lvl="3"/>
             <a:r>
-              <a:rPr lang="en-US" smtClean="0"/>
+              <a:rPr lang="en-US"/>
               <a:t>Fourth level</a:t>
             </a:r>
           </a:p>
           <a:p>
             <a:pPr lvl="4"/>
             <a:r>
-              <a:rPr lang="en-US" smtClean="0"/>
+              <a:rPr lang="en-US"/>
               <a:t>Fifth level</a:t>
             </a:r>
-            <a:endParaRPr lang="en-US"/>
           </a:p>
         </p:txBody>
       </p:sp>
@@ -1938,7 +1724,7 @@
           <a:p>
             <a:fld id="{5BCAD085-E8A6-8845-BD4E-CB4CCA059FC4}" type="datetimeFigureOut">
               <a:rPr lang="en-US" smtClean="0"/>
-              <a:t>1/27/13</a:t>
+              <a:t>10/23/2026</a:t>
             </a:fld>
             <a:endParaRPr lang="en-US"/>
           </a:p>
@@ -1980,7 +1766,7 @@
           <a:p>
             <a:fld id="{C1FF6DA9-008F-8B48-92A6-B652298478BF}" type="slidenum">
               <a:rPr lang="en-US" smtClean="0"/>
-              <a:t>‹#›</a:t>
+              <a:t>‹N°›</a:t>
             </a:fld>
             <a:endParaRPr lang="en-US"/>
           </a:p>
@@ -2041,10 +1827,9 @@
           </a:lstStyle>
           <a:p>
             <a:r>
-              <a:rPr lang="en-US" smtClean="0"/>
+              <a:rPr lang="en-US"/>
               <a:t>Click to edit Master title style</a:t>
             </a:r>
-            <a:endParaRPr lang="en-US"/>
           </a:p>
         </p:txBody>
       </p:sp>
@@ -2161,7 +1946,7 @@
           <a:p>
             <a:pPr lvl="0"/>
             <a:r>
-              <a:rPr lang="en-US" smtClean="0"/>
+              <a:rPr lang="en-US"/>
               <a:t>Click to edit Master text styles</a:t>
             </a:r>
           </a:p>
@@ -2184,7 +1969,7 @@
           <a:p>
             <a:fld id="{5BCAD085-E8A6-8845-BD4E-CB4CCA059FC4}" type="datetimeFigureOut">
               <a:rPr lang="en-US" smtClean="0"/>
-              <a:t>1/27/13</a:t>
+              <a:t>10/23/2026</a:t>
             </a:fld>
             <a:endParaRPr lang="en-US"/>
           </a:p>
@@ -2226,7 +2011,7 @@
           <a:p>
             <a:fld id="{C1FF6DA9-008F-8B48-92A6-B652298478BF}" type="slidenum">
               <a:rPr lang="en-US" smtClean="0"/>
-              <a:t>‹#›</a:t>
+              <a:t>‹N°›</a:t>
             </a:fld>
             <a:endParaRPr lang="en-US"/>
           </a:p>
@@ -2278,10 +2063,9 @@
           <a:lstStyle/>
           <a:p>
             <a:r>
-              <a:rPr lang="en-US" smtClean="0"/>
+              <a:rPr lang="en-US"/>
               <a:t>Click to edit Master title style</a:t>
             </a:r>
-            <a:endParaRPr lang="en-US"/>
           </a:p>
         </p:txBody>
       </p:sp>
@@ -2335,38 +2119,37 @@
           <a:p>
             <a:pPr lvl="0"/>
             <a:r>
-              <a:rPr lang="en-US" smtClean="0"/>
+              <a:rPr lang="en-US"/>
               <a:t>Click to edit Master text styles</a:t>
             </a:r>
           </a:p>
           <a:p>
             <a:pPr lvl="1"/>
             <a:r>
-              <a:rPr lang="en-US" smtClean="0"/>
+              <a:rPr lang="en-US"/>
               <a:t>Second level</a:t>
             </a:r>
           </a:p>
           <a:p>
             <a:pPr lvl="2"/>
             <a:r>
-              <a:rPr lang="en-US" smtClean="0"/>
+              <a:rPr lang="en-US"/>
               <a:t>Third level</a:t>
             </a:r>
           </a:p>
           <a:p>
             <a:pPr lvl="3"/>
             <a:r>
-              <a:rPr lang="en-US" smtClean="0"/>
+              <a:rPr lang="en-US"/>
               <a:t>Fourth level</a:t>
             </a:r>
           </a:p>
           <a:p>
             <a:pPr lvl="4"/>
             <a:r>
-              <a:rPr lang="en-US" smtClean="0"/>
+              <a:rPr lang="en-US"/>
               <a:t>Fifth level</a:t>
             </a:r>
-            <a:endParaRPr lang="en-US"/>
           </a:p>
         </p:txBody>
       </p:sp>
@@ -2420,38 +2203,37 @@
           <a:p>
             <a:pPr lvl="0"/>
             <a:r>
-              <a:rPr lang="en-US" smtClean="0"/>
+              <a:rPr lang="en-US"/>
               <a:t>Click to edit Master text styles</a:t>
             </a:r>
           </a:p>
           <a:p>
             <a:pPr lvl="1"/>
             <a:r>
-              <a:rPr lang="en-US" smtClean="0"/>
+              <a:rPr lang="en-US"/>
               <a:t>Second level</a:t>
             </a:r>
           </a:p>
           <a:p>
             <a:pPr lvl="2"/>
             <a:r>
-              <a:rPr lang="en-US" smtClean="0"/>
+              <a:rPr lang="en-US"/>
               <a:t>Third level</a:t>
             </a:r>
           </a:p>
           <a:p>
             <a:pPr lvl="3"/>
             <a:r>
-              <a:rPr lang="en-US" smtClean="0"/>
+              <a:rPr lang="en-US"/>
               <a:t>Fourth level</a:t>
             </a:r>
           </a:p>
           <a:p>
             <a:pPr lvl="4"/>
             <a:r>
-              <a:rPr lang="en-US" smtClean="0"/>
+              <a:rPr lang="en-US"/>
               <a:t>Fifth level</a:t>
             </a:r>
-            <a:endParaRPr lang="en-US"/>
           </a:p>
         </p:txBody>
       </p:sp>
@@ -2472,7 +2254,7 @@
           <a:p>
             <a:fld id="{5BCAD085-E8A6-8845-BD4E-CB4CCA059FC4}" type="datetimeFigureOut">
               <a:rPr lang="en-US" smtClean="0"/>
-              <a:t>1/27/13</a:t>
+              <a:t>10/23/2026</a:t>
             </a:fld>
             <a:endParaRPr lang="en-US"/>
           </a:p>
@@ -2514,7 +2296,7 @@
           <a:p>
             <a:fld id="{C1FF6DA9-008F-8B48-92A6-B652298478BF}" type="slidenum">
               <a:rPr lang="en-US" smtClean="0"/>
-              <a:t>‹#›</a:t>
+              <a:t>‹N°›</a:t>
             </a:fld>
             <a:endParaRPr lang="en-US"/>
           </a:p>
@@ -2570,10 +2352,9 @@
           </a:lstStyle>
           <a:p>
             <a:r>
-              <a:rPr lang="en-US" smtClean="0"/>
+              <a:rPr lang="en-US"/>
               <a:t>Click to edit Master title style</a:t>
             </a:r>
-            <a:endParaRPr lang="en-US"/>
           </a:p>
         </p:txBody>
       </p:sp>
@@ -2636,7 +2417,7 @@
           <a:p>
             <a:pPr lvl="0"/>
             <a:r>
-              <a:rPr lang="en-US" smtClean="0"/>
+              <a:rPr lang="en-US"/>
               <a:t>Click to edit Master text styles</a:t>
             </a:r>
           </a:p>
@@ -2692,38 +2473,37 @@
           <a:p>
             <a:pPr lvl="0"/>
             <a:r>
-              <a:rPr lang="en-US" smtClean="0"/>
+              <a:rPr lang="en-US"/>
               <a:t>Click to edit Master text styles</a:t>
             </a:r>
           </a:p>
           <a:p>
             <a:pPr lvl="1"/>
             <a:r>
-              <a:rPr lang="en-US" smtClean="0"/>
+              <a:rPr lang="en-US"/>
               <a:t>Second level</a:t>
             </a:r>
           </a:p>
           <a:p>
             <a:pPr lvl="2"/>
             <a:r>
-              <a:rPr lang="en-US" smtClean="0"/>
+              <a:rPr lang="en-US"/>
               <a:t>Third level</a:t>
             </a:r>
           </a:p>
           <a:p>
             <a:pPr lvl="3"/>
             <a:r>
-              <a:rPr lang="en-US" smtClean="0"/>
+              <a:rPr lang="en-US"/>
               <a:t>Fourth level</a:t>
             </a:r>
           </a:p>
           <a:p>
             <a:pPr lvl="4"/>
             <a:r>
-              <a:rPr lang="en-US" smtClean="0"/>
+              <a:rPr lang="en-US"/>
               <a:t>Fifth level</a:t>
             </a:r>
-            <a:endParaRPr lang="en-US"/>
           </a:p>
         </p:txBody>
       </p:sp>
@@ -2786,7 +2566,7 @@
           <a:p>
             <a:pPr lvl="0"/>
             <a:r>
-              <a:rPr lang="en-US" smtClean="0"/>
+              <a:rPr lang="en-US"/>
               <a:t>Click to edit Master text styles</a:t>
             </a:r>
           </a:p>
@@ -2842,38 +2622,37 @@
           <a:p>
             <a:pPr lvl="0"/>
             <a:r>
-              <a:rPr lang="en-US" smtClean="0"/>
+              <a:rPr lang="en-US"/>
               <a:t>Click to edit Master text styles</a:t>
             </a:r>
           </a:p>
           <a:p>
             <a:pPr lvl="1"/>
             <a:r>
-              <a:rPr lang="en-US" smtClean="0"/>
+              <a:rPr lang="en-US"/>
               <a:t>Second level</a:t>
             </a:r>
           </a:p>
           <a:p>
             <a:pPr lvl="2"/>
             <a:r>
-              <a:rPr lang="en-US" smtClean="0"/>
+              <a:rPr lang="en-US"/>
               <a:t>Third level</a:t>
             </a:r>
           </a:p>
           <a:p>
             <a:pPr lvl="3"/>
             <a:r>
-              <a:rPr lang="en-US" smtClean="0"/>
+              <a:rPr lang="en-US"/>
               <a:t>Fourth level</a:t>
             </a:r>
           </a:p>
           <a:p>
             <a:pPr lvl="4"/>
             <a:r>
-              <a:rPr lang="en-US" smtClean="0"/>
+              <a:rPr lang="en-US"/>
               <a:t>Fifth level</a:t>
             </a:r>
-            <a:endParaRPr lang="en-US"/>
           </a:p>
         </p:txBody>
       </p:sp>
@@ -2894,7 +2673,7 @@
           <a:p>
             <a:fld id="{5BCAD085-E8A6-8845-BD4E-CB4CCA059FC4}" type="datetimeFigureOut">
               <a:rPr lang="en-US" smtClean="0"/>
-              <a:t>1/27/13</a:t>
+              <a:t>10/23/2026</a:t>
             </a:fld>
             <a:endParaRPr lang="en-US"/>
           </a:p>
@@ -2936,7 +2715,7 @@
           <a:p>
             <a:fld id="{C1FF6DA9-008F-8B48-92A6-B652298478BF}" type="slidenum">
               <a:rPr lang="en-US" smtClean="0"/>
-              <a:t>‹#›</a:t>
+              <a:t>‹N°›</a:t>
             </a:fld>
             <a:endParaRPr lang="en-US"/>
           </a:p>
@@ -2988,10 +2767,9 @@
           <a:lstStyle/>
           <a:p>
             <a:r>
-              <a:rPr lang="en-US" smtClean="0"/>
+              <a:rPr lang="en-US"/>
               <a:t>Click to edit Master title style</a:t>
             </a:r>
-            <a:endParaRPr lang="en-US"/>
           </a:p>
         </p:txBody>
       </p:sp>
@@ -3012,7 +2790,7 @@
           <a:p>
             <a:fld id="{5BCAD085-E8A6-8845-BD4E-CB4CCA059FC4}" type="datetimeFigureOut">
               <a:rPr lang="en-US" smtClean="0"/>
-              <a:t>1/27/13</a:t>
+              <a:t>10/23/2026</a:t>
             </a:fld>
             <a:endParaRPr lang="en-US"/>
           </a:p>
@@ -3054,7 +2832,7 @@
           <a:p>
             <a:fld id="{C1FF6DA9-008F-8B48-92A6-B652298478BF}" type="slidenum">
               <a:rPr lang="en-US" smtClean="0"/>
-              <a:t>‹#›</a:t>
+              <a:t>‹N°›</a:t>
             </a:fld>
             <a:endParaRPr lang="en-US"/>
           </a:p>
@@ -3107,7 +2885,7 @@
           <a:p>
             <a:fld id="{5BCAD085-E8A6-8845-BD4E-CB4CCA059FC4}" type="datetimeFigureOut">
               <a:rPr lang="en-US" smtClean="0"/>
-              <a:t>1/27/13</a:t>
+              <a:t>10/23/2026</a:t>
             </a:fld>
             <a:endParaRPr lang="en-US"/>
           </a:p>
@@ -3149,7 +2927,7 @@
           <a:p>
             <a:fld id="{C1FF6DA9-008F-8B48-92A6-B652298478BF}" type="slidenum">
               <a:rPr lang="en-US" smtClean="0"/>
-              <a:t>‹#›</a:t>
+              <a:t>‹N°›</a:t>
             </a:fld>
             <a:endParaRPr lang="en-US"/>
           </a:p>
@@ -3210,10 +2988,9 @@
           </a:lstStyle>
           <a:p>
             <a:r>
-              <a:rPr lang="en-US" smtClean="0"/>
+              <a:rPr lang="en-US"/>
               <a:t>Click to edit Master title style</a:t>
             </a:r>
-            <a:endParaRPr lang="en-US"/>
           </a:p>
         </p:txBody>
       </p:sp>
@@ -3267,38 +3044,37 @@
           <a:p>
             <a:pPr lvl="0"/>
             <a:r>
-              <a:rPr lang="en-US" smtClean="0"/>
+              <a:rPr lang="en-US"/>
               <a:t>Click to edit Master text styles</a:t>
             </a:r>
           </a:p>
           <a:p>
             <a:pPr lvl="1"/>
             <a:r>
-              <a:rPr lang="en-US" smtClean="0"/>
+              <a:rPr lang="en-US"/>
               <a:t>Second level</a:t>
             </a:r>
           </a:p>
           <a:p>
             <a:pPr lvl="2"/>
             <a:r>
-              <a:rPr lang="en-US" smtClean="0"/>
+              <a:rPr lang="en-US"/>
               <a:t>Third level</a:t>
             </a:r>
           </a:p>
           <a:p>
             <a:pPr lvl="3"/>
             <a:r>
-              <a:rPr lang="en-US" smtClean="0"/>
+              <a:rPr lang="en-US"/>
               <a:t>Fourth level</a:t>
             </a:r>
           </a:p>
           <a:p>
             <a:pPr lvl="4"/>
             <a:r>
-              <a:rPr lang="en-US" smtClean="0"/>
+              <a:rPr lang="en-US"/>
               <a:t>Fifth level</a:t>
             </a:r>
-            <a:endParaRPr lang="en-US"/>
           </a:p>
         </p:txBody>
       </p:sp>
@@ -3361,7 +3137,7 @@
           <a:p>
             <a:pPr lvl="0"/>
             <a:r>
-              <a:rPr lang="en-US" smtClean="0"/>
+              <a:rPr lang="en-US"/>
               <a:t>Click to edit Master text styles</a:t>
             </a:r>
           </a:p>
@@ -3384,7 +3160,7 @@
           <a:p>
             <a:fld id="{5BCAD085-E8A6-8845-BD4E-CB4CCA059FC4}" type="datetimeFigureOut">
               <a:rPr lang="en-US" smtClean="0"/>
-              <a:t>1/27/13</a:t>
+              <a:t>10/23/2026</a:t>
             </a:fld>
             <a:endParaRPr lang="en-US"/>
           </a:p>
@@ -3426,7 +3202,7 @@
           <a:p>
             <a:fld id="{C1FF6DA9-008F-8B48-92A6-B652298478BF}" type="slidenum">
               <a:rPr lang="en-US" smtClean="0"/>
-              <a:t>‹#›</a:t>
+              <a:t>‹N°›</a:t>
             </a:fld>
             <a:endParaRPr lang="en-US"/>
           </a:p>
@@ -3487,10 +3263,9 @@
           </a:lstStyle>
           <a:p>
             <a:r>
-              <a:rPr lang="en-US" smtClean="0"/>
+              <a:rPr lang="en-US"/>
               <a:t>Click to edit Master title style</a:t>
             </a:r>
-            <a:endParaRPr lang="en-US"/>
           </a:p>
         </p:txBody>
       </p:sp>
@@ -3614,7 +3389,7 @@
           <a:p>
             <a:pPr lvl="0"/>
             <a:r>
-              <a:rPr lang="en-US" smtClean="0"/>
+              <a:rPr lang="en-US"/>
               <a:t>Click to edit Master text styles</a:t>
             </a:r>
           </a:p>
@@ -3637,7 +3412,7 @@
           <a:p>
             <a:fld id="{5BCAD085-E8A6-8845-BD4E-CB4CCA059FC4}" type="datetimeFigureOut">
               <a:rPr lang="en-US" smtClean="0"/>
-              <a:t>1/27/13</a:t>
+              <a:t>10/23/2026</a:t>
             </a:fld>
             <a:endParaRPr lang="en-US"/>
           </a:p>
@@ -3679,7 +3454,7 @@
           <a:p>
             <a:fld id="{C1FF6DA9-008F-8B48-92A6-B652298478BF}" type="slidenum">
               <a:rPr lang="en-US" smtClean="0"/>
-              <a:t>‹#›</a:t>
+              <a:t>‹N°›</a:t>
             </a:fld>
             <a:endParaRPr lang="en-US"/>
           </a:p>
@@ -3746,10 +3521,9 @@
           <a:lstStyle/>
           <a:p>
             <a:r>
-              <a:rPr lang="en-US" smtClean="0"/>
+              <a:rPr lang="en-US"/>
               <a:t>Click to edit Master title style</a:t>
             </a:r>
-            <a:endParaRPr lang="en-US"/>
           </a:p>
         </p:txBody>
       </p:sp>
@@ -3780,38 +3554,37 @@
           <a:p>
             <a:pPr lvl="0"/>
             <a:r>
-              <a:rPr lang="en-US" smtClean="0"/>
+              <a:rPr lang="en-US"/>
               <a:t>Click to edit Master text styles</a:t>
             </a:r>
           </a:p>
           <a:p>
             <a:pPr lvl="1"/>
             <a:r>
-              <a:rPr lang="en-US" smtClean="0"/>
+              <a:rPr lang="en-US"/>
               <a:t>Second level</a:t>
             </a:r>
           </a:p>
           <a:p>
             <a:pPr lvl="2"/>
             <a:r>
-              <a:rPr lang="en-US" smtClean="0"/>
+              <a:rPr lang="en-US"/>
               <a:t>Third level</a:t>
             </a:r>
           </a:p>
           <a:p>
             <a:pPr lvl="3"/>
             <a:r>
-              <a:rPr lang="en-US" smtClean="0"/>
+              <a:rPr lang="en-US"/>
               <a:t>Fourth level</a:t>
             </a:r>
           </a:p>
           <a:p>
             <a:pPr lvl="4"/>
             <a:r>
-              <a:rPr lang="en-US" smtClean="0"/>
+              <a:rPr lang="en-US"/>
               <a:t>Fifth level</a:t>
             </a:r>
-            <a:endParaRPr lang="en-US"/>
           </a:p>
         </p:txBody>
       </p:sp>
@@ -3850,7 +3623,7 @@
           <a:p>
             <a:fld id="{5BCAD085-E8A6-8845-BD4E-CB4CCA059FC4}" type="datetimeFigureOut">
               <a:rPr lang="en-US" smtClean="0"/>
-              <a:t>1/27/13</a:t>
+              <a:t>10/23/2026</a:t>
             </a:fld>
             <a:endParaRPr lang="en-US"/>
           </a:p>
@@ -3928,7 +3701,7 @@
           <a:p>
             <a:fld id="{C1FF6DA9-008F-8B48-92A6-B652298478BF}" type="slidenum">
               <a:rPr lang="en-US" smtClean="0"/>
-              <a:t>‹#›</a:t>
+              <a:t>‹N°›</a:t>
             </a:fld>
             <a:endParaRPr lang="en-US"/>
           </a:p>
@@ -4209,7 +3982,7 @@
 </file>
 
 <file path=ppt/slides/slide1.xml><?xml version="1.0" encoding="utf-8"?>
-<p:sld xmlns:a="http://schemas.openxmlformats.org/drawingml/2006/main" xmlns:p="http://schemas.openxmlformats.org/presentationml/2006/main" xmlns:r="http://schemas.openxmlformats.org/officeDocument/2006/relationships">
+<p:sld xmlns:a="http://schemas.openxmlformats.org/drawingml/2006/main" xmlns:r="http://schemas.openxmlformats.org/officeDocument/2006/relationships" xmlns:p="http://schemas.openxmlformats.org/presentationml/2006/main">
   <p:cSld>
     <p:bg>
       <p:bgPr>
@@ -4225,7 +3998,14 @@
         <p:cNvGrpSpPr/>
         <p:nvPr/>
       </p:nvGrpSpPr>
-      <p:grpSpPr/>
+      <p:grpSpPr>
+        <a:xfrm>
+          <a:off x="0" y="0"/>
+          <a:ext cx="0" cy="0"/>
+          <a:chOff x="0" y="0"/>
+          <a:chExt cx="0" cy="0"/>
+        </a:xfrm>
+      </p:grpSpPr>
       <p:pic>
         <p:nvPicPr>
           <p:cNvPr id="2" name="Picture 1" descr="logo-light.png"/>
@@ -4287,10 +4067,11 @@
           </a:fontRef>
         </p:style>
         <p:txBody>
-          <a:bodyPr rtlCol="0" anchor="t" wrap="square" lIns="0" rIns="0" tIns="0" bIns="0"/>
+          <a:bodyPr wrap="square" lIns="0" tIns="0" rIns="0" bIns="0" rtlCol="0" anchor="t"/>
           <a:lstStyle/>
           <a:p>
             <a:pPr algn="ctr"/>
+            <a:endParaRPr/>
           </a:p>
         </p:txBody>
       </p:sp>
@@ -4329,7 +4110,7 @@
           </a:fontRef>
         </p:style>
         <p:txBody>
-          <a:bodyPr rtlCol="0" anchor="t" wrap="square" lIns="0" rIns="0" tIns="0" bIns="0"/>
+          <a:bodyPr wrap="square" lIns="0" tIns="0" rIns="0" bIns="0" rtlCol="0" anchor="t"/>
           <a:lstStyle/>
           <a:p>
             <a:pPr algn="l">
@@ -4387,7 +4168,7 @@
           </a:fontRef>
         </p:style>
         <p:txBody>
-          <a:bodyPr rtlCol="0" anchor="t" wrap="square" lIns="0" rIns="0" tIns="0" bIns="0"/>
+          <a:bodyPr wrap="square" lIns="0" tIns="0" rIns="0" bIns="0" rtlCol="0" anchor="t"/>
           <a:lstStyle/>
           <a:p>
             <a:pPr algn="l">
@@ -4403,61 +4184,6 @@
                 <a:latin typeface="Arial"/>
               </a:rPr>
               <a:t>Gestion locative et services immobiliers à Bonanjo, Douala</a:t>
-            </a:r>
-          </a:p>
-        </p:txBody>
-      </p:sp>
-      <p:sp>
-        <p:nvSpPr>
-          <p:cNvPr id="6" name="Rectangle 5"/>
-          <p:cNvSpPr/>
-          <p:nvPr/>
-        </p:nvSpPr>
-        <p:spPr>
-          <a:xfrm>
-            <a:off x="812800" y="5969000"/>
-            <a:ext cx="7620000" cy="254000"/>
-          </a:xfrm>
-          <a:prstGeom prst="rect">
-            <a:avLst/>
-          </a:prstGeom>
-          <a:noFill/>
-          <a:ln>
-            <a:noFill/>
-          </a:ln>
-          <a:effectLst/>
-        </p:spPr>
-        <p:style>
-          <a:lnRef idx="1">
-            <a:schemeClr val="accent1"/>
-          </a:lnRef>
-          <a:fillRef idx="3">
-            <a:schemeClr val="accent1"/>
-          </a:fillRef>
-          <a:effectRef idx="2">
-            <a:schemeClr val="accent1"/>
-          </a:effectRef>
-          <a:fontRef idx="minor">
-            <a:schemeClr val="lt1"/>
-          </a:fontRef>
-        </p:style>
-        <p:txBody>
-          <a:bodyPr rtlCol="0" anchor="t" wrap="square" lIns="0" rIns="0" tIns="0" bIns="0"/>
-          <a:lstStyle/>
-          <a:p>
-            <a:pPr algn="l">
-              <a:spcAft>
-                <a:spcPts val="0"/>
-              </a:spcAft>
-            </a:pPr>
-            <a:r>
-              <a:rPr sz="1200" b="0">
-                <a:solidFill>
-                  <a:srgbClr val="BDB6A3"/>
-                </a:solidFill>
-                <a:latin typeface="Arial"/>
-              </a:rPr>
-              <a:t>Présentation aux investisseurs · Octobre 2026</a:t>
             </a:r>
           </a:p>
         </p:txBody>
@@ -4494,14 +4220,14 @@
                             </p:stCondLst>
                             <p:childTnLst>
                               <p:par>
-                                <p:cTn id="7" presetID="10" presetClass="entr" presetSubtype="0" fill="hold" nodeType="afterEffect">
+                                <p:cTn id="5" presetID="10" presetClass="entr" presetSubtype="0" fill="hold" nodeType="afterEffect">
                                   <p:stCondLst>
                                     <p:cond delay="0"/>
                                   </p:stCondLst>
                                   <p:childTnLst>
                                     <p:set>
                                       <p:cBhvr>
-                                        <p:cTn id="5" dur="1" fill="hold">
+                                        <p:cTn id="6" dur="1" fill="hold">
                                           <p:stCondLst>
                                             <p:cond delay="0"/>
                                           </p:stCondLst>
@@ -4519,7 +4245,7 @@
                                     </p:set>
                                     <p:animEffect transition="in" filter="fade">
                                       <p:cBhvr>
-                                        <p:cTn id="6" dur="500"/>
+                                        <p:cTn id="7" dur="500"/>
                                         <p:tgtEl>
                                           <p:spTgt spid="2"/>
                                         </p:tgtEl>
@@ -4538,14 +4264,14 @@
                             </p:stCondLst>
                             <p:childTnLst>
                               <p:par>
-                                <p:cTn id="11" presetID="22" presetClass="entr" presetSubtype="8" fill="hold" grpId="0" nodeType="afterEffect">
+                                <p:cTn id="9" presetID="22" presetClass="entr" presetSubtype="8" fill="hold" grpId="0" nodeType="afterEffect">
                                   <p:stCondLst>
                                     <p:cond delay="0"/>
                                   </p:stCondLst>
                                   <p:childTnLst>
                                     <p:set>
                                       <p:cBhvr>
-                                        <p:cTn id="9" dur="1" fill="hold">
+                                        <p:cTn id="10" dur="1" fill="hold">
                                           <p:stCondLst>
                                             <p:cond delay="0"/>
                                           </p:stCondLst>
@@ -4563,7 +4289,7 @@
                                     </p:set>
                                     <p:animEffect transition="in" filter="wipe(left)">
                                       <p:cBhvr>
-                                        <p:cTn id="10" dur="500"/>
+                                        <p:cTn id="11" dur="500"/>
                                         <p:tgtEl>
                                           <p:spTgt spid="3"/>
                                         </p:tgtEl>
@@ -4582,14 +4308,14 @@
                             </p:stCondLst>
                             <p:childTnLst>
                               <p:par>
-                                <p:cTn id="15" presetID="22" presetClass="entr" presetSubtype="4" fill="hold" grpId="0" nodeType="afterEffect">
+                                <p:cTn id="13" presetID="22" presetClass="entr" presetSubtype="4" fill="hold" grpId="0" nodeType="afterEffect">
                                   <p:stCondLst>
                                     <p:cond delay="0"/>
                                   </p:stCondLst>
                                   <p:childTnLst>
                                     <p:set>
                                       <p:cBhvr>
-                                        <p:cTn id="13" dur="1" fill="hold">
+                                        <p:cTn id="14" dur="1" fill="hold">
                                           <p:stCondLst>
                                             <p:cond delay="0"/>
                                           </p:stCondLst>
@@ -4607,7 +4333,7 @@
                                     </p:set>
                                     <p:animEffect transition="in" filter="wipe(down)">
                                       <p:cBhvr>
-                                        <p:cTn id="14" dur="500"/>
+                                        <p:cTn id="15" dur="500"/>
                                         <p:tgtEl>
                                           <p:spTgt spid="4"/>
                                         </p:tgtEl>
@@ -4626,14 +4352,14 @@
                             </p:stCondLst>
                             <p:childTnLst>
                               <p:par>
-                                <p:cTn id="19" presetID="22" presetClass="entr" presetSubtype="4" fill="hold" grpId="0" nodeType="afterEffect">
+                                <p:cTn id="17" presetID="22" presetClass="entr" presetSubtype="4" fill="hold" grpId="0" nodeType="afterEffect">
                                   <p:stCondLst>
                                     <p:cond delay="0"/>
                                   </p:stCondLst>
                                   <p:childTnLst>
                                     <p:set>
                                       <p:cBhvr>
-                                        <p:cTn id="17" dur="1" fill="hold">
+                                        <p:cTn id="18" dur="1" fill="hold">
                                           <p:stCondLst>
                                             <p:cond delay="0"/>
                                           </p:stCondLst>
@@ -4651,53 +4377,9 @@
                                     </p:set>
                                     <p:animEffect transition="in" filter="wipe(down)">
                                       <p:cBhvr>
-                                        <p:cTn id="18" dur="500"/>
+                                        <p:cTn id="19" dur="500"/>
                                         <p:tgtEl>
                                           <p:spTgt spid="5"/>
-                                        </p:tgtEl>
-                                      </p:cBhvr>
-                                    </p:animEffect>
-                                  </p:childTnLst>
-                                </p:cTn>
-                              </p:par>
-                            </p:childTnLst>
-                          </p:cTn>
-                        </p:par>
-                        <p:par>
-                          <p:cTn id="20" fill="hold">
-                            <p:stCondLst>
-                              <p:cond delay="2000"/>
-                            </p:stCondLst>
-                            <p:childTnLst>
-                              <p:par>
-                                <p:cTn id="23" presetID="10" presetClass="entr" presetSubtype="0" fill="hold" grpId="0" nodeType="afterEffect">
-                                  <p:stCondLst>
-                                    <p:cond delay="0"/>
-                                  </p:stCondLst>
-                                  <p:childTnLst>
-                                    <p:set>
-                                      <p:cBhvr>
-                                        <p:cTn id="21" dur="1" fill="hold">
-                                          <p:stCondLst>
-                                            <p:cond delay="0"/>
-                                          </p:stCondLst>
-                                        </p:cTn>
-                                        <p:tgtEl>
-                                          <p:spTgt spid="6"/>
-                                        </p:tgtEl>
-                                        <p:attrNameLst>
-                                          <p:attrName>style.visibility</p:attrName>
-                                        </p:attrNameLst>
-                                      </p:cBhvr>
-                                      <p:to>
-                                        <p:strVal val="visible"/>
-                                      </p:to>
-                                    </p:set>
-                                    <p:animEffect transition="in" filter="fade">
-                                      <p:cBhvr>
-                                        <p:cTn id="22" dur="500"/>
-                                        <p:tgtEl>
-                                          <p:spTgt spid="6"/>
                                         </p:tgtEl>
                                       </p:cBhvr>
                                     </p:animEffect>
@@ -4735,14 +4417,13 @@
       <p:bldP spid="3" grpId="0" animBg="1"/>
       <p:bldP spid="4" grpId="0" animBg="1"/>
       <p:bldP spid="5" grpId="0" animBg="1"/>
-      <p:bldP spid="6" grpId="0" animBg="1"/>
     </p:bldLst>
   </p:timing>
 </p:sld>
 </file>
 
 <file path=ppt/slides/slide10.xml><?xml version="1.0" encoding="utf-8"?>
-<p:sld xmlns:a="http://schemas.openxmlformats.org/drawingml/2006/main" xmlns:p="http://schemas.openxmlformats.org/presentationml/2006/main" xmlns:r="http://schemas.openxmlformats.org/officeDocument/2006/relationships">
+<p:sld xmlns:a="http://schemas.openxmlformats.org/drawingml/2006/main" xmlns:r="http://schemas.openxmlformats.org/officeDocument/2006/relationships" xmlns:p="http://schemas.openxmlformats.org/presentationml/2006/main">
   <p:cSld>
     <p:bg>
       <p:bgPr>
@@ -4758,7 +4439,14 @@
         <p:cNvGrpSpPr/>
         <p:nvPr/>
       </p:nvGrpSpPr>
-      <p:grpSpPr/>
+      <p:grpSpPr>
+        <a:xfrm>
+          <a:off x="0" y="0"/>
+          <a:ext cx="0" cy="0"/>
+          <a:chOff x="0" y="0"/>
+          <a:chExt cx="0" cy="0"/>
+        </a:xfrm>
+      </p:grpSpPr>
       <p:sp>
         <p:nvSpPr>
           <p:cNvPr id="2" name="Rectangle 1"/>
@@ -4794,7 +4482,7 @@
           </a:fontRef>
         </p:style>
         <p:txBody>
-          <a:bodyPr rtlCol="0" anchor="t" wrap="square" lIns="0" rIns="0" tIns="0" bIns="0"/>
+          <a:bodyPr wrap="square" lIns="0" tIns="0" rIns="0" bIns="0" rtlCol="0" anchor="t"/>
           <a:lstStyle/>
           <a:p>
             <a:pPr algn="l">
@@ -4849,7 +4537,7 @@
           </a:fontRef>
         </p:style>
         <p:txBody>
-          <a:bodyPr rtlCol="0" anchor="t" wrap="square" lIns="0" rIns="0" tIns="0" bIns="0"/>
+          <a:bodyPr wrap="square" lIns="0" tIns="0" rIns="0" bIns="0" rtlCol="0" anchor="t"/>
           <a:lstStyle/>
           <a:p>
             <a:pPr algn="l">
@@ -4907,7 +4595,7 @@
           </a:fontRef>
         </p:style>
         <p:txBody>
-          <a:bodyPr rtlCol="0" anchor="t" wrap="square" lIns="0" rIns="0" tIns="0" bIns="0"/>
+          <a:bodyPr wrap="square" lIns="0" tIns="0" rIns="0" bIns="0" rtlCol="0" anchor="t"/>
           <a:lstStyle/>
           <a:p>
             <a:pPr algn="l">
@@ -4962,7 +4650,7 @@
           </a:fontRef>
         </p:style>
         <p:txBody>
-          <a:bodyPr rtlCol="0" anchor="t" wrap="square" lIns="0" rIns="0" tIns="0" bIns="0"/>
+          <a:bodyPr wrap="square" lIns="0" tIns="0" rIns="0" bIns="0" rtlCol="0" anchor="t"/>
           <a:lstStyle/>
           <a:p>
             <a:pPr algn="l">
@@ -5017,7 +4705,7 @@
           </a:fontRef>
         </p:style>
         <p:txBody>
-          <a:bodyPr rtlCol="0" anchor="t" wrap="square" lIns="0" rIns="0" tIns="0" bIns="0"/>
+          <a:bodyPr wrap="square" lIns="0" tIns="0" rIns="0" bIns="0" rtlCol="0" anchor="t"/>
           <a:lstStyle/>
           <a:p>
             <a:pPr algn="l">
@@ -5072,7 +4760,7 @@
           </a:fontRef>
         </p:style>
         <p:txBody>
-          <a:bodyPr rtlCol="0" anchor="t" wrap="square" lIns="0" rIns="0" tIns="0" bIns="0"/>
+          <a:bodyPr wrap="square" lIns="0" tIns="0" rIns="0" bIns="0" rtlCol="0" anchor="t"/>
           <a:lstStyle/>
           <a:p>
             <a:pPr algn="l">
@@ -5127,7 +4815,7 @@
           </a:fontRef>
         </p:style>
         <p:txBody>
-          <a:bodyPr rtlCol="0" anchor="t" wrap="square" lIns="0" rIns="0" tIns="0" bIns="0"/>
+          <a:bodyPr wrap="square" lIns="0" tIns="0" rIns="0" bIns="0" rtlCol="0" anchor="t"/>
           <a:lstStyle/>
           <a:p>
             <a:pPr algn="l">
@@ -5182,7 +4870,7 @@
           </a:fontRef>
         </p:style>
         <p:txBody>
-          <a:bodyPr rtlCol="0" anchor="t" wrap="square" lIns="0" rIns="0" tIns="0" bIns="0"/>
+          <a:bodyPr wrap="square" lIns="0" tIns="0" rIns="0" bIns="0" rtlCol="0" anchor="t"/>
           <a:lstStyle/>
           <a:p>
             <a:pPr algn="l">
@@ -5198,61 +4886,6 @@
                 <a:latin typeface="Arial"/>
               </a:rPr>
               <a:t>Étude de marché locale</a:t>
-            </a:r>
-          </a:p>
-        </p:txBody>
-      </p:sp>
-      <p:sp>
-        <p:nvSpPr>
-          <p:cNvPr id="10" name="Rectangle 9"/>
-          <p:cNvSpPr/>
-          <p:nvPr/>
-        </p:nvSpPr>
-        <p:spPr>
-          <a:xfrm>
-            <a:off x="812800" y="5080000"/>
-            <a:ext cx="10566400" cy="508000"/>
-          </a:xfrm>
-          <a:prstGeom prst="rect">
-            <a:avLst/>
-          </a:prstGeom>
-          <a:noFill/>
-          <a:ln>
-            <a:noFill/>
-          </a:ln>
-          <a:effectLst/>
-        </p:spPr>
-        <p:style>
-          <a:lnRef idx="1">
-            <a:schemeClr val="accent1"/>
-          </a:lnRef>
-          <a:fillRef idx="3">
-            <a:schemeClr val="accent1"/>
-          </a:fillRef>
-          <a:effectRef idx="2">
-            <a:schemeClr val="accent1"/>
-          </a:effectRef>
-          <a:fontRef idx="minor">
-            <a:schemeClr val="lt1"/>
-          </a:fontRef>
-        </p:style>
-        <p:txBody>
-          <a:bodyPr rtlCol="0" anchor="t" wrap="square" lIns="0" rIns="0" tIns="0" bIns="0"/>
-          <a:lstStyle/>
-          <a:p>
-            <a:pPr algn="l">
-              <a:spcAft>
-                <a:spcPts val="0"/>
-              </a:spcAft>
-            </a:pPr>
-            <a:r>
-              <a:rPr sz="2200" b="1">
-                <a:solidFill>
-                  <a:srgbClr val="F2B000"/>
-                </a:solidFill>
-                <a:latin typeface="Arial"/>
-              </a:rPr>
-              <a:t>Place à la démonstration en direct</a:t>
             </a:r>
           </a:p>
         </p:txBody>
@@ -5292,7 +4925,7 @@
           </a:fontRef>
         </p:style>
         <p:txBody>
-          <a:bodyPr rtlCol="0" anchor="t" wrap="square" lIns="0" rIns="0" tIns="0" bIns="0"/>
+          <a:bodyPr wrap="square" lIns="0" tIns="0" rIns="0" bIns="0" rtlCol="0" anchor="t"/>
           <a:lstStyle/>
           <a:p>
             <a:pPr algn="l">
@@ -5368,14 +5001,14 @@
                             </p:stCondLst>
                             <p:childTnLst>
                               <p:par>
-                                <p:cTn id="7" presetID="10" presetClass="entr" presetSubtype="0" fill="hold" grpId="0" nodeType="afterEffect">
+                                <p:cTn id="5" presetID="10" presetClass="entr" presetSubtype="0" fill="hold" grpId="0" nodeType="afterEffect">
                                   <p:stCondLst>
                                     <p:cond delay="0"/>
                                   </p:stCondLst>
                                   <p:childTnLst>
                                     <p:set>
                                       <p:cBhvr>
-                                        <p:cTn id="5" dur="1" fill="hold">
+                                        <p:cTn id="6" dur="1" fill="hold">
                                           <p:stCondLst>
                                             <p:cond delay="0"/>
                                           </p:stCondLst>
@@ -5393,7 +5026,7 @@
                                     </p:set>
                                     <p:animEffect transition="in" filter="fade">
                                       <p:cBhvr>
-                                        <p:cTn id="6" dur="500"/>
+                                        <p:cTn id="7" dur="500"/>
                                         <p:tgtEl>
                                           <p:spTgt spid="4"/>
                                         </p:tgtEl>
@@ -5412,14 +5045,14 @@
                             </p:stCondLst>
                             <p:childTnLst>
                               <p:par>
-                                <p:cTn id="11" presetID="10" presetClass="entr" presetSubtype="0" fill="hold" grpId="0" nodeType="afterEffect">
+                                <p:cTn id="9" presetID="10" presetClass="entr" presetSubtype="0" fill="hold" grpId="0" nodeType="afterEffect">
                                   <p:stCondLst>
                                     <p:cond delay="0"/>
                                   </p:stCondLst>
                                   <p:childTnLst>
                                     <p:set>
                                       <p:cBhvr>
-                                        <p:cTn id="9" dur="1" fill="hold">
+                                        <p:cTn id="10" dur="1" fill="hold">
                                           <p:stCondLst>
                                             <p:cond delay="0"/>
                                           </p:stCondLst>
@@ -5437,7 +5070,7 @@
                                     </p:set>
                                     <p:animEffect transition="in" filter="fade">
                                       <p:cBhvr>
-                                        <p:cTn id="10" dur="500"/>
+                                        <p:cTn id="11" dur="500"/>
                                         <p:tgtEl>
                                           <p:spTgt spid="5"/>
                                         </p:tgtEl>
@@ -5456,14 +5089,14 @@
                             </p:stCondLst>
                             <p:childTnLst>
                               <p:par>
-                                <p:cTn id="15" presetID="10" presetClass="entr" presetSubtype="0" fill="hold" grpId="0" nodeType="afterEffect">
+                                <p:cTn id="13" presetID="10" presetClass="entr" presetSubtype="0" fill="hold" grpId="0" nodeType="afterEffect">
                                   <p:stCondLst>
                                     <p:cond delay="0"/>
                                   </p:stCondLst>
                                   <p:childTnLst>
                                     <p:set>
                                       <p:cBhvr>
-                                        <p:cTn id="13" dur="1" fill="hold">
+                                        <p:cTn id="14" dur="1" fill="hold">
                                           <p:stCondLst>
                                             <p:cond delay="0"/>
                                           </p:stCondLst>
@@ -5481,7 +5114,7 @@
                                     </p:set>
                                     <p:animEffect transition="in" filter="fade">
                                       <p:cBhvr>
-                                        <p:cTn id="14" dur="500"/>
+                                        <p:cTn id="15" dur="500"/>
                                         <p:tgtEl>
                                           <p:spTgt spid="6"/>
                                         </p:tgtEl>
@@ -5500,14 +5133,14 @@
                             </p:stCondLst>
                             <p:childTnLst>
                               <p:par>
-                                <p:cTn id="19" presetID="10" presetClass="entr" presetSubtype="0" fill="hold" grpId="0" nodeType="afterEffect">
+                                <p:cTn id="17" presetID="10" presetClass="entr" presetSubtype="0" fill="hold" grpId="0" nodeType="afterEffect">
                                   <p:stCondLst>
                                     <p:cond delay="0"/>
                                   </p:stCondLst>
                                   <p:childTnLst>
                                     <p:set>
                                       <p:cBhvr>
-                                        <p:cTn id="17" dur="1" fill="hold">
+                                        <p:cTn id="18" dur="1" fill="hold">
                                           <p:stCondLst>
                                             <p:cond delay="0"/>
                                           </p:stCondLst>
@@ -5525,7 +5158,7 @@
                                     </p:set>
                                     <p:animEffect transition="in" filter="fade">
                                       <p:cBhvr>
-                                        <p:cTn id="18" dur="500"/>
+                                        <p:cTn id="19" dur="500"/>
                                         <p:tgtEl>
                                           <p:spTgt spid="7"/>
                                         </p:tgtEl>
@@ -5544,14 +5177,14 @@
                             </p:stCondLst>
                             <p:childTnLst>
                               <p:par>
-                                <p:cTn id="23" presetID="10" presetClass="entr" presetSubtype="0" fill="hold" grpId="0" nodeType="afterEffect">
+                                <p:cTn id="21" presetID="10" presetClass="entr" presetSubtype="0" fill="hold" grpId="0" nodeType="afterEffect">
                                   <p:stCondLst>
                                     <p:cond delay="0"/>
                                   </p:stCondLst>
                                   <p:childTnLst>
                                     <p:set>
                                       <p:cBhvr>
-                                        <p:cTn id="21" dur="1" fill="hold">
+                                        <p:cTn id="22" dur="1" fill="hold">
                                           <p:stCondLst>
                                             <p:cond delay="0"/>
                                           </p:stCondLst>
@@ -5569,7 +5202,7 @@
                                     </p:set>
                                     <p:animEffect transition="in" filter="fade">
                                       <p:cBhvr>
-                                        <p:cTn id="22" dur="500"/>
+                                        <p:cTn id="23" dur="500"/>
                                         <p:tgtEl>
                                           <p:spTgt spid="8"/>
                                         </p:tgtEl>
@@ -5588,14 +5221,14 @@
                             </p:stCondLst>
                             <p:childTnLst>
                               <p:par>
-                                <p:cTn id="27" presetID="10" presetClass="entr" presetSubtype="0" fill="hold" grpId="0" nodeType="afterEffect">
+                                <p:cTn id="25" presetID="10" presetClass="entr" presetSubtype="0" fill="hold" grpId="0" nodeType="afterEffect">
                                   <p:stCondLst>
                                     <p:cond delay="0"/>
                                   </p:stCondLst>
                                   <p:childTnLst>
                                     <p:set>
                                       <p:cBhvr>
-                                        <p:cTn id="25" dur="1" fill="hold">
+                                        <p:cTn id="26" dur="1" fill="hold">
                                           <p:stCondLst>
                                             <p:cond delay="0"/>
                                           </p:stCondLst>
@@ -5613,99 +5246,9 @@
                                     </p:set>
                                     <p:animEffect transition="in" filter="fade">
                                       <p:cBhvr>
-                                        <p:cTn id="26" dur="500"/>
+                                        <p:cTn id="27" dur="500"/>
                                         <p:tgtEl>
                                           <p:spTgt spid="9"/>
-                                        </p:tgtEl>
-                                      </p:cBhvr>
-                                    </p:animEffect>
-                                  </p:childTnLst>
-                                </p:cTn>
-                              </p:par>
-                            </p:childTnLst>
-                          </p:cTn>
-                        </p:par>
-                        <p:par>
-                          <p:cTn id="28" fill="hold">
-                            <p:stCondLst>
-                              <p:cond delay="3000"/>
-                            </p:stCondLst>
-                            <p:childTnLst>
-                              <p:par>
-                                <p:cTn id="33" presetID="53" presetClass="entr" presetSubtype="16" fill="hold" grpId="0" nodeType="afterEffect">
-                                  <p:stCondLst>
-                                    <p:cond delay="0"/>
-                                  </p:stCondLst>
-                                  <p:childTnLst>
-                                    <p:set>
-                                      <p:cBhvr>
-                                        <p:cTn id="29" dur="1" fill="hold">
-                                          <p:stCondLst>
-                                            <p:cond delay="0"/>
-                                          </p:stCondLst>
-                                        </p:cTn>
-                                        <p:tgtEl>
-                                          <p:spTgt spid="10"/>
-                                        </p:tgtEl>
-                                        <p:attrNameLst>
-                                          <p:attrName>style.visibility</p:attrName>
-                                        </p:attrNameLst>
-                                      </p:cBhvr>
-                                      <p:to>
-                                        <p:strVal val="visible"/>
-                                      </p:to>
-                                    </p:set>
-                                    <p:anim calcmode="lin" valueType="num">
-                                      <p:cBhvr>
-                                        <p:cTn id="30" dur="500" fill="hold"/>
-                                        <p:tgtEl>
-                                          <p:spTgt spid="10"/>
-                                        </p:tgtEl>
-                                        <p:attrNameLst>
-                                          <p:attrName>ppt_w</p:attrName>
-                                        </p:attrNameLst>
-                                      </p:cBhvr>
-                                      <p:tavLst>
-                                        <p:tav tm="0">
-                                          <p:val>
-                                            <p:fltVal val="0"/>
-                                          </p:val>
-                                        </p:tav>
-                                        <p:tav tm="100000">
-                                          <p:val>
-                                            <p:strVal val="#ppt_w"/>
-                                          </p:val>
-                                        </p:tav>
-                                      </p:tavLst>
-                                    </p:anim>
-                                    <p:anim calcmode="lin" valueType="num">
-                                      <p:cBhvr>
-                                        <p:cTn id="31" dur="500" fill="hold"/>
-                                        <p:tgtEl>
-                                          <p:spTgt spid="10"/>
-                                        </p:tgtEl>
-                                        <p:attrNameLst>
-                                          <p:attrName>ppt_h</p:attrName>
-                                        </p:attrNameLst>
-                                      </p:cBhvr>
-                                      <p:tavLst>
-                                        <p:tav tm="0">
-                                          <p:val>
-                                            <p:fltVal val="0"/>
-                                          </p:val>
-                                        </p:tav>
-                                        <p:tav tm="100000">
-                                          <p:val>
-                                            <p:strVal val="#ppt_h"/>
-                                          </p:val>
-                                        </p:tav>
-                                      </p:tavLst>
-                                    </p:anim>
-                                    <p:animEffect transition="in" filter="fade">
-                                      <p:cBhvr>
-                                        <p:cTn id="32" dur="500"/>
-                                        <p:tgtEl>
-                                          <p:spTgt spid="10"/>
                                         </p:tgtEl>
                                       </p:cBhvr>
                                     </p:animEffect>
@@ -5746,14 +5289,13 @@
       <p:bldP spid="7" grpId="0" animBg="1"/>
       <p:bldP spid="8" grpId="0" animBg="1"/>
       <p:bldP spid="9" grpId="0" animBg="1"/>
-      <p:bldP spid="10" grpId="0" animBg="1"/>
     </p:bldLst>
   </p:timing>
 </p:sld>
 </file>
 
 <file path=ppt/slides/slide11.xml><?xml version="1.0" encoding="utf-8"?>
-<p:sld xmlns:a="http://schemas.openxmlformats.org/drawingml/2006/main" xmlns:p="http://schemas.openxmlformats.org/presentationml/2006/main" xmlns:r="http://schemas.openxmlformats.org/officeDocument/2006/relationships">
+<p:sld xmlns:a="http://schemas.openxmlformats.org/drawingml/2006/main" xmlns:r="http://schemas.openxmlformats.org/officeDocument/2006/relationships" xmlns:p="http://schemas.openxmlformats.org/presentationml/2006/main">
   <p:cSld>
     <p:bg>
       <p:bgPr>
@@ -5769,7 +5311,14 @@
         <p:cNvGrpSpPr/>
         <p:nvPr/>
       </p:nvGrpSpPr>
-      <p:grpSpPr/>
+      <p:grpSpPr>
+        <a:xfrm>
+          <a:off x="0" y="0"/>
+          <a:ext cx="0" cy="0"/>
+          <a:chOff x="0" y="0"/>
+          <a:chExt cx="0" cy="0"/>
+        </a:xfrm>
+      </p:grpSpPr>
       <p:pic>
         <p:nvPicPr>
           <p:cNvPr id="2" name="Picture 1" descr="logo-light.png"/>
@@ -5829,7 +5378,7 @@
           </a:fontRef>
         </p:style>
         <p:txBody>
-          <a:bodyPr rtlCol="0" anchor="t" wrap="square" lIns="0" rIns="0" tIns="0" bIns="0"/>
+          <a:bodyPr wrap="square" lIns="0" tIns="0" rIns="0" bIns="0" rtlCol="0" anchor="t"/>
           <a:lstStyle/>
           <a:p>
             <a:pPr algn="l">
@@ -5886,10 +5435,11 @@
           </a:fontRef>
         </p:style>
         <p:txBody>
-          <a:bodyPr rtlCol="0" anchor="t" wrap="square" lIns="0" rIns="0" tIns="0" bIns="0"/>
+          <a:bodyPr wrap="square" lIns="0" tIns="0" rIns="0" bIns="0" rtlCol="0" anchor="t"/>
           <a:lstStyle/>
           <a:p>
             <a:pPr algn="ctr"/>
+            <a:endParaRPr/>
           </a:p>
         </p:txBody>
       </p:sp>
@@ -5928,7 +5478,7 @@
           </a:fontRef>
         </p:style>
         <p:txBody>
-          <a:bodyPr rtlCol="0" anchor="t" wrap="square" lIns="0" rIns="0" tIns="0" bIns="0"/>
+          <a:bodyPr wrap="square" lIns="0" tIns="0" rIns="0" bIns="0" rtlCol="0" anchor="t"/>
           <a:lstStyle/>
           <a:p>
             <a:pPr algn="l">
@@ -5944,77 +5494,6 @@
                 <a:latin typeface="Arial"/>
               </a:rPr>
               <a:t>Place à vos questions et à la démonstration en direct.</a:t>
-            </a:r>
-          </a:p>
-        </p:txBody>
-      </p:sp>
-      <p:sp>
-        <p:nvSpPr>
-          <p:cNvPr id="6" name="Rectangle 5"/>
-          <p:cNvSpPr/>
-          <p:nvPr/>
-        </p:nvSpPr>
-        <p:spPr>
-          <a:xfrm>
-            <a:off x="812800" y="5397500"/>
-            <a:ext cx="9525000" cy="825500"/>
-          </a:xfrm>
-          <a:prstGeom prst="rect">
-            <a:avLst/>
-          </a:prstGeom>
-          <a:noFill/>
-          <a:ln>
-            <a:noFill/>
-          </a:ln>
-          <a:effectLst/>
-        </p:spPr>
-        <p:style>
-          <a:lnRef idx="1">
-            <a:schemeClr val="accent1"/>
-          </a:lnRef>
-          <a:fillRef idx="3">
-            <a:schemeClr val="accent1"/>
-          </a:fillRef>
-          <a:effectRef idx="2">
-            <a:schemeClr val="accent1"/>
-          </a:effectRef>
-          <a:fontRef idx="minor">
-            <a:schemeClr val="lt1"/>
-          </a:fontRef>
-        </p:style>
-        <p:txBody>
-          <a:bodyPr rtlCol="0" anchor="t" wrap="square" lIns="0" rIns="0" tIns="0" bIns="0"/>
-          <a:lstStyle/>
-          <a:p>
-            <a:pPr algn="l">
-              <a:spcAft>
-                <a:spcPts val="0"/>
-              </a:spcAft>
-            </a:pPr>
-            <a:r>
-              <a:rPr sz="1600" b="0">
-                <a:solidFill>
-                  <a:srgbClr val="F4EFE2"/>
-                </a:solidFill>
-                <a:latin typeface="Arial"/>
-              </a:rPr>
-              <a:t>contact@immobell.cm</a:t>
-            </a:r>
-          </a:p>
-          <a:p>
-            <a:pPr algn="l">
-              <a:spcAft>
-                <a:spcPts val="0"/>
-              </a:spcAft>
-            </a:pPr>
-            <a:r>
-              <a:rPr sz="1600" b="0">
-                <a:solidFill>
-                  <a:srgbClr val="F4EFE2"/>
-                </a:solidFill>
-                <a:latin typeface="Arial"/>
-              </a:rPr>
-              <a:t>Bonanjo, Douala · Service après-vente de 8 h à 18 h</a:t>
             </a:r>
           </a:p>
         </p:txBody>
@@ -6048,14 +5527,14 @@
                             </p:stCondLst>
                             <p:childTnLst>
                               <p:par>
-                                <p:cTn id="7" presetID="10" presetClass="entr" presetSubtype="0" fill="hold" nodeType="afterEffect">
+                                <p:cTn id="5" presetID="10" presetClass="entr" presetSubtype="0" fill="hold" nodeType="afterEffect">
                                   <p:stCondLst>
                                     <p:cond delay="0"/>
                                   </p:stCondLst>
                                   <p:childTnLst>
                                     <p:set>
                                       <p:cBhvr>
-                                        <p:cTn id="5" dur="1" fill="hold">
+                                        <p:cTn id="6" dur="1" fill="hold">
                                           <p:stCondLst>
                                             <p:cond delay="0"/>
                                           </p:stCondLst>
@@ -6073,7 +5552,7 @@
                                     </p:set>
                                     <p:animEffect transition="in" filter="fade">
                                       <p:cBhvr>
-                                        <p:cTn id="6" dur="500"/>
+                                        <p:cTn id="7" dur="500"/>
                                         <p:tgtEl>
                                           <p:spTgt spid="2"/>
                                         </p:tgtEl>
@@ -6092,14 +5571,14 @@
                             </p:stCondLst>
                             <p:childTnLst>
                               <p:par>
-                                <p:cTn id="11" presetID="22" presetClass="entr" presetSubtype="4" fill="hold" grpId="0" nodeType="afterEffect">
+                                <p:cTn id="9" presetID="22" presetClass="entr" presetSubtype="4" fill="hold" grpId="0" nodeType="afterEffect">
                                   <p:stCondLst>
                                     <p:cond delay="0"/>
                                   </p:stCondLst>
                                   <p:childTnLst>
                                     <p:set>
                                       <p:cBhvr>
-                                        <p:cTn id="9" dur="1" fill="hold">
+                                        <p:cTn id="10" dur="1" fill="hold">
                                           <p:stCondLst>
                                             <p:cond delay="0"/>
                                           </p:stCondLst>
@@ -6117,7 +5596,7 @@
                                     </p:set>
                                     <p:animEffect transition="in" filter="wipe(down)">
                                       <p:cBhvr>
-                                        <p:cTn id="10" dur="500"/>
+                                        <p:cTn id="11" dur="500"/>
                                         <p:tgtEl>
                                           <p:spTgt spid="3"/>
                                         </p:tgtEl>
@@ -6136,14 +5615,14 @@
                             </p:stCondLst>
                             <p:childTnLst>
                               <p:par>
-                                <p:cTn id="15" presetID="22" presetClass="entr" presetSubtype="8" fill="hold" grpId="0" nodeType="afterEffect">
+                                <p:cTn id="13" presetID="22" presetClass="entr" presetSubtype="8" fill="hold" grpId="0" nodeType="afterEffect">
                                   <p:stCondLst>
                                     <p:cond delay="0"/>
                                   </p:stCondLst>
                                   <p:childTnLst>
                                     <p:set>
                                       <p:cBhvr>
-                                        <p:cTn id="13" dur="1" fill="hold">
+                                        <p:cTn id="14" dur="1" fill="hold">
                                           <p:stCondLst>
                                             <p:cond delay="0"/>
                                           </p:stCondLst>
@@ -6161,7 +5640,7 @@
                                     </p:set>
                                     <p:animEffect transition="in" filter="wipe(left)">
                                       <p:cBhvr>
-                                        <p:cTn id="14" dur="500"/>
+                                        <p:cTn id="15" dur="500"/>
                                         <p:tgtEl>
                                           <p:spTgt spid="4"/>
                                         </p:tgtEl>
@@ -6180,14 +5659,14 @@
                             </p:stCondLst>
                             <p:childTnLst>
                               <p:par>
-                                <p:cTn id="19" presetID="22" presetClass="entr" presetSubtype="4" fill="hold" grpId="0" nodeType="afterEffect">
+                                <p:cTn id="17" presetID="22" presetClass="entr" presetSubtype="4" fill="hold" grpId="0" nodeType="afterEffect">
                                   <p:stCondLst>
                                     <p:cond delay="0"/>
                                   </p:stCondLst>
                                   <p:childTnLst>
                                     <p:set>
                                       <p:cBhvr>
-                                        <p:cTn id="17" dur="1" fill="hold">
+                                        <p:cTn id="18" dur="1" fill="hold">
                                           <p:stCondLst>
                                             <p:cond delay="0"/>
                                           </p:stCondLst>
@@ -6205,53 +5684,9 @@
                                     </p:set>
                                     <p:animEffect transition="in" filter="wipe(down)">
                                       <p:cBhvr>
-                                        <p:cTn id="18" dur="500"/>
+                                        <p:cTn id="19" dur="500"/>
                                         <p:tgtEl>
                                           <p:spTgt spid="5"/>
-                                        </p:tgtEl>
-                                      </p:cBhvr>
-                                    </p:animEffect>
-                                  </p:childTnLst>
-                                </p:cTn>
-                              </p:par>
-                            </p:childTnLst>
-                          </p:cTn>
-                        </p:par>
-                        <p:par>
-                          <p:cTn id="20" fill="hold">
-                            <p:stCondLst>
-                              <p:cond delay="2000"/>
-                            </p:stCondLst>
-                            <p:childTnLst>
-                              <p:par>
-                                <p:cTn id="23" presetID="10" presetClass="entr" presetSubtype="0" fill="hold" grpId="0" nodeType="afterEffect">
-                                  <p:stCondLst>
-                                    <p:cond delay="0"/>
-                                  </p:stCondLst>
-                                  <p:childTnLst>
-                                    <p:set>
-                                      <p:cBhvr>
-                                        <p:cTn id="21" dur="1" fill="hold">
-                                          <p:stCondLst>
-                                            <p:cond delay="0"/>
-                                          </p:stCondLst>
-                                        </p:cTn>
-                                        <p:tgtEl>
-                                          <p:spTgt spid="6"/>
-                                        </p:tgtEl>
-                                        <p:attrNameLst>
-                                          <p:attrName>style.visibility</p:attrName>
-                                        </p:attrNameLst>
-                                      </p:cBhvr>
-                                      <p:to>
-                                        <p:strVal val="visible"/>
-                                      </p:to>
-                                    </p:set>
-                                    <p:animEffect transition="in" filter="fade">
-                                      <p:cBhvr>
-                                        <p:cTn id="22" dur="500"/>
-                                        <p:tgtEl>
-                                          <p:spTgt spid="6"/>
                                         </p:tgtEl>
                                       </p:cBhvr>
                                     </p:animEffect>
@@ -6289,14 +5724,13 @@
       <p:bldP spid="3" grpId="0" animBg="1"/>
       <p:bldP spid="4" grpId="0" animBg="1"/>
       <p:bldP spid="5" grpId="0" animBg="1"/>
-      <p:bldP spid="6" grpId="0" animBg="1"/>
     </p:bldLst>
   </p:timing>
 </p:sld>
 </file>
 
 <file path=ppt/slides/slide2.xml><?xml version="1.0" encoding="utf-8"?>
-<p:sld xmlns:a="http://schemas.openxmlformats.org/drawingml/2006/main" xmlns:p="http://schemas.openxmlformats.org/presentationml/2006/main" xmlns:r="http://schemas.openxmlformats.org/officeDocument/2006/relationships">
+<p:sld xmlns:a="http://schemas.openxmlformats.org/drawingml/2006/main" xmlns:r="http://schemas.openxmlformats.org/officeDocument/2006/relationships" xmlns:p="http://schemas.openxmlformats.org/presentationml/2006/main">
   <p:cSld>
     <p:bg>
       <p:bgPr>
@@ -6312,7 +5746,14 @@
         <p:cNvGrpSpPr/>
         <p:nvPr/>
       </p:nvGrpSpPr>
-      <p:grpSpPr/>
+      <p:grpSpPr>
+        <a:xfrm>
+          <a:off x="0" y="0"/>
+          <a:ext cx="0" cy="0"/>
+          <a:chOff x="0" y="0"/>
+          <a:chExt cx="0" cy="0"/>
+        </a:xfrm>
+      </p:grpSpPr>
       <p:sp>
         <p:nvSpPr>
           <p:cNvPr id="2" name="Rectangle 1"/>
@@ -6348,7 +5789,7 @@
           </a:fontRef>
         </p:style>
         <p:txBody>
-          <a:bodyPr rtlCol="0" anchor="t" wrap="square" lIns="0" rIns="0" tIns="0" bIns="0"/>
+          <a:bodyPr wrap="square" lIns="0" tIns="0" rIns="0" bIns="0" rtlCol="0" anchor="t"/>
           <a:lstStyle/>
           <a:p>
             <a:pPr algn="l">
@@ -6403,7 +5844,7 @@
           </a:fontRef>
         </p:style>
         <p:txBody>
-          <a:bodyPr rtlCol="0" anchor="t" wrap="square" lIns="0" rIns="0" tIns="0" bIns="0"/>
+          <a:bodyPr wrap="square" lIns="0" tIns="0" rIns="0" bIns="0" rtlCol="0" anchor="t"/>
           <a:lstStyle/>
           <a:p>
             <a:pPr algn="l">
@@ -6461,7 +5902,7 @@
           </a:fontRef>
         </p:style>
         <p:txBody>
-          <a:bodyPr rtlCol="0" anchor="t" wrap="square" lIns="0" rIns="0" tIns="0" bIns="0"/>
+          <a:bodyPr wrap="square" lIns="0" tIns="0" rIns="0" bIns="0" rtlCol="0" anchor="t"/>
           <a:lstStyle/>
           <a:p>
             <a:pPr algn="l">
@@ -6522,7 +5963,7 @@
           </a:fontRef>
         </p:style>
         <p:txBody>
-          <a:bodyPr rtlCol="0" anchor="t" wrap="square" lIns="215900" rIns="215900" tIns="215900" bIns="215900"/>
+          <a:bodyPr wrap="square" lIns="215900" tIns="215900" rIns="215900" bIns="215900" rtlCol="0" anchor="t"/>
           <a:lstStyle/>
           <a:p>
             <a:pPr algn="l">
@@ -6602,7 +6043,7 @@
           </a:fontRef>
         </p:style>
         <p:txBody>
-          <a:bodyPr rtlCol="0" anchor="t" wrap="square" lIns="215900" rIns="215900" tIns="215900" bIns="215900"/>
+          <a:bodyPr wrap="square" lIns="215900" tIns="215900" rIns="215900" bIns="215900" rtlCol="0" anchor="t"/>
           <a:lstStyle/>
           <a:p>
             <a:pPr algn="l">
@@ -6682,7 +6123,7 @@
           </a:fontRef>
         </p:style>
         <p:txBody>
-          <a:bodyPr rtlCol="0" anchor="t" wrap="square" lIns="215900" rIns="215900" tIns="215900" bIns="215900"/>
+          <a:bodyPr wrap="square" lIns="215900" tIns="215900" rIns="215900" bIns="215900" rtlCol="0" anchor="t"/>
           <a:lstStyle/>
           <a:p>
             <a:pPr algn="l">
@@ -6760,7 +6201,7 @@
           </a:fontRef>
         </p:style>
         <p:txBody>
-          <a:bodyPr rtlCol="0" anchor="t" wrap="square" lIns="215900" rIns="215900" tIns="215900" bIns="215900"/>
+          <a:bodyPr wrap="square" lIns="215900" tIns="215900" rIns="215900" bIns="215900" rtlCol="0" anchor="t"/>
           <a:lstStyle/>
           <a:p>
             <a:pPr algn="l">
@@ -6834,7 +6275,7 @@
           </a:fontRef>
         </p:style>
         <p:txBody>
-          <a:bodyPr rtlCol="0" anchor="t" wrap="square" lIns="0" rIns="0" tIns="0" bIns="0"/>
+          <a:bodyPr wrap="square" lIns="0" tIns="0" rIns="0" bIns="0" rtlCol="0" anchor="t"/>
           <a:lstStyle/>
           <a:p>
             <a:pPr algn="l">
@@ -6910,14 +6351,14 @@
                             </p:stCondLst>
                             <p:childTnLst>
                               <p:par>
-                                <p:cTn id="7" presetID="10" presetClass="entr" presetSubtype="0" fill="hold" grpId="0" nodeType="afterEffect">
+                                <p:cTn id="5" presetID="10" presetClass="entr" presetSubtype="0" fill="hold" grpId="0" nodeType="afterEffect">
                                   <p:stCondLst>
                                     <p:cond delay="0"/>
                                   </p:stCondLst>
                                   <p:childTnLst>
                                     <p:set>
                                       <p:cBhvr>
-                                        <p:cTn id="5" dur="1" fill="hold">
+                                        <p:cTn id="6" dur="1" fill="hold">
                                           <p:stCondLst>
                                             <p:cond delay="0"/>
                                           </p:stCondLst>
@@ -6935,7 +6376,7 @@
                                     </p:set>
                                     <p:animEffect transition="in" filter="fade">
                                       <p:cBhvr>
-                                        <p:cTn id="6" dur="500"/>
+                                        <p:cTn id="7" dur="500"/>
                                         <p:tgtEl>
                                           <p:spTgt spid="4"/>
                                         </p:tgtEl>
@@ -6954,14 +6395,14 @@
                             </p:stCondLst>
                             <p:childTnLst>
                               <p:par>
-                                <p:cTn id="11" presetID="22" presetClass="entr" presetSubtype="4" fill="hold" grpId="0" nodeType="afterEffect">
+                                <p:cTn id="9" presetID="22" presetClass="entr" presetSubtype="4" fill="hold" grpId="0" nodeType="afterEffect">
                                   <p:stCondLst>
                                     <p:cond delay="0"/>
                                   </p:stCondLst>
                                   <p:childTnLst>
                                     <p:set>
                                       <p:cBhvr>
-                                        <p:cTn id="9" dur="1" fill="hold">
+                                        <p:cTn id="10" dur="1" fill="hold">
                                           <p:stCondLst>
                                             <p:cond delay="0"/>
                                           </p:stCondLst>
@@ -6979,7 +6420,7 @@
                                     </p:set>
                                     <p:animEffect transition="in" filter="wipe(down)">
                                       <p:cBhvr>
-                                        <p:cTn id="10" dur="500"/>
+                                        <p:cTn id="11" dur="500"/>
                                         <p:tgtEl>
                                           <p:spTgt spid="5"/>
                                         </p:tgtEl>
@@ -6998,14 +6439,14 @@
                             </p:stCondLst>
                             <p:childTnLst>
                               <p:par>
-                                <p:cTn id="15" presetID="22" presetClass="entr" presetSubtype="4" fill="hold" grpId="0" nodeType="afterEffect">
+                                <p:cTn id="13" presetID="22" presetClass="entr" presetSubtype="4" fill="hold" grpId="0" nodeType="afterEffect">
                                   <p:stCondLst>
                                     <p:cond delay="0"/>
                                   </p:stCondLst>
                                   <p:childTnLst>
                                     <p:set>
                                       <p:cBhvr>
-                                        <p:cTn id="13" dur="1" fill="hold">
+                                        <p:cTn id="14" dur="1" fill="hold">
                                           <p:stCondLst>
                                             <p:cond delay="0"/>
                                           </p:stCondLst>
@@ -7023,7 +6464,7 @@
                                     </p:set>
                                     <p:animEffect transition="in" filter="wipe(down)">
                                       <p:cBhvr>
-                                        <p:cTn id="14" dur="500"/>
+                                        <p:cTn id="15" dur="500"/>
                                         <p:tgtEl>
                                           <p:spTgt spid="6"/>
                                         </p:tgtEl>
@@ -7042,14 +6483,14 @@
                             </p:stCondLst>
                             <p:childTnLst>
                               <p:par>
-                                <p:cTn id="19" presetID="22" presetClass="entr" presetSubtype="4" fill="hold" grpId="0" nodeType="afterEffect">
+                                <p:cTn id="17" presetID="22" presetClass="entr" presetSubtype="4" fill="hold" grpId="0" nodeType="afterEffect">
                                   <p:stCondLst>
                                     <p:cond delay="0"/>
                                   </p:stCondLst>
                                   <p:childTnLst>
                                     <p:set>
                                       <p:cBhvr>
-                                        <p:cTn id="17" dur="1" fill="hold">
+                                        <p:cTn id="18" dur="1" fill="hold">
                                           <p:stCondLst>
                                             <p:cond delay="0"/>
                                           </p:stCondLst>
@@ -7067,7 +6508,7 @@
                                     </p:set>
                                     <p:animEffect transition="in" filter="wipe(down)">
                                       <p:cBhvr>
-                                        <p:cTn id="18" dur="500"/>
+                                        <p:cTn id="19" dur="500"/>
                                         <p:tgtEl>
                                           <p:spTgt spid="7"/>
                                         </p:tgtEl>
@@ -7086,14 +6527,14 @@
                             </p:stCondLst>
                             <p:childTnLst>
                               <p:par>
-                                <p:cTn id="25" presetID="53" presetClass="entr" presetSubtype="16" fill="hold" grpId="0" nodeType="afterEffect">
+                                <p:cTn id="21" presetID="53" presetClass="entr" presetSubtype="16" fill="hold" grpId="0" nodeType="afterEffect">
                                   <p:stCondLst>
                                     <p:cond delay="0"/>
                                   </p:stCondLst>
                                   <p:childTnLst>
                                     <p:set>
                                       <p:cBhvr>
-                                        <p:cTn id="21" dur="1" fill="hold">
+                                        <p:cTn id="22" dur="1" fill="hold">
                                           <p:stCondLst>
                                             <p:cond delay="0"/>
                                           </p:stCondLst>
@@ -7111,7 +6552,7 @@
                                     </p:set>
                                     <p:anim calcmode="lin" valueType="num">
                                       <p:cBhvr>
-                                        <p:cTn id="22" dur="500" fill="hold"/>
+                                        <p:cTn id="23" dur="500" fill="hold"/>
                                         <p:tgtEl>
                                           <p:spTgt spid="8"/>
                                         </p:tgtEl>
@@ -7134,7 +6575,7 @@
                                     </p:anim>
                                     <p:anim calcmode="lin" valueType="num">
                                       <p:cBhvr>
-                                        <p:cTn id="23" dur="500" fill="hold"/>
+                                        <p:cTn id="24" dur="500" fill="hold"/>
                                         <p:tgtEl>
                                           <p:spTgt spid="8"/>
                                         </p:tgtEl>
@@ -7157,7 +6598,7 @@
                                     </p:anim>
                                     <p:animEffect transition="in" filter="fade">
                                       <p:cBhvr>
-                                        <p:cTn id="24" dur="500"/>
+                                        <p:cTn id="25" dur="500"/>
                                         <p:tgtEl>
                                           <p:spTgt spid="8"/>
                                         </p:tgtEl>
@@ -7205,7 +6646,7 @@
 </file>
 
 <file path=ppt/slides/slide3.xml><?xml version="1.0" encoding="utf-8"?>
-<p:sld xmlns:a="http://schemas.openxmlformats.org/drawingml/2006/main" xmlns:p="http://schemas.openxmlformats.org/presentationml/2006/main" xmlns:r="http://schemas.openxmlformats.org/officeDocument/2006/relationships">
+<p:sld xmlns:a="http://schemas.openxmlformats.org/drawingml/2006/main" xmlns:r="http://schemas.openxmlformats.org/officeDocument/2006/relationships" xmlns:p="http://schemas.openxmlformats.org/presentationml/2006/main">
   <p:cSld>
     <p:bg>
       <p:bgPr>
@@ -7221,7 +6662,14 @@
         <p:cNvGrpSpPr/>
         <p:nvPr/>
       </p:nvGrpSpPr>
-      <p:grpSpPr/>
+      <p:grpSpPr>
+        <a:xfrm>
+          <a:off x="0" y="0"/>
+          <a:ext cx="0" cy="0"/>
+          <a:chOff x="0" y="0"/>
+          <a:chExt cx="0" cy="0"/>
+        </a:xfrm>
+      </p:grpSpPr>
       <p:sp>
         <p:nvSpPr>
           <p:cNvPr id="2" name="Rectangle 1"/>
@@ -7257,7 +6705,7 @@
           </a:fontRef>
         </p:style>
         <p:txBody>
-          <a:bodyPr rtlCol="0" anchor="t" wrap="square" lIns="0" rIns="0" tIns="0" bIns="0"/>
+          <a:bodyPr wrap="square" lIns="0" tIns="0" rIns="0" bIns="0" rtlCol="0" anchor="t"/>
           <a:lstStyle/>
           <a:p>
             <a:pPr algn="l">
@@ -7312,7 +6760,7 @@
           </a:fontRef>
         </p:style>
         <p:txBody>
-          <a:bodyPr rtlCol="0" anchor="t" wrap="square" lIns="0" rIns="0" tIns="0" bIns="0"/>
+          <a:bodyPr wrap="square" lIns="0" tIns="0" rIns="0" bIns="0" rtlCol="0" anchor="t"/>
           <a:lstStyle/>
           <a:p>
             <a:pPr algn="l">
@@ -7376,7 +6824,7 @@
           </a:fontRef>
         </p:style>
         <p:txBody>
-          <a:bodyPr rtlCol="0" anchor="t" wrap="square" lIns="215900" rIns="215900" tIns="215900" bIns="215900"/>
+          <a:bodyPr wrap="square" lIns="215900" tIns="215900" rIns="215900" bIns="215900" rtlCol="0" anchor="t"/>
           <a:lstStyle/>
           <a:p>
             <a:pPr algn="l">
@@ -7456,7 +6904,7 @@
           </a:fontRef>
         </p:style>
         <p:txBody>
-          <a:bodyPr rtlCol="0" anchor="t" wrap="square" lIns="215900" rIns="215900" tIns="215900" bIns="215900"/>
+          <a:bodyPr wrap="square" lIns="215900" tIns="215900" rIns="215900" bIns="215900" rtlCol="0" anchor="t"/>
           <a:lstStyle/>
           <a:p>
             <a:pPr algn="l">
@@ -7536,7 +6984,7 @@
           </a:fontRef>
         </p:style>
         <p:txBody>
-          <a:bodyPr rtlCol="0" anchor="t" wrap="square" lIns="215900" rIns="215900" tIns="215900" bIns="215900"/>
+          <a:bodyPr wrap="square" lIns="215900" tIns="215900" rIns="215900" bIns="215900" rtlCol="0" anchor="t"/>
           <a:lstStyle/>
           <a:p>
             <a:pPr algn="l">
@@ -7616,7 +7064,7 @@
           </a:fontRef>
         </p:style>
         <p:txBody>
-          <a:bodyPr rtlCol="0" anchor="t" wrap="square" lIns="215900" rIns="215900" tIns="215900" bIns="215900"/>
+          <a:bodyPr wrap="square" lIns="215900" tIns="215900" rIns="215900" bIns="215900" rtlCol="0" anchor="t"/>
           <a:lstStyle/>
           <a:p>
             <a:pPr algn="l">
@@ -7694,7 +7142,7 @@
           </a:fontRef>
         </p:style>
         <p:txBody>
-          <a:bodyPr rtlCol="0" anchor="t" wrap="square" lIns="215900" rIns="215900" tIns="215900" bIns="215900"/>
+          <a:bodyPr wrap="square" lIns="215900" tIns="215900" rIns="215900" bIns="215900" rtlCol="0" anchor="t"/>
           <a:lstStyle/>
           <a:p>
             <a:pPr algn="l">
@@ -7768,7 +7216,7 @@
           </a:fontRef>
         </p:style>
         <p:txBody>
-          <a:bodyPr rtlCol="0" anchor="t" wrap="square" lIns="0" rIns="0" tIns="0" bIns="0"/>
+          <a:bodyPr wrap="square" lIns="0" tIns="0" rIns="0" bIns="0" rtlCol="0" anchor="t"/>
           <a:lstStyle/>
           <a:p>
             <a:pPr algn="l">
@@ -7823,7 +7271,7 @@
           </a:fontRef>
         </p:style>
         <p:txBody>
-          <a:bodyPr rtlCol="0" anchor="t" wrap="square" lIns="0" rIns="0" tIns="0" bIns="0"/>
+          <a:bodyPr wrap="square" lIns="0" tIns="0" rIns="0" bIns="0" rtlCol="0" anchor="t"/>
           <a:lstStyle/>
           <a:p>
             <a:pPr algn="l">
@@ -7899,14 +7347,14 @@
                             </p:stCondLst>
                             <p:childTnLst>
                               <p:par>
-                                <p:cTn id="7" presetID="22" presetClass="entr" presetSubtype="4" fill="hold" grpId="0" nodeType="afterEffect">
+                                <p:cTn id="5" presetID="22" presetClass="entr" presetSubtype="4" fill="hold" grpId="0" nodeType="afterEffect">
                                   <p:stCondLst>
                                     <p:cond delay="0"/>
                                   </p:stCondLst>
                                   <p:childTnLst>
                                     <p:set>
                                       <p:cBhvr>
-                                        <p:cTn id="5" dur="1" fill="hold">
+                                        <p:cTn id="6" dur="1" fill="hold">
                                           <p:stCondLst>
                                             <p:cond delay="0"/>
                                           </p:stCondLst>
@@ -7924,7 +7372,7 @@
                                     </p:set>
                                     <p:animEffect transition="in" filter="wipe(down)">
                                       <p:cBhvr>
-                                        <p:cTn id="6" dur="500"/>
+                                        <p:cTn id="7" dur="500"/>
                                         <p:tgtEl>
                                           <p:spTgt spid="4"/>
                                         </p:tgtEl>
@@ -7943,14 +7391,14 @@
                             </p:stCondLst>
                             <p:childTnLst>
                               <p:par>
-                                <p:cTn id="11" presetID="22" presetClass="entr" presetSubtype="4" fill="hold" grpId="0" nodeType="afterEffect">
+                                <p:cTn id="9" presetID="22" presetClass="entr" presetSubtype="4" fill="hold" grpId="0" nodeType="afterEffect">
                                   <p:stCondLst>
                                     <p:cond delay="0"/>
                                   </p:stCondLst>
                                   <p:childTnLst>
                                     <p:set>
                                       <p:cBhvr>
-                                        <p:cTn id="9" dur="1" fill="hold">
+                                        <p:cTn id="10" dur="1" fill="hold">
                                           <p:stCondLst>
                                             <p:cond delay="0"/>
                                           </p:stCondLst>
@@ -7968,7 +7416,7 @@
                                     </p:set>
                                     <p:animEffect transition="in" filter="wipe(down)">
                                       <p:cBhvr>
-                                        <p:cTn id="10" dur="500"/>
+                                        <p:cTn id="11" dur="500"/>
                                         <p:tgtEl>
                                           <p:spTgt spid="5"/>
                                         </p:tgtEl>
@@ -7987,14 +7435,14 @@
                             </p:stCondLst>
                             <p:childTnLst>
                               <p:par>
-                                <p:cTn id="15" presetID="22" presetClass="entr" presetSubtype="4" fill="hold" grpId="0" nodeType="afterEffect">
+                                <p:cTn id="13" presetID="22" presetClass="entr" presetSubtype="4" fill="hold" grpId="0" nodeType="afterEffect">
                                   <p:stCondLst>
                                     <p:cond delay="0"/>
                                   </p:stCondLst>
                                   <p:childTnLst>
                                     <p:set>
                                       <p:cBhvr>
-                                        <p:cTn id="13" dur="1" fill="hold">
+                                        <p:cTn id="14" dur="1" fill="hold">
                                           <p:stCondLst>
                                             <p:cond delay="0"/>
                                           </p:stCondLst>
@@ -8012,7 +7460,7 @@
                                     </p:set>
                                     <p:animEffect transition="in" filter="wipe(down)">
                                       <p:cBhvr>
-                                        <p:cTn id="14" dur="500"/>
+                                        <p:cTn id="15" dur="500"/>
                                         <p:tgtEl>
                                           <p:spTgt spid="6"/>
                                         </p:tgtEl>
@@ -8031,14 +7479,14 @@
                             </p:stCondLst>
                             <p:childTnLst>
                               <p:par>
-                                <p:cTn id="19" presetID="22" presetClass="entr" presetSubtype="4" fill="hold" grpId="0" nodeType="afterEffect">
+                                <p:cTn id="17" presetID="22" presetClass="entr" presetSubtype="4" fill="hold" grpId="0" nodeType="afterEffect">
                                   <p:stCondLst>
                                     <p:cond delay="0"/>
                                   </p:stCondLst>
                                   <p:childTnLst>
                                     <p:set>
                                       <p:cBhvr>
-                                        <p:cTn id="17" dur="1" fill="hold">
+                                        <p:cTn id="18" dur="1" fill="hold">
                                           <p:stCondLst>
                                             <p:cond delay="0"/>
                                           </p:stCondLst>
@@ -8056,7 +7504,7 @@
                                     </p:set>
                                     <p:animEffect transition="in" filter="wipe(down)">
                                       <p:cBhvr>
-                                        <p:cTn id="18" dur="500"/>
+                                        <p:cTn id="19" dur="500"/>
                                         <p:tgtEl>
                                           <p:spTgt spid="7"/>
                                         </p:tgtEl>
@@ -8075,14 +7523,14 @@
                             </p:stCondLst>
                             <p:childTnLst>
                               <p:par>
-                                <p:cTn id="25" presetID="53" presetClass="entr" presetSubtype="16" fill="hold" grpId="0" nodeType="afterEffect">
+                                <p:cTn id="21" presetID="53" presetClass="entr" presetSubtype="16" fill="hold" grpId="0" nodeType="afterEffect">
                                   <p:stCondLst>
                                     <p:cond delay="0"/>
                                   </p:stCondLst>
                                   <p:childTnLst>
                                     <p:set>
                                       <p:cBhvr>
-                                        <p:cTn id="21" dur="1" fill="hold">
+                                        <p:cTn id="22" dur="1" fill="hold">
                                           <p:stCondLst>
                                             <p:cond delay="0"/>
                                           </p:stCondLst>
@@ -8100,7 +7548,7 @@
                                     </p:set>
                                     <p:anim calcmode="lin" valueType="num">
                                       <p:cBhvr>
-                                        <p:cTn id="22" dur="500" fill="hold"/>
+                                        <p:cTn id="23" dur="500" fill="hold"/>
                                         <p:tgtEl>
                                           <p:spTgt spid="8"/>
                                         </p:tgtEl>
@@ -8123,7 +7571,7 @@
                                     </p:anim>
                                     <p:anim calcmode="lin" valueType="num">
                                       <p:cBhvr>
-                                        <p:cTn id="23" dur="500" fill="hold"/>
+                                        <p:cTn id="24" dur="500" fill="hold"/>
                                         <p:tgtEl>
                                           <p:spTgt spid="8"/>
                                         </p:tgtEl>
@@ -8146,7 +7594,7 @@
                                     </p:anim>
                                     <p:animEffect transition="in" filter="fade">
                                       <p:cBhvr>
-                                        <p:cTn id="24" dur="500"/>
+                                        <p:cTn id="25" dur="500"/>
                                         <p:tgtEl>
                                           <p:spTgt spid="8"/>
                                         </p:tgtEl>
@@ -8165,14 +7613,14 @@
                             </p:stCondLst>
                             <p:childTnLst>
                               <p:par>
-                                <p:cTn id="29" presetID="10" presetClass="entr" presetSubtype="0" fill="hold" grpId="0" nodeType="afterEffect">
+                                <p:cTn id="27" presetID="10" presetClass="entr" presetSubtype="0" fill="hold" grpId="0" nodeType="afterEffect">
                                   <p:stCondLst>
                                     <p:cond delay="0"/>
                                   </p:stCondLst>
                                   <p:childTnLst>
                                     <p:set>
                                       <p:cBhvr>
-                                        <p:cTn id="27" dur="1" fill="hold">
+                                        <p:cTn id="28" dur="1" fill="hold">
                                           <p:stCondLst>
                                             <p:cond delay="0"/>
                                           </p:stCondLst>
@@ -8190,7 +7638,7 @@
                                     </p:set>
                                     <p:animEffect transition="in" filter="fade">
                                       <p:cBhvr>
-                                        <p:cTn id="28" dur="500"/>
+                                        <p:cTn id="29" dur="500"/>
                                         <p:tgtEl>
                                           <p:spTgt spid="9"/>
                                         </p:tgtEl>
@@ -8239,7 +7687,7 @@
 </file>
 
 <file path=ppt/slides/slide4.xml><?xml version="1.0" encoding="utf-8"?>
-<p:sld xmlns:a="http://schemas.openxmlformats.org/drawingml/2006/main" xmlns:p="http://schemas.openxmlformats.org/presentationml/2006/main" xmlns:r="http://schemas.openxmlformats.org/officeDocument/2006/relationships">
+<p:sld xmlns:a="http://schemas.openxmlformats.org/drawingml/2006/main" xmlns:r="http://schemas.openxmlformats.org/officeDocument/2006/relationships" xmlns:p="http://schemas.openxmlformats.org/presentationml/2006/main">
   <p:cSld>
     <p:bg>
       <p:bgPr>
@@ -8255,7 +7703,14 @@
         <p:cNvGrpSpPr/>
         <p:nvPr/>
       </p:nvGrpSpPr>
-      <p:grpSpPr/>
+      <p:grpSpPr>
+        <a:xfrm>
+          <a:off x="0" y="0"/>
+          <a:ext cx="0" cy="0"/>
+          <a:chOff x="0" y="0"/>
+          <a:chExt cx="0" cy="0"/>
+        </a:xfrm>
+      </p:grpSpPr>
       <p:sp>
         <p:nvSpPr>
           <p:cNvPr id="2" name="Rectangle 1"/>
@@ -8291,7 +7746,7 @@
           </a:fontRef>
         </p:style>
         <p:txBody>
-          <a:bodyPr rtlCol="0" anchor="t" wrap="square" lIns="0" rIns="0" tIns="0" bIns="0"/>
+          <a:bodyPr wrap="square" lIns="0" tIns="0" rIns="0" bIns="0" rtlCol="0" anchor="t"/>
           <a:lstStyle/>
           <a:p>
             <a:pPr algn="l">
@@ -8346,7 +7801,7 @@
           </a:fontRef>
         </p:style>
         <p:txBody>
-          <a:bodyPr rtlCol="0" anchor="t" wrap="square" lIns="0" rIns="0" tIns="0" bIns="0"/>
+          <a:bodyPr wrap="square" lIns="0" tIns="0" rIns="0" bIns="0" rtlCol="0" anchor="t"/>
           <a:lstStyle/>
           <a:p>
             <a:pPr algn="l">
@@ -8410,7 +7865,7 @@
           </a:fontRef>
         </p:style>
         <p:txBody>
-          <a:bodyPr rtlCol="0" anchor="t" wrap="square" lIns="215900" rIns="215900" tIns="215900" bIns="215900"/>
+          <a:bodyPr wrap="square" lIns="215900" tIns="215900" rIns="215900" bIns="215900" rtlCol="0" anchor="t"/>
           <a:lstStyle/>
           <a:p>
             <a:pPr algn="l">
@@ -8487,7 +7942,7 @@
           </a:fontRef>
         </p:style>
         <p:txBody>
-          <a:bodyPr rtlCol="0" anchor="t" wrap="square" lIns="215900" rIns="215900" tIns="215900" bIns="215900"/>
+          <a:bodyPr wrap="square" lIns="215900" tIns="215900" rIns="215900" bIns="215900" rtlCol="0" anchor="t"/>
           <a:lstStyle/>
           <a:p>
             <a:pPr algn="l">
@@ -8564,7 +8019,7 @@
           </a:fontRef>
         </p:style>
         <p:txBody>
-          <a:bodyPr rtlCol="0" anchor="t" wrap="square" lIns="215900" rIns="215900" tIns="215900" bIns="215900"/>
+          <a:bodyPr wrap="square" lIns="215900" tIns="215900" rIns="215900" bIns="215900" rtlCol="0" anchor="t"/>
           <a:lstStyle/>
           <a:p>
             <a:pPr algn="l">
@@ -8641,7 +8096,7 @@
           </a:fontRef>
         </p:style>
         <p:txBody>
-          <a:bodyPr rtlCol="0" anchor="t" wrap="square" lIns="215900" rIns="215900" tIns="215900" bIns="215900"/>
+          <a:bodyPr wrap="square" lIns="215900" tIns="215900" rIns="215900" bIns="215900" rtlCol="0" anchor="t"/>
           <a:lstStyle/>
           <a:p>
             <a:pPr algn="l">
@@ -8718,7 +8173,7 @@
           </a:fontRef>
         </p:style>
         <p:txBody>
-          <a:bodyPr rtlCol="0" anchor="t" wrap="square" lIns="215900" rIns="215900" tIns="215900" bIns="215900"/>
+          <a:bodyPr wrap="square" lIns="215900" tIns="215900" rIns="215900" bIns="215900" rtlCol="0" anchor="t"/>
           <a:lstStyle/>
           <a:p>
             <a:pPr algn="l">
@@ -8793,7 +8248,7 @@
           </a:fontRef>
         </p:style>
         <p:txBody>
-          <a:bodyPr rtlCol="0" anchor="t" wrap="square" lIns="215900" rIns="215900" tIns="215900" bIns="215900"/>
+          <a:bodyPr wrap="square" lIns="215900" tIns="215900" rIns="215900" bIns="215900" rtlCol="0" anchor="t"/>
           <a:lstStyle/>
           <a:p>
             <a:pPr algn="l">
@@ -8864,7 +8319,7 @@
           </a:fontRef>
         </p:style>
         <p:txBody>
-          <a:bodyPr rtlCol="0" anchor="t" wrap="square" lIns="0" rIns="0" tIns="0" bIns="0"/>
+          <a:bodyPr wrap="square" lIns="0" tIns="0" rIns="0" bIns="0" rtlCol="0" anchor="t"/>
           <a:lstStyle/>
           <a:p>
             <a:pPr algn="l">
@@ -8931,7 +8386,7 @@
           </a:fontRef>
         </p:style>
         <p:txBody>
-          <a:bodyPr rtlCol="0" anchor="t" wrap="square" lIns="0" rIns="0" tIns="0" bIns="0"/>
+          <a:bodyPr wrap="square" lIns="0" tIns="0" rIns="0" bIns="0" rtlCol="0" anchor="t"/>
           <a:lstStyle/>
           <a:p>
             <a:pPr algn="l">
@@ -8998,7 +8453,7 @@
           </a:fontRef>
         </p:style>
         <p:txBody>
-          <a:bodyPr rtlCol="0" anchor="t" wrap="square" lIns="0" rIns="0" tIns="0" bIns="0"/>
+          <a:bodyPr wrap="square" lIns="0" tIns="0" rIns="0" bIns="0" rtlCol="0" anchor="t"/>
           <a:lstStyle/>
           <a:p>
             <a:pPr algn="l">
@@ -9065,7 +8520,7 @@
           </a:fontRef>
         </p:style>
         <p:txBody>
-          <a:bodyPr rtlCol="0" anchor="t" wrap="square" lIns="0" rIns="0" tIns="0" bIns="0"/>
+          <a:bodyPr wrap="square" lIns="0" tIns="0" rIns="0" bIns="0" rtlCol="0" anchor="t"/>
           <a:lstStyle/>
           <a:p>
             <a:pPr algn="l">
@@ -9141,14 +8596,14 @@
                             </p:stCondLst>
                             <p:childTnLst>
                               <p:par>
-                                <p:cTn id="7" presetID="22" presetClass="entr" presetSubtype="4" fill="hold" grpId="0" nodeType="afterEffect">
+                                <p:cTn id="5" presetID="22" presetClass="entr" presetSubtype="4" fill="hold" grpId="0" nodeType="afterEffect">
                                   <p:stCondLst>
                                     <p:cond delay="0"/>
                                   </p:stCondLst>
                                   <p:childTnLst>
                                     <p:set>
                                       <p:cBhvr>
-                                        <p:cTn id="5" dur="1" fill="hold">
+                                        <p:cTn id="6" dur="1" fill="hold">
                                           <p:stCondLst>
                                             <p:cond delay="0"/>
                                           </p:stCondLst>
@@ -9166,7 +8621,7 @@
                                     </p:set>
                                     <p:animEffect transition="in" filter="wipe(down)">
                                       <p:cBhvr>
-                                        <p:cTn id="6" dur="500"/>
+                                        <p:cTn id="7" dur="500"/>
                                         <p:tgtEl>
                                           <p:spTgt spid="4"/>
                                         </p:tgtEl>
@@ -9185,14 +8640,14 @@
                             </p:stCondLst>
                             <p:childTnLst>
                               <p:par>
-                                <p:cTn id="11" presetID="22" presetClass="entr" presetSubtype="4" fill="hold" grpId="0" nodeType="afterEffect">
+                                <p:cTn id="9" presetID="22" presetClass="entr" presetSubtype="4" fill="hold" grpId="0" nodeType="afterEffect">
                                   <p:stCondLst>
                                     <p:cond delay="0"/>
                                   </p:stCondLst>
                                   <p:childTnLst>
                                     <p:set>
                                       <p:cBhvr>
-                                        <p:cTn id="9" dur="1" fill="hold">
+                                        <p:cTn id="10" dur="1" fill="hold">
                                           <p:stCondLst>
                                             <p:cond delay="0"/>
                                           </p:stCondLst>
@@ -9210,7 +8665,7 @@
                                     </p:set>
                                     <p:animEffect transition="in" filter="wipe(down)">
                                       <p:cBhvr>
-                                        <p:cTn id="10" dur="500"/>
+                                        <p:cTn id="11" dur="500"/>
                                         <p:tgtEl>
                                           <p:spTgt spid="5"/>
                                         </p:tgtEl>
@@ -9229,14 +8684,14 @@
                             </p:stCondLst>
                             <p:childTnLst>
                               <p:par>
-                                <p:cTn id="15" presetID="22" presetClass="entr" presetSubtype="4" fill="hold" grpId="0" nodeType="afterEffect">
+                                <p:cTn id="13" presetID="22" presetClass="entr" presetSubtype="4" fill="hold" grpId="0" nodeType="afterEffect">
                                   <p:stCondLst>
                                     <p:cond delay="0"/>
                                   </p:stCondLst>
                                   <p:childTnLst>
                                     <p:set>
                                       <p:cBhvr>
-                                        <p:cTn id="13" dur="1" fill="hold">
+                                        <p:cTn id="14" dur="1" fill="hold">
                                           <p:stCondLst>
                                             <p:cond delay="0"/>
                                           </p:stCondLst>
@@ -9254,7 +8709,7 @@
                                     </p:set>
                                     <p:animEffect transition="in" filter="wipe(down)">
                                       <p:cBhvr>
-                                        <p:cTn id="14" dur="500"/>
+                                        <p:cTn id="15" dur="500"/>
                                         <p:tgtEl>
                                           <p:spTgt spid="6"/>
                                         </p:tgtEl>
@@ -9273,14 +8728,14 @@
                             </p:stCondLst>
                             <p:childTnLst>
                               <p:par>
-                                <p:cTn id="19" presetID="22" presetClass="entr" presetSubtype="4" fill="hold" grpId="0" nodeType="afterEffect">
+                                <p:cTn id="17" presetID="22" presetClass="entr" presetSubtype="4" fill="hold" grpId="0" nodeType="afterEffect">
                                   <p:stCondLst>
                                     <p:cond delay="0"/>
                                   </p:stCondLst>
                                   <p:childTnLst>
                                     <p:set>
                                       <p:cBhvr>
-                                        <p:cTn id="17" dur="1" fill="hold">
+                                        <p:cTn id="18" dur="1" fill="hold">
                                           <p:stCondLst>
                                             <p:cond delay="0"/>
                                           </p:stCondLst>
@@ -9298,7 +8753,7 @@
                                     </p:set>
                                     <p:animEffect transition="in" filter="wipe(down)">
                                       <p:cBhvr>
-                                        <p:cTn id="18" dur="500"/>
+                                        <p:cTn id="19" dur="500"/>
                                         <p:tgtEl>
                                           <p:spTgt spid="7"/>
                                         </p:tgtEl>
@@ -9317,14 +8772,14 @@
                             </p:stCondLst>
                             <p:childTnLst>
                               <p:par>
-                                <p:cTn id="23" presetID="22" presetClass="entr" presetSubtype="4" fill="hold" grpId="0" nodeType="afterEffect">
+                                <p:cTn id="21" presetID="22" presetClass="entr" presetSubtype="4" fill="hold" grpId="0" nodeType="afterEffect">
                                   <p:stCondLst>
                                     <p:cond delay="0"/>
                                   </p:stCondLst>
                                   <p:childTnLst>
                                     <p:set>
                                       <p:cBhvr>
-                                        <p:cTn id="21" dur="1" fill="hold">
+                                        <p:cTn id="22" dur="1" fill="hold">
                                           <p:stCondLst>
                                             <p:cond delay="0"/>
                                           </p:stCondLst>
@@ -9342,7 +8797,7 @@
                                     </p:set>
                                     <p:animEffect transition="in" filter="wipe(down)">
                                       <p:cBhvr>
-                                        <p:cTn id="22" dur="500"/>
+                                        <p:cTn id="23" dur="500"/>
                                         <p:tgtEl>
                                           <p:spTgt spid="8"/>
                                         </p:tgtEl>
@@ -9361,14 +8816,14 @@
                             </p:stCondLst>
                             <p:childTnLst>
                               <p:par>
-                                <p:cTn id="29" presetID="53" presetClass="entr" presetSubtype="16" fill="hold" grpId="0" nodeType="afterEffect">
+                                <p:cTn id="25" presetID="53" presetClass="entr" presetSubtype="16" fill="hold" grpId="0" nodeType="afterEffect">
                                   <p:stCondLst>
                                     <p:cond delay="0"/>
                                   </p:stCondLst>
                                   <p:childTnLst>
                                     <p:set>
                                       <p:cBhvr>
-                                        <p:cTn id="25" dur="1" fill="hold">
+                                        <p:cTn id="26" dur="1" fill="hold">
                                           <p:stCondLst>
                                             <p:cond delay="0"/>
                                           </p:stCondLst>
@@ -9386,7 +8841,7 @@
                                     </p:set>
                                     <p:anim calcmode="lin" valueType="num">
                                       <p:cBhvr>
-                                        <p:cTn id="26" dur="500" fill="hold"/>
+                                        <p:cTn id="27" dur="500" fill="hold"/>
                                         <p:tgtEl>
                                           <p:spTgt spid="9"/>
                                         </p:tgtEl>
@@ -9409,7 +8864,7 @@
                                     </p:anim>
                                     <p:anim calcmode="lin" valueType="num">
                                       <p:cBhvr>
-                                        <p:cTn id="27" dur="500" fill="hold"/>
+                                        <p:cTn id="28" dur="500" fill="hold"/>
                                         <p:tgtEl>
                                           <p:spTgt spid="9"/>
                                         </p:tgtEl>
@@ -9432,7 +8887,7 @@
                                     </p:anim>
                                     <p:animEffect transition="in" filter="fade">
                                       <p:cBhvr>
-                                        <p:cTn id="28" dur="500"/>
+                                        <p:cTn id="29" dur="500"/>
                                         <p:tgtEl>
                                           <p:spTgt spid="9"/>
                                         </p:tgtEl>
@@ -9451,14 +8906,14 @@
                             </p:stCondLst>
                             <p:childTnLst>
                               <p:par>
-                                <p:cTn id="33" presetID="10" presetClass="entr" presetSubtype="0" fill="hold" grpId="0" nodeType="afterEffect">
+                                <p:cTn id="31" presetID="10" presetClass="entr" presetSubtype="0" fill="hold" grpId="0" nodeType="afterEffect">
                                   <p:stCondLst>
                                     <p:cond delay="0"/>
                                   </p:stCondLst>
                                   <p:childTnLst>
                                     <p:set>
                                       <p:cBhvr>
-                                        <p:cTn id="31" dur="1" fill="hold">
+                                        <p:cTn id="32" dur="1" fill="hold">
                                           <p:stCondLst>
                                             <p:cond delay="0"/>
                                           </p:stCondLst>
@@ -9476,7 +8931,7 @@
                                     </p:set>
                                     <p:animEffect transition="in" filter="fade">
                                       <p:cBhvr>
-                                        <p:cTn id="32" dur="500"/>
+                                        <p:cTn id="33" dur="500"/>
                                         <p:tgtEl>
                                           <p:spTgt spid="10"/>
                                         </p:tgtEl>
@@ -9495,14 +8950,14 @@
                             </p:stCondLst>
                             <p:childTnLst>
                               <p:par>
-                                <p:cTn id="37" presetID="10" presetClass="entr" presetSubtype="0" fill="hold" grpId="0" nodeType="afterEffect">
+                                <p:cTn id="35" presetID="10" presetClass="entr" presetSubtype="0" fill="hold" grpId="0" nodeType="afterEffect">
                                   <p:stCondLst>
                                     <p:cond delay="0"/>
                                   </p:stCondLst>
                                   <p:childTnLst>
                                     <p:set>
                                       <p:cBhvr>
-                                        <p:cTn id="35" dur="1" fill="hold">
+                                        <p:cTn id="36" dur="1" fill="hold">
                                           <p:stCondLst>
                                             <p:cond delay="0"/>
                                           </p:stCondLst>
@@ -9520,7 +8975,7 @@
                                     </p:set>
                                     <p:animEffect transition="in" filter="fade">
                                       <p:cBhvr>
-                                        <p:cTn id="36" dur="500"/>
+                                        <p:cTn id="37" dur="500"/>
                                         <p:tgtEl>
                                           <p:spTgt spid="11"/>
                                         </p:tgtEl>
@@ -9539,14 +8994,14 @@
                             </p:stCondLst>
                             <p:childTnLst>
                               <p:par>
-                                <p:cTn id="41" presetID="10" presetClass="entr" presetSubtype="0" fill="hold" grpId="0" nodeType="afterEffect">
+                                <p:cTn id="39" presetID="10" presetClass="entr" presetSubtype="0" fill="hold" grpId="0" nodeType="afterEffect">
                                   <p:stCondLst>
                                     <p:cond delay="0"/>
                                   </p:stCondLst>
                                   <p:childTnLst>
                                     <p:set>
                                       <p:cBhvr>
-                                        <p:cTn id="39" dur="1" fill="hold">
+                                        <p:cTn id="40" dur="1" fill="hold">
                                           <p:stCondLst>
                                             <p:cond delay="0"/>
                                           </p:stCondLst>
@@ -9564,7 +9019,7 @@
                                     </p:set>
                                     <p:animEffect transition="in" filter="fade">
                                       <p:cBhvr>
-                                        <p:cTn id="40" dur="500"/>
+                                        <p:cTn id="41" dur="500"/>
                                         <p:tgtEl>
                                           <p:spTgt spid="12"/>
                                         </p:tgtEl>
@@ -9616,7 +9071,7 @@
 </file>
 
 <file path=ppt/slides/slide5.xml><?xml version="1.0" encoding="utf-8"?>
-<p:sld xmlns:a="http://schemas.openxmlformats.org/drawingml/2006/main" xmlns:p="http://schemas.openxmlformats.org/presentationml/2006/main" xmlns:r="http://schemas.openxmlformats.org/officeDocument/2006/relationships">
+<p:sld xmlns:a="http://schemas.openxmlformats.org/drawingml/2006/main" xmlns:r="http://schemas.openxmlformats.org/officeDocument/2006/relationships" xmlns:p="http://schemas.openxmlformats.org/presentationml/2006/main">
   <p:cSld>
     <p:bg>
       <p:bgPr>
@@ -9632,7 +9087,14 @@
         <p:cNvGrpSpPr/>
         <p:nvPr/>
       </p:nvGrpSpPr>
-      <p:grpSpPr/>
+      <p:grpSpPr>
+        <a:xfrm>
+          <a:off x="0" y="0"/>
+          <a:ext cx="0" cy="0"/>
+          <a:chOff x="0" y="0"/>
+          <a:chExt cx="0" cy="0"/>
+        </a:xfrm>
+      </p:grpSpPr>
       <p:sp>
         <p:nvSpPr>
           <p:cNvPr id="2" name="Rectangle 1"/>
@@ -9668,7 +9130,7 @@
           </a:fontRef>
         </p:style>
         <p:txBody>
-          <a:bodyPr rtlCol="0" anchor="t" wrap="square" lIns="0" rIns="0" tIns="0" bIns="0"/>
+          <a:bodyPr wrap="square" lIns="0" tIns="0" rIns="0" bIns="0" rtlCol="0" anchor="t"/>
           <a:lstStyle/>
           <a:p>
             <a:pPr algn="l">
@@ -9723,7 +9185,7 @@
           </a:fontRef>
         </p:style>
         <p:txBody>
-          <a:bodyPr rtlCol="0" anchor="t" wrap="square" lIns="0" rIns="0" tIns="0" bIns="0"/>
+          <a:bodyPr wrap="square" lIns="0" tIns="0" rIns="0" bIns="0" rtlCol="0" anchor="t"/>
           <a:lstStyle/>
           <a:p>
             <a:pPr algn="l">
@@ -9783,10 +9245,11 @@
           </a:fontRef>
         </p:style>
         <p:txBody>
-          <a:bodyPr rtlCol="0" anchor="t" wrap="square" lIns="0" rIns="0" tIns="0" bIns="0"/>
+          <a:bodyPr wrap="square" lIns="0" tIns="0" rIns="0" bIns="0" rtlCol="0" anchor="t"/>
           <a:lstStyle/>
           <a:p>
             <a:pPr algn="ctr"/>
+            <a:endParaRPr/>
           </a:p>
         </p:txBody>
       </p:sp>
@@ -9825,7 +9288,7 @@
           </a:fontRef>
         </p:style>
         <p:txBody>
-          <a:bodyPr rtlCol="0" anchor="t" wrap="square" lIns="0" rIns="0" tIns="0" bIns="0"/>
+          <a:bodyPr wrap="square" lIns="0" tIns="0" rIns="0" bIns="0" rtlCol="0" anchor="t"/>
           <a:lstStyle/>
           <a:p>
             <a:pPr algn="l">
@@ -9882,10 +9345,11 @@
           </a:fontRef>
         </p:style>
         <p:txBody>
-          <a:bodyPr rtlCol="0" anchor="t" wrap="square" lIns="0" rIns="0" tIns="0" bIns="0"/>
+          <a:bodyPr wrap="square" lIns="0" tIns="0" rIns="0" bIns="0" rtlCol="0" anchor="t"/>
           <a:lstStyle/>
           <a:p>
             <a:pPr algn="ctr"/>
+            <a:endParaRPr/>
           </a:p>
         </p:txBody>
       </p:sp>
@@ -9924,7 +9388,7 @@
           </a:fontRef>
         </p:style>
         <p:txBody>
-          <a:bodyPr rtlCol="0" anchor="t" wrap="square" lIns="0" rIns="0" tIns="0" bIns="0"/>
+          <a:bodyPr wrap="square" lIns="0" tIns="0" rIns="0" bIns="0" rtlCol="0" anchor="t"/>
           <a:lstStyle/>
           <a:p>
             <a:pPr algn="l">
@@ -9981,10 +9445,11 @@
           </a:fontRef>
         </p:style>
         <p:txBody>
-          <a:bodyPr rtlCol="0" anchor="t" wrap="square" lIns="0" rIns="0" tIns="0" bIns="0"/>
+          <a:bodyPr wrap="square" lIns="0" tIns="0" rIns="0" bIns="0" rtlCol="0" anchor="t"/>
           <a:lstStyle/>
           <a:p>
             <a:pPr algn="ctr"/>
+            <a:endParaRPr/>
           </a:p>
         </p:txBody>
       </p:sp>
@@ -10023,7 +9488,7 @@
           </a:fontRef>
         </p:style>
         <p:txBody>
-          <a:bodyPr rtlCol="0" anchor="t" wrap="square" lIns="0" rIns="0" tIns="0" bIns="0"/>
+          <a:bodyPr wrap="square" lIns="0" tIns="0" rIns="0" bIns="0" rtlCol="0" anchor="t"/>
           <a:lstStyle/>
           <a:p>
             <a:pPr algn="l">
@@ -10080,10 +9545,11 @@
           </a:fontRef>
         </p:style>
         <p:txBody>
-          <a:bodyPr rtlCol="0" anchor="t" wrap="square" lIns="0" rIns="0" tIns="0" bIns="0"/>
+          <a:bodyPr wrap="square" lIns="0" tIns="0" rIns="0" bIns="0" rtlCol="0" anchor="t"/>
           <a:lstStyle/>
           <a:p>
             <a:pPr algn="ctr"/>
+            <a:endParaRPr/>
           </a:p>
         </p:txBody>
       </p:sp>
@@ -10122,7 +9588,7 @@
           </a:fontRef>
         </p:style>
         <p:txBody>
-          <a:bodyPr rtlCol="0" anchor="t" wrap="square" lIns="0" rIns="0" tIns="0" bIns="0"/>
+          <a:bodyPr wrap="square" lIns="0" tIns="0" rIns="0" bIns="0" rtlCol="0" anchor="t"/>
           <a:lstStyle/>
           <a:p>
             <a:pPr algn="l">
@@ -10179,10 +9645,11 @@
           </a:fontRef>
         </p:style>
         <p:txBody>
-          <a:bodyPr rtlCol="0" anchor="t" wrap="square" lIns="0" rIns="0" tIns="0" bIns="0"/>
+          <a:bodyPr wrap="square" lIns="0" tIns="0" rIns="0" bIns="0" rtlCol="0" anchor="t"/>
           <a:lstStyle/>
           <a:p>
             <a:pPr algn="ctr"/>
+            <a:endParaRPr/>
           </a:p>
         </p:txBody>
       </p:sp>
@@ -10221,7 +9688,7 @@
           </a:fontRef>
         </p:style>
         <p:txBody>
-          <a:bodyPr rtlCol="0" anchor="t" wrap="square" lIns="0" rIns="0" tIns="0" bIns="0"/>
+          <a:bodyPr wrap="square" lIns="0" tIns="0" rIns="0" bIns="0" rtlCol="0" anchor="t"/>
           <a:lstStyle/>
           <a:p>
             <a:pPr algn="l">
@@ -10276,7 +9743,7 @@
           </a:fontRef>
         </p:style>
         <p:txBody>
-          <a:bodyPr rtlCol="0" anchor="t" wrap="square" lIns="0" rIns="0" tIns="0" bIns="0"/>
+          <a:bodyPr wrap="square" lIns="0" tIns="0" rIns="0" bIns="0" rtlCol="0" anchor="t"/>
           <a:lstStyle/>
           <a:p>
             <a:pPr algn="l">
@@ -10331,7 +9798,7 @@
           </a:fontRef>
         </p:style>
         <p:txBody>
-          <a:bodyPr rtlCol="0" anchor="t" wrap="square" lIns="0" rIns="0" tIns="0" bIns="0"/>
+          <a:bodyPr wrap="square" lIns="0" tIns="0" rIns="0" bIns="0" rtlCol="0" anchor="t"/>
           <a:lstStyle/>
           <a:p>
             <a:pPr algn="l">
@@ -10407,14 +9874,14 @@
                             </p:stCondLst>
                             <p:childTnLst>
                               <p:par>
-                                <p:cTn id="7" presetID="22" presetClass="entr" presetSubtype="4" fill="hold" grpId="0" nodeType="afterEffect">
+                                <p:cTn id="5" presetID="22" presetClass="entr" presetSubtype="4" fill="hold" grpId="0" nodeType="afterEffect">
                                   <p:stCondLst>
                                     <p:cond delay="0"/>
                                   </p:stCondLst>
                                   <p:childTnLst>
                                     <p:set>
                                       <p:cBhvr>
-                                        <p:cTn id="5" dur="1" fill="hold">
+                                        <p:cTn id="6" dur="1" fill="hold">
                                           <p:stCondLst>
                                             <p:cond delay="0"/>
                                           </p:stCondLst>
@@ -10432,7 +9899,7 @@
                                     </p:set>
                                     <p:animEffect transition="in" filter="wipe(down)">
                                       <p:cBhvr>
-                                        <p:cTn id="6" dur="500"/>
+                                        <p:cTn id="7" dur="500"/>
                                         <p:tgtEl>
                                           <p:spTgt spid="4"/>
                                         </p:tgtEl>
@@ -10442,14 +9909,14 @@
                                 </p:cTn>
                               </p:par>
                               <p:par>
-                                <p:cTn id="10" presetID="22" presetClass="entr" presetSubtype="4" fill="hold" grpId="0" nodeType="withEffect">
+                                <p:cTn id="8" presetID="22" presetClass="entr" presetSubtype="4" fill="hold" grpId="0" nodeType="withEffect">
                                   <p:stCondLst>
                                     <p:cond delay="0"/>
                                   </p:stCondLst>
                                   <p:childTnLst>
                                     <p:set>
                                       <p:cBhvr>
-                                        <p:cTn id="8" dur="1" fill="hold">
+                                        <p:cTn id="9" dur="1" fill="hold">
                                           <p:stCondLst>
                                             <p:cond delay="0"/>
                                           </p:stCondLst>
@@ -10467,7 +9934,7 @@
                                     </p:set>
                                     <p:animEffect transition="in" filter="wipe(down)">
                                       <p:cBhvr>
-                                        <p:cTn id="9" dur="500"/>
+                                        <p:cTn id="10" dur="500"/>
                                         <p:tgtEl>
                                           <p:spTgt spid="5"/>
                                         </p:tgtEl>
@@ -10486,14 +9953,14 @@
                             </p:stCondLst>
                             <p:childTnLst>
                               <p:par>
-                                <p:cTn id="14" presetID="22" presetClass="entr" presetSubtype="4" fill="hold" grpId="0" nodeType="afterEffect">
+                                <p:cTn id="12" presetID="22" presetClass="entr" presetSubtype="4" fill="hold" grpId="0" nodeType="afterEffect">
                                   <p:stCondLst>
                                     <p:cond delay="0"/>
                                   </p:stCondLst>
                                   <p:childTnLst>
                                     <p:set>
                                       <p:cBhvr>
-                                        <p:cTn id="12" dur="1" fill="hold">
+                                        <p:cTn id="13" dur="1" fill="hold">
                                           <p:stCondLst>
                                             <p:cond delay="0"/>
                                           </p:stCondLst>
@@ -10511,7 +9978,7 @@
                                     </p:set>
                                     <p:animEffect transition="in" filter="wipe(down)">
                                       <p:cBhvr>
-                                        <p:cTn id="13" dur="500"/>
+                                        <p:cTn id="14" dur="500"/>
                                         <p:tgtEl>
                                           <p:spTgt spid="6"/>
                                         </p:tgtEl>
@@ -10521,14 +9988,14 @@
                                 </p:cTn>
                               </p:par>
                               <p:par>
-                                <p:cTn id="17" presetID="22" presetClass="entr" presetSubtype="4" fill="hold" grpId="0" nodeType="withEffect">
+                                <p:cTn id="15" presetID="22" presetClass="entr" presetSubtype="4" fill="hold" grpId="0" nodeType="withEffect">
                                   <p:stCondLst>
                                     <p:cond delay="0"/>
                                   </p:stCondLst>
                                   <p:childTnLst>
                                     <p:set>
                                       <p:cBhvr>
-                                        <p:cTn id="15" dur="1" fill="hold">
+                                        <p:cTn id="16" dur="1" fill="hold">
                                           <p:stCondLst>
                                             <p:cond delay="0"/>
                                           </p:stCondLst>
@@ -10546,7 +10013,7 @@
                                     </p:set>
                                     <p:animEffect transition="in" filter="wipe(down)">
                                       <p:cBhvr>
-                                        <p:cTn id="16" dur="500"/>
+                                        <p:cTn id="17" dur="500"/>
                                         <p:tgtEl>
                                           <p:spTgt spid="7"/>
                                         </p:tgtEl>
@@ -10565,14 +10032,14 @@
                             </p:stCondLst>
                             <p:childTnLst>
                               <p:par>
-                                <p:cTn id="21" presetID="22" presetClass="entr" presetSubtype="4" fill="hold" grpId="0" nodeType="afterEffect">
+                                <p:cTn id="19" presetID="22" presetClass="entr" presetSubtype="4" fill="hold" grpId="0" nodeType="afterEffect">
                                   <p:stCondLst>
                                     <p:cond delay="0"/>
                                   </p:stCondLst>
                                   <p:childTnLst>
                                     <p:set>
                                       <p:cBhvr>
-                                        <p:cTn id="19" dur="1" fill="hold">
+                                        <p:cTn id="20" dur="1" fill="hold">
                                           <p:stCondLst>
                                             <p:cond delay="0"/>
                                           </p:stCondLst>
@@ -10590,7 +10057,7 @@
                                     </p:set>
                                     <p:animEffect transition="in" filter="wipe(down)">
                                       <p:cBhvr>
-                                        <p:cTn id="20" dur="500"/>
+                                        <p:cTn id="21" dur="500"/>
                                         <p:tgtEl>
                                           <p:spTgt spid="8"/>
                                         </p:tgtEl>
@@ -10600,14 +10067,14 @@
                                 </p:cTn>
                               </p:par>
                               <p:par>
-                                <p:cTn id="24" presetID="22" presetClass="entr" presetSubtype="4" fill="hold" grpId="0" nodeType="withEffect">
+                                <p:cTn id="22" presetID="22" presetClass="entr" presetSubtype="4" fill="hold" grpId="0" nodeType="withEffect">
                                   <p:stCondLst>
                                     <p:cond delay="0"/>
                                   </p:stCondLst>
                                   <p:childTnLst>
                                     <p:set>
                                       <p:cBhvr>
-                                        <p:cTn id="22" dur="1" fill="hold">
+                                        <p:cTn id="23" dur="1" fill="hold">
                                           <p:stCondLst>
                                             <p:cond delay="0"/>
                                           </p:stCondLst>
@@ -10625,7 +10092,7 @@
                                     </p:set>
                                     <p:animEffect transition="in" filter="wipe(down)">
                                       <p:cBhvr>
-                                        <p:cTn id="23" dur="500"/>
+                                        <p:cTn id="24" dur="500"/>
                                         <p:tgtEl>
                                           <p:spTgt spid="9"/>
                                         </p:tgtEl>
@@ -10644,14 +10111,14 @@
                             </p:stCondLst>
                             <p:childTnLst>
                               <p:par>
-                                <p:cTn id="28" presetID="22" presetClass="entr" presetSubtype="4" fill="hold" grpId="0" nodeType="afterEffect">
+                                <p:cTn id="26" presetID="22" presetClass="entr" presetSubtype="4" fill="hold" grpId="0" nodeType="afterEffect">
                                   <p:stCondLst>
                                     <p:cond delay="0"/>
                                   </p:stCondLst>
                                   <p:childTnLst>
                                     <p:set>
                                       <p:cBhvr>
-                                        <p:cTn id="26" dur="1" fill="hold">
+                                        <p:cTn id="27" dur="1" fill="hold">
                                           <p:stCondLst>
                                             <p:cond delay="0"/>
                                           </p:stCondLst>
@@ -10669,7 +10136,7 @@
                                     </p:set>
                                     <p:animEffect transition="in" filter="wipe(down)">
                                       <p:cBhvr>
-                                        <p:cTn id="27" dur="500"/>
+                                        <p:cTn id="28" dur="500"/>
                                         <p:tgtEl>
                                           <p:spTgt spid="10"/>
                                         </p:tgtEl>
@@ -10679,14 +10146,14 @@
                                 </p:cTn>
                               </p:par>
                               <p:par>
-                                <p:cTn id="31" presetID="22" presetClass="entr" presetSubtype="4" fill="hold" grpId="0" nodeType="withEffect">
+                                <p:cTn id="29" presetID="22" presetClass="entr" presetSubtype="4" fill="hold" grpId="0" nodeType="withEffect">
                                   <p:stCondLst>
                                     <p:cond delay="0"/>
                                   </p:stCondLst>
                                   <p:childTnLst>
                                     <p:set>
                                       <p:cBhvr>
-                                        <p:cTn id="29" dur="1" fill="hold">
+                                        <p:cTn id="30" dur="1" fill="hold">
                                           <p:stCondLst>
                                             <p:cond delay="0"/>
                                           </p:stCondLst>
@@ -10704,7 +10171,7 @@
                                     </p:set>
                                     <p:animEffect transition="in" filter="wipe(down)">
                                       <p:cBhvr>
-                                        <p:cTn id="30" dur="500"/>
+                                        <p:cTn id="31" dur="500"/>
                                         <p:tgtEl>
                                           <p:spTgt spid="11"/>
                                         </p:tgtEl>
@@ -10723,14 +10190,14 @@
                             </p:stCondLst>
                             <p:childTnLst>
                               <p:par>
-                                <p:cTn id="35" presetID="22" presetClass="entr" presetSubtype="4" fill="hold" grpId="0" nodeType="afterEffect">
+                                <p:cTn id="33" presetID="22" presetClass="entr" presetSubtype="4" fill="hold" grpId="0" nodeType="afterEffect">
                                   <p:stCondLst>
                                     <p:cond delay="0"/>
                                   </p:stCondLst>
                                   <p:childTnLst>
                                     <p:set>
                                       <p:cBhvr>
-                                        <p:cTn id="33" dur="1" fill="hold">
+                                        <p:cTn id="34" dur="1" fill="hold">
                                           <p:stCondLst>
                                             <p:cond delay="0"/>
                                           </p:stCondLst>
@@ -10748,7 +10215,7 @@
                                     </p:set>
                                     <p:animEffect transition="in" filter="wipe(down)">
                                       <p:cBhvr>
-                                        <p:cTn id="34" dur="500"/>
+                                        <p:cTn id="35" dur="500"/>
                                         <p:tgtEl>
                                           <p:spTgt spid="12"/>
                                         </p:tgtEl>
@@ -10758,14 +10225,14 @@
                                 </p:cTn>
                               </p:par>
                               <p:par>
-                                <p:cTn id="38" presetID="22" presetClass="entr" presetSubtype="4" fill="hold" grpId="0" nodeType="withEffect">
+                                <p:cTn id="36" presetID="22" presetClass="entr" presetSubtype="4" fill="hold" grpId="0" nodeType="withEffect">
                                   <p:stCondLst>
                                     <p:cond delay="0"/>
                                   </p:stCondLst>
                                   <p:childTnLst>
                                     <p:set>
                                       <p:cBhvr>
-                                        <p:cTn id="36" dur="1" fill="hold">
+                                        <p:cTn id="37" dur="1" fill="hold">
                                           <p:stCondLst>
                                             <p:cond delay="0"/>
                                           </p:stCondLst>
@@ -10783,7 +10250,7 @@
                                     </p:set>
                                     <p:animEffect transition="in" filter="wipe(down)">
                                       <p:cBhvr>
-                                        <p:cTn id="37" dur="500"/>
+                                        <p:cTn id="38" dur="500"/>
                                         <p:tgtEl>
                                           <p:spTgt spid="13"/>
                                         </p:tgtEl>
@@ -10802,14 +10269,14 @@
                             </p:stCondLst>
                             <p:childTnLst>
                               <p:par>
-                                <p:cTn id="42" presetID="10" presetClass="entr" presetSubtype="0" fill="hold" grpId="0" nodeType="afterEffect">
+                                <p:cTn id="40" presetID="10" presetClass="entr" presetSubtype="0" fill="hold" grpId="0" nodeType="afterEffect">
                                   <p:stCondLst>
                                     <p:cond delay="0"/>
                                   </p:stCondLst>
                                   <p:childTnLst>
                                     <p:set>
                                       <p:cBhvr>
-                                        <p:cTn id="40" dur="1" fill="hold">
+                                        <p:cTn id="41" dur="1" fill="hold">
                                           <p:stCondLst>
                                             <p:cond delay="0"/>
                                           </p:stCondLst>
@@ -10827,7 +10294,7 @@
                                     </p:set>
                                     <p:animEffect transition="in" filter="fade">
                                       <p:cBhvr>
-                                        <p:cTn id="41" dur="500"/>
+                                        <p:cTn id="42" dur="500"/>
                                         <p:tgtEl>
                                           <p:spTgt spid="14"/>
                                         </p:tgtEl>
@@ -10881,7 +10348,7 @@
 </file>
 
 <file path=ppt/slides/slide6.xml><?xml version="1.0" encoding="utf-8"?>
-<p:sld xmlns:a="http://schemas.openxmlformats.org/drawingml/2006/main" xmlns:p="http://schemas.openxmlformats.org/presentationml/2006/main" xmlns:r="http://schemas.openxmlformats.org/officeDocument/2006/relationships">
+<p:sld xmlns:a="http://schemas.openxmlformats.org/drawingml/2006/main" xmlns:r="http://schemas.openxmlformats.org/officeDocument/2006/relationships" xmlns:p="http://schemas.openxmlformats.org/presentationml/2006/main">
   <p:cSld>
     <p:bg>
       <p:bgPr>
@@ -10897,7 +10364,14 @@
         <p:cNvGrpSpPr/>
         <p:nvPr/>
       </p:nvGrpSpPr>
-      <p:grpSpPr/>
+      <p:grpSpPr>
+        <a:xfrm>
+          <a:off x="0" y="0"/>
+          <a:ext cx="0" cy="0"/>
+          <a:chOff x="0" y="0"/>
+          <a:chExt cx="0" cy="0"/>
+        </a:xfrm>
+      </p:grpSpPr>
       <p:sp>
         <p:nvSpPr>
           <p:cNvPr id="2" name="Rectangle 1"/>
@@ -10933,7 +10407,7 @@
           </a:fontRef>
         </p:style>
         <p:txBody>
-          <a:bodyPr rtlCol="0" anchor="t" wrap="square" lIns="0" rIns="0" tIns="0" bIns="0"/>
+          <a:bodyPr wrap="square" lIns="0" tIns="0" rIns="0" bIns="0" rtlCol="0" anchor="t"/>
           <a:lstStyle/>
           <a:p>
             <a:pPr algn="l">
@@ -10988,7 +10462,7 @@
           </a:fontRef>
         </p:style>
         <p:txBody>
-          <a:bodyPr rtlCol="0" anchor="t" wrap="square" lIns="0" rIns="0" tIns="0" bIns="0"/>
+          <a:bodyPr wrap="square" lIns="0" tIns="0" rIns="0" bIns="0" rtlCol="0" anchor="t"/>
           <a:lstStyle/>
           <a:p>
             <a:pPr algn="l">
@@ -11030,8 +10504,20 @@
                 <a:tableStyleId>{5C22544A-7EE6-4342-B048-85BDC9FD1C3A}</a:tableStyleId>
               </a:tblPr>
               <a:tblGrid>
-                <a:gridCol w="2730500"/>
-                <a:gridCol w="2730500"/>
+                <a:gridCol w="2730500">
+                  <a:extLst>
+                    <a:ext uri="{9D8B030D-6E8A-4147-A177-3AD203B41FA5}">
+                      <a16:colId xmlns:a16="http://schemas.microsoft.com/office/drawing/2014/main" val="20000"/>
+                    </a:ext>
+                  </a:extLst>
+                </a:gridCol>
+                <a:gridCol w="2730500">
+                  <a:extLst>
+                    <a:ext uri="{9D8B030D-6E8A-4147-A177-3AD203B41FA5}">
+                      <a16:colId xmlns:a16="http://schemas.microsoft.com/office/drawing/2014/main" val="20001"/>
+                    </a:ext>
+                  </a:extLst>
+                </a:gridCol>
               </a:tblGrid>
               <a:tr h="426720">
                 <a:tc>
@@ -11080,6 +10566,11 @@
                     </a:solidFill>
                   </a:tcPr>
                 </a:tc>
+                <a:extLst>
+                  <a:ext uri="{0D108BD9-81ED-4DB2-BD59-A6C34878D82A}">
+                    <a16:rowId xmlns:a16="http://schemas.microsoft.com/office/drawing/2014/main" val="10000"/>
+                  </a:ext>
+                </a:extLst>
               </a:tr>
               <a:tr h="426720">
                 <a:tc>
@@ -11128,6 +10619,11 @@
                     </a:solidFill>
                   </a:tcPr>
                 </a:tc>
+                <a:extLst>
+                  <a:ext uri="{0D108BD9-81ED-4DB2-BD59-A6C34878D82A}">
+                    <a16:rowId xmlns:a16="http://schemas.microsoft.com/office/drawing/2014/main" val="10001"/>
+                  </a:ext>
+                </a:extLst>
               </a:tr>
               <a:tr h="426720">
                 <a:tc>
@@ -11176,6 +10672,11 @@
                     </a:solidFill>
                   </a:tcPr>
                 </a:tc>
+                <a:extLst>
+                  <a:ext uri="{0D108BD9-81ED-4DB2-BD59-A6C34878D82A}">
+                    <a16:rowId xmlns:a16="http://schemas.microsoft.com/office/drawing/2014/main" val="10002"/>
+                  </a:ext>
+                </a:extLst>
               </a:tr>
               <a:tr h="426720">
                 <a:tc>
@@ -11224,6 +10725,11 @@
                     </a:solidFill>
                   </a:tcPr>
                 </a:tc>
+                <a:extLst>
+                  <a:ext uri="{0D108BD9-81ED-4DB2-BD59-A6C34878D82A}">
+                    <a16:rowId xmlns:a16="http://schemas.microsoft.com/office/drawing/2014/main" val="10003"/>
+                  </a:ext>
+                </a:extLst>
               </a:tr>
               <a:tr h="426720">
                 <a:tc>
@@ -11272,6 +10778,11 @@
                     </a:solidFill>
                   </a:tcPr>
                 </a:tc>
+                <a:extLst>
+                  <a:ext uri="{0D108BD9-81ED-4DB2-BD59-A6C34878D82A}">
+                    <a16:rowId xmlns:a16="http://schemas.microsoft.com/office/drawing/2014/main" val="10004"/>
+                  </a:ext>
+                </a:extLst>
               </a:tr>
             </a:tbl>
           </a:graphicData>
@@ -11316,7 +10827,7 @@
           </a:fontRef>
         </p:style>
         <p:txBody>
-          <a:bodyPr rtlCol="0" anchor="ctr" wrap="square" lIns="279400" rIns="279400" tIns="279400" bIns="279400"/>
+          <a:bodyPr wrap="square" lIns="279400" tIns="279400" rIns="279400" bIns="279400" rtlCol="0" anchor="ctr"/>
           <a:lstStyle/>
           <a:p>
             <a:pPr algn="l">
@@ -11390,7 +10901,7 @@
           </a:fontRef>
         </p:style>
         <p:txBody>
-          <a:bodyPr rtlCol="0" anchor="t" wrap="square" lIns="0" rIns="0" tIns="0" bIns="0"/>
+          <a:bodyPr wrap="square" lIns="0" tIns="0" rIns="0" bIns="0" rtlCol="0" anchor="t"/>
           <a:lstStyle/>
           <a:p>
             <a:pPr algn="l">
@@ -11445,7 +10956,7 @@
           </a:fontRef>
         </p:style>
         <p:txBody>
-          <a:bodyPr rtlCol="0" anchor="t" wrap="square" lIns="0" rIns="0" tIns="0" bIns="0"/>
+          <a:bodyPr wrap="square" lIns="0" tIns="0" rIns="0" bIns="0" rtlCol="0" anchor="t"/>
           <a:lstStyle/>
           <a:p>
             <a:pPr algn="l">
@@ -11521,14 +11032,14 @@
                             </p:stCondLst>
                             <p:childTnLst>
                               <p:par>
-                                <p:cTn id="7" presetID="22" presetClass="entr" presetSubtype="4" fill="hold" nodeType="afterEffect">
+                                <p:cTn id="5" presetID="22" presetClass="entr" presetSubtype="4" fill="hold" nodeType="afterEffect">
                                   <p:stCondLst>
                                     <p:cond delay="0"/>
                                   </p:stCondLst>
                                   <p:childTnLst>
                                     <p:set>
                                       <p:cBhvr>
-                                        <p:cTn id="5" dur="1" fill="hold">
+                                        <p:cTn id="6" dur="1" fill="hold">
                                           <p:stCondLst>
                                             <p:cond delay="0"/>
                                           </p:stCondLst>
@@ -11546,7 +11057,7 @@
                                     </p:set>
                                     <p:animEffect transition="in" filter="wipe(down)">
                                       <p:cBhvr>
-                                        <p:cTn id="6" dur="500"/>
+                                        <p:cTn id="7" dur="500"/>
                                         <p:tgtEl>
                                           <p:spTgt spid="4"/>
                                         </p:tgtEl>
@@ -11565,14 +11076,14 @@
                             </p:stCondLst>
                             <p:childTnLst>
                               <p:par>
-                                <p:cTn id="13" presetID="53" presetClass="entr" presetSubtype="16" fill="hold" grpId="0" nodeType="afterEffect">
+                                <p:cTn id="9" presetID="53" presetClass="entr" presetSubtype="16" fill="hold" grpId="0" nodeType="afterEffect">
                                   <p:stCondLst>
                                     <p:cond delay="0"/>
                                   </p:stCondLst>
                                   <p:childTnLst>
                                     <p:set>
                                       <p:cBhvr>
-                                        <p:cTn id="9" dur="1" fill="hold">
+                                        <p:cTn id="10" dur="1" fill="hold">
                                           <p:stCondLst>
                                             <p:cond delay="0"/>
                                           </p:stCondLst>
@@ -11590,7 +11101,7 @@
                                     </p:set>
                                     <p:anim calcmode="lin" valueType="num">
                                       <p:cBhvr>
-                                        <p:cTn id="10" dur="500" fill="hold"/>
+                                        <p:cTn id="11" dur="500" fill="hold"/>
                                         <p:tgtEl>
                                           <p:spTgt spid="5"/>
                                         </p:tgtEl>
@@ -11613,7 +11124,7 @@
                                     </p:anim>
                                     <p:anim calcmode="lin" valueType="num">
                                       <p:cBhvr>
-                                        <p:cTn id="11" dur="500" fill="hold"/>
+                                        <p:cTn id="12" dur="500" fill="hold"/>
                                         <p:tgtEl>
                                           <p:spTgt spid="5"/>
                                         </p:tgtEl>
@@ -11636,7 +11147,7 @@
                                     </p:anim>
                                     <p:animEffect transition="in" filter="fade">
                                       <p:cBhvr>
-                                        <p:cTn id="12" dur="500"/>
+                                        <p:cTn id="13" dur="500"/>
                                         <p:tgtEl>
                                           <p:spTgt spid="5"/>
                                         </p:tgtEl>
@@ -11655,14 +11166,14 @@
                             </p:stCondLst>
                             <p:childTnLst>
                               <p:par>
-                                <p:cTn id="17" presetID="10" presetClass="entr" presetSubtype="0" fill="hold" grpId="0" nodeType="afterEffect">
+                                <p:cTn id="15" presetID="10" presetClass="entr" presetSubtype="0" fill="hold" grpId="0" nodeType="afterEffect">
                                   <p:stCondLst>
                                     <p:cond delay="0"/>
                                   </p:stCondLst>
                                   <p:childTnLst>
                                     <p:set>
                                       <p:cBhvr>
-                                        <p:cTn id="15" dur="1" fill="hold">
+                                        <p:cTn id="16" dur="1" fill="hold">
                                           <p:stCondLst>
                                             <p:cond delay="0"/>
                                           </p:stCondLst>
@@ -11680,7 +11191,7 @@
                                     </p:set>
                                     <p:animEffect transition="in" filter="fade">
                                       <p:cBhvr>
-                                        <p:cTn id="16" dur="500"/>
+                                        <p:cTn id="17" dur="500"/>
                                         <p:tgtEl>
                                           <p:spTgt spid="6"/>
                                         </p:tgtEl>
@@ -11725,7 +11236,7 @@
 </file>
 
 <file path=ppt/slides/slide7.xml><?xml version="1.0" encoding="utf-8"?>
-<p:sld xmlns:a="http://schemas.openxmlformats.org/drawingml/2006/main" xmlns:p="http://schemas.openxmlformats.org/presentationml/2006/main" xmlns:r="http://schemas.openxmlformats.org/officeDocument/2006/relationships">
+<p:sld xmlns:a="http://schemas.openxmlformats.org/drawingml/2006/main" xmlns:r="http://schemas.openxmlformats.org/officeDocument/2006/relationships" xmlns:p="http://schemas.openxmlformats.org/presentationml/2006/main">
   <p:cSld>
     <p:bg>
       <p:bgPr>
@@ -11741,7 +11252,14 @@
         <p:cNvGrpSpPr/>
         <p:nvPr/>
       </p:nvGrpSpPr>
-      <p:grpSpPr/>
+      <p:grpSpPr>
+        <a:xfrm>
+          <a:off x="0" y="0"/>
+          <a:ext cx="0" cy="0"/>
+          <a:chOff x="0" y="0"/>
+          <a:chExt cx="0" cy="0"/>
+        </a:xfrm>
+      </p:grpSpPr>
       <p:sp>
         <p:nvSpPr>
           <p:cNvPr id="2" name="Rectangle 1"/>
@@ -11777,7 +11295,7 @@
           </a:fontRef>
         </p:style>
         <p:txBody>
-          <a:bodyPr rtlCol="0" anchor="t" wrap="square" lIns="0" rIns="0" tIns="0" bIns="0"/>
+          <a:bodyPr wrap="square" lIns="0" tIns="0" rIns="0" bIns="0" rtlCol="0" anchor="t"/>
           <a:lstStyle/>
           <a:p>
             <a:pPr algn="l">
@@ -11832,7 +11350,7 @@
           </a:fontRef>
         </p:style>
         <p:txBody>
-          <a:bodyPr rtlCol="0" anchor="t" wrap="square" lIns="0" rIns="0" tIns="0" bIns="0"/>
+          <a:bodyPr wrap="square" lIns="0" tIns="0" rIns="0" bIns="0" rtlCol="0" anchor="t"/>
           <a:lstStyle/>
           <a:p>
             <a:pPr algn="l">
@@ -11896,7 +11414,7 @@
           </a:fontRef>
         </p:style>
         <p:txBody>
-          <a:bodyPr rtlCol="0" anchor="t" wrap="square" lIns="215900" rIns="215900" tIns="215900" bIns="215900"/>
+          <a:bodyPr wrap="square" lIns="215900" tIns="215900" rIns="215900" bIns="215900" rtlCol="0" anchor="t"/>
           <a:lstStyle/>
           <a:p>
             <a:pPr algn="l">
@@ -11990,7 +11508,7 @@
           </a:fontRef>
         </p:style>
         <p:txBody>
-          <a:bodyPr rtlCol="0" anchor="t" wrap="square" lIns="215900" rIns="215900" tIns="215900" bIns="215900"/>
+          <a:bodyPr wrap="square" lIns="215900" tIns="215900" rIns="215900" bIns="215900" rtlCol="0" anchor="t"/>
           <a:lstStyle/>
           <a:p>
             <a:pPr algn="l">
@@ -12080,7 +11598,7 @@
           </a:fontRef>
         </p:style>
         <p:txBody>
-          <a:bodyPr rtlCol="0" anchor="t" wrap="square" lIns="0" rIns="0" tIns="0" bIns="0"/>
+          <a:bodyPr wrap="square" lIns="0" tIns="0" rIns="0" bIns="0" rtlCol="0" anchor="t"/>
           <a:lstStyle/>
           <a:p>
             <a:pPr algn="l">
@@ -12135,7 +11653,7 @@
           </a:fontRef>
         </p:style>
         <p:txBody>
-          <a:bodyPr rtlCol="0" anchor="t" wrap="square" lIns="0" rIns="0" tIns="0" bIns="0"/>
+          <a:bodyPr wrap="square" lIns="0" tIns="0" rIns="0" bIns="0" rtlCol="0" anchor="t"/>
           <a:lstStyle/>
           <a:p>
             <a:pPr algn="l">
@@ -12211,14 +11729,14 @@
                             </p:stCondLst>
                             <p:childTnLst>
                               <p:par>
-                                <p:cTn id="7" presetID="22" presetClass="entr" presetSubtype="4" fill="hold" grpId="0" nodeType="afterEffect">
+                                <p:cTn id="5" presetID="22" presetClass="entr" presetSubtype="4" fill="hold" grpId="0" nodeType="afterEffect">
                                   <p:stCondLst>
                                     <p:cond delay="0"/>
                                   </p:stCondLst>
                                   <p:childTnLst>
                                     <p:set>
                                       <p:cBhvr>
-                                        <p:cTn id="5" dur="1" fill="hold">
+                                        <p:cTn id="6" dur="1" fill="hold">
                                           <p:stCondLst>
                                             <p:cond delay="0"/>
                                           </p:stCondLst>
@@ -12236,7 +11754,7 @@
                                     </p:set>
                                     <p:animEffect transition="in" filter="wipe(down)">
                                       <p:cBhvr>
-                                        <p:cTn id="6" dur="500"/>
+                                        <p:cTn id="7" dur="500"/>
                                         <p:tgtEl>
                                           <p:spTgt spid="4"/>
                                         </p:tgtEl>
@@ -12255,14 +11773,14 @@
                             </p:stCondLst>
                             <p:childTnLst>
                               <p:par>
-                                <p:cTn id="13" presetID="53" presetClass="entr" presetSubtype="16" fill="hold" grpId="0" nodeType="afterEffect">
+                                <p:cTn id="9" presetID="53" presetClass="entr" presetSubtype="16" fill="hold" grpId="0" nodeType="afterEffect">
                                   <p:stCondLst>
                                     <p:cond delay="0"/>
                                   </p:stCondLst>
                                   <p:childTnLst>
                                     <p:set>
                                       <p:cBhvr>
-                                        <p:cTn id="9" dur="1" fill="hold">
+                                        <p:cTn id="10" dur="1" fill="hold">
                                           <p:stCondLst>
                                             <p:cond delay="0"/>
                                           </p:stCondLst>
@@ -12280,7 +11798,7 @@
                                     </p:set>
                                     <p:anim calcmode="lin" valueType="num">
                                       <p:cBhvr>
-                                        <p:cTn id="10" dur="500" fill="hold"/>
+                                        <p:cTn id="11" dur="500" fill="hold"/>
                                         <p:tgtEl>
                                           <p:spTgt spid="5"/>
                                         </p:tgtEl>
@@ -12303,7 +11821,7 @@
                                     </p:anim>
                                     <p:anim calcmode="lin" valueType="num">
                                       <p:cBhvr>
-                                        <p:cTn id="11" dur="500" fill="hold"/>
+                                        <p:cTn id="12" dur="500" fill="hold"/>
                                         <p:tgtEl>
                                           <p:spTgt spid="5"/>
                                         </p:tgtEl>
@@ -12326,7 +11844,7 @@
                                     </p:anim>
                                     <p:animEffect transition="in" filter="fade">
                                       <p:cBhvr>
-                                        <p:cTn id="12" dur="500"/>
+                                        <p:cTn id="13" dur="500"/>
                                         <p:tgtEl>
                                           <p:spTgt spid="5"/>
                                         </p:tgtEl>
@@ -12345,14 +11863,14 @@
                             </p:stCondLst>
                             <p:childTnLst>
                               <p:par>
-                                <p:cTn id="17" presetID="10" presetClass="entr" presetSubtype="0" fill="hold" grpId="0" nodeType="afterEffect">
+                                <p:cTn id="15" presetID="10" presetClass="entr" presetSubtype="0" fill="hold" grpId="0" nodeType="afterEffect">
                                   <p:stCondLst>
                                     <p:cond delay="0"/>
                                   </p:stCondLst>
                                   <p:childTnLst>
                                     <p:set>
                                       <p:cBhvr>
-                                        <p:cTn id="15" dur="1" fill="hold">
+                                        <p:cTn id="16" dur="1" fill="hold">
                                           <p:stCondLst>
                                             <p:cond delay="0"/>
                                           </p:stCondLst>
@@ -12370,7 +11888,7 @@
                                     </p:set>
                                     <p:animEffect transition="in" filter="fade">
                                       <p:cBhvr>
-                                        <p:cTn id="16" dur="500"/>
+                                        <p:cTn id="17" dur="500"/>
                                         <p:tgtEl>
                                           <p:spTgt spid="6"/>
                                         </p:tgtEl>
@@ -12416,7 +11934,7 @@
 </file>
 
 <file path=ppt/slides/slide8.xml><?xml version="1.0" encoding="utf-8"?>
-<p:sld xmlns:a="http://schemas.openxmlformats.org/drawingml/2006/main" xmlns:p="http://schemas.openxmlformats.org/presentationml/2006/main" xmlns:r="http://schemas.openxmlformats.org/officeDocument/2006/relationships">
+<p:sld xmlns:a="http://schemas.openxmlformats.org/drawingml/2006/main" xmlns:r="http://schemas.openxmlformats.org/officeDocument/2006/relationships" xmlns:p="http://schemas.openxmlformats.org/presentationml/2006/main">
   <p:cSld>
     <p:bg>
       <p:bgPr>
@@ -12432,7 +11950,14 @@
         <p:cNvGrpSpPr/>
         <p:nvPr/>
       </p:nvGrpSpPr>
-      <p:grpSpPr/>
+      <p:grpSpPr>
+        <a:xfrm>
+          <a:off x="0" y="0"/>
+          <a:ext cx="0" cy="0"/>
+          <a:chOff x="0" y="0"/>
+          <a:chExt cx="0" cy="0"/>
+        </a:xfrm>
+      </p:grpSpPr>
       <p:sp>
         <p:nvSpPr>
           <p:cNvPr id="2" name="Rectangle 1"/>
@@ -12468,7 +11993,7 @@
           </a:fontRef>
         </p:style>
         <p:txBody>
-          <a:bodyPr rtlCol="0" anchor="t" wrap="square" lIns="0" rIns="0" tIns="0" bIns="0"/>
+          <a:bodyPr wrap="square" lIns="0" tIns="0" rIns="0" bIns="0" rtlCol="0" anchor="t"/>
           <a:lstStyle/>
           <a:p>
             <a:pPr algn="l">
@@ -12523,7 +12048,7 @@
           </a:fontRef>
         </p:style>
         <p:txBody>
-          <a:bodyPr rtlCol="0" anchor="t" wrap="square" lIns="0" rIns="0" tIns="0" bIns="0"/>
+          <a:bodyPr wrap="square" lIns="0" tIns="0" rIns="0" bIns="0" rtlCol="0" anchor="t"/>
           <a:lstStyle/>
           <a:p>
             <a:pPr algn="l">
@@ -12565,9 +12090,27 @@
                 <a:tableStyleId>{5C22544A-7EE6-4342-B048-85BDC9FD1C3A}</a:tableStyleId>
               </a:tblPr>
               <a:tblGrid>
-                <a:gridCol w="5494528"/>
-                <a:gridCol w="2535936"/>
-                <a:gridCol w="2535936"/>
+                <a:gridCol w="5494528">
+                  <a:extLst>
+                    <a:ext uri="{9D8B030D-6E8A-4147-A177-3AD203B41FA5}">
+                      <a16:colId xmlns:a16="http://schemas.microsoft.com/office/drawing/2014/main" val="20000"/>
+                    </a:ext>
+                  </a:extLst>
+                </a:gridCol>
+                <a:gridCol w="2535936">
+                  <a:extLst>
+                    <a:ext uri="{9D8B030D-6E8A-4147-A177-3AD203B41FA5}">
+                      <a16:colId xmlns:a16="http://schemas.microsoft.com/office/drawing/2014/main" val="20001"/>
+                    </a:ext>
+                  </a:extLst>
+                </a:gridCol>
+                <a:gridCol w="2535936">
+                  <a:extLst>
+                    <a:ext uri="{9D8B030D-6E8A-4147-A177-3AD203B41FA5}">
+                      <a16:colId xmlns:a16="http://schemas.microsoft.com/office/drawing/2014/main" val="20002"/>
+                    </a:ext>
+                  </a:extLst>
+                </a:gridCol>
               </a:tblGrid>
               <a:tr h="426720">
                 <a:tc>
@@ -12639,6 +12182,11 @@
                     </a:solidFill>
                   </a:tcPr>
                 </a:tc>
+                <a:extLst>
+                  <a:ext uri="{0D108BD9-81ED-4DB2-BD59-A6C34878D82A}">
+                    <a16:rowId xmlns:a16="http://schemas.microsoft.com/office/drawing/2014/main" val="10000"/>
+                  </a:ext>
+                </a:extLst>
               </a:tr>
               <a:tr h="426720">
                 <a:tc>
@@ -12710,6 +12258,11 @@
                     </a:solidFill>
                   </a:tcPr>
                 </a:tc>
+                <a:extLst>
+                  <a:ext uri="{0D108BD9-81ED-4DB2-BD59-A6C34878D82A}">
+                    <a16:rowId xmlns:a16="http://schemas.microsoft.com/office/drawing/2014/main" val="10001"/>
+                  </a:ext>
+                </a:extLst>
               </a:tr>
               <a:tr h="426720">
                 <a:tc>
@@ -12781,6 +12334,11 @@
                     </a:solidFill>
                   </a:tcPr>
                 </a:tc>
+                <a:extLst>
+                  <a:ext uri="{0D108BD9-81ED-4DB2-BD59-A6C34878D82A}">
+                    <a16:rowId xmlns:a16="http://schemas.microsoft.com/office/drawing/2014/main" val="10002"/>
+                  </a:ext>
+                </a:extLst>
               </a:tr>
               <a:tr h="426720">
                 <a:tc>
@@ -12852,6 +12410,11 @@
                     </a:solidFill>
                   </a:tcPr>
                 </a:tc>
+                <a:extLst>
+                  <a:ext uri="{0D108BD9-81ED-4DB2-BD59-A6C34878D82A}">
+                    <a16:rowId xmlns:a16="http://schemas.microsoft.com/office/drawing/2014/main" val="10003"/>
+                  </a:ext>
+                </a:extLst>
               </a:tr>
               <a:tr h="426720">
                 <a:tc>
@@ -12923,6 +12486,11 @@
                     </a:solidFill>
                   </a:tcPr>
                 </a:tc>
+                <a:extLst>
+                  <a:ext uri="{0D108BD9-81ED-4DB2-BD59-A6C34878D82A}">
+                    <a16:rowId xmlns:a16="http://schemas.microsoft.com/office/drawing/2014/main" val="10004"/>
+                  </a:ext>
+                </a:extLst>
               </a:tr>
               <a:tr h="426720">
                 <a:tc>
@@ -12994,6 +12562,11 @@
                     </a:solidFill>
                   </a:tcPr>
                 </a:tc>
+                <a:extLst>
+                  <a:ext uri="{0D108BD9-81ED-4DB2-BD59-A6C34878D82A}">
+                    <a16:rowId xmlns:a16="http://schemas.microsoft.com/office/drawing/2014/main" val="10005"/>
+                  </a:ext>
+                </a:extLst>
               </a:tr>
             </a:tbl>
           </a:graphicData>
@@ -13034,7 +12607,7 @@
           </a:fontRef>
         </p:style>
         <p:txBody>
-          <a:bodyPr rtlCol="0" anchor="t" wrap="square" lIns="0" rIns="0" tIns="0" bIns="0"/>
+          <a:bodyPr wrap="square" lIns="0" tIns="0" rIns="0" bIns="0" rtlCol="0" anchor="t"/>
           <a:lstStyle/>
           <a:p>
             <a:pPr algn="l">
@@ -13089,7 +12662,7 @@
           </a:fontRef>
         </p:style>
         <p:txBody>
-          <a:bodyPr rtlCol="0" anchor="t" wrap="square" lIns="0" rIns="0" tIns="0" bIns="0"/>
+          <a:bodyPr wrap="square" lIns="0" tIns="0" rIns="0" bIns="0" rtlCol="0" anchor="t"/>
           <a:lstStyle/>
           <a:p>
             <a:pPr algn="l">
@@ -13165,14 +12738,14 @@
                             </p:stCondLst>
                             <p:childTnLst>
                               <p:par>
-                                <p:cTn id="7" presetID="22" presetClass="entr" presetSubtype="4" fill="hold" nodeType="afterEffect">
+                                <p:cTn id="5" presetID="22" presetClass="entr" presetSubtype="4" fill="hold" nodeType="afterEffect">
                                   <p:stCondLst>
                                     <p:cond delay="0"/>
                                   </p:stCondLst>
                                   <p:childTnLst>
                                     <p:set>
                                       <p:cBhvr>
-                                        <p:cTn id="5" dur="1" fill="hold">
+                                        <p:cTn id="6" dur="1" fill="hold">
                                           <p:stCondLst>
                                             <p:cond delay="0"/>
                                           </p:stCondLst>
@@ -13190,7 +12763,7 @@
                                     </p:set>
                                     <p:animEffect transition="in" filter="wipe(down)">
                                       <p:cBhvr>
-                                        <p:cTn id="6" dur="500"/>
+                                        <p:cTn id="7" dur="500"/>
                                         <p:tgtEl>
                                           <p:spTgt spid="4"/>
                                         </p:tgtEl>
@@ -13209,14 +12782,14 @@
                             </p:stCondLst>
                             <p:childTnLst>
                               <p:par>
-                                <p:cTn id="11" presetID="10" presetClass="entr" presetSubtype="0" fill="hold" grpId="0" nodeType="afterEffect">
+                                <p:cTn id="9" presetID="10" presetClass="entr" presetSubtype="0" fill="hold" grpId="0" nodeType="afterEffect">
                                   <p:stCondLst>
                                     <p:cond delay="0"/>
                                   </p:stCondLst>
                                   <p:childTnLst>
                                     <p:set>
                                       <p:cBhvr>
-                                        <p:cTn id="9" dur="1" fill="hold">
+                                        <p:cTn id="10" dur="1" fill="hold">
                                           <p:stCondLst>
                                             <p:cond delay="0"/>
                                           </p:stCondLst>
@@ -13234,7 +12807,7 @@
                                     </p:set>
                                     <p:animEffect transition="in" filter="fade">
                                       <p:cBhvr>
-                                        <p:cTn id="10" dur="500"/>
+                                        <p:cTn id="11" dur="500"/>
                                         <p:tgtEl>
                                           <p:spTgt spid="5"/>
                                         </p:tgtEl>
@@ -13278,7 +12851,7 @@
 </file>
 
 <file path=ppt/slides/slide9.xml><?xml version="1.0" encoding="utf-8"?>
-<p:sld xmlns:a="http://schemas.openxmlformats.org/drawingml/2006/main" xmlns:p="http://schemas.openxmlformats.org/presentationml/2006/main" xmlns:r="http://schemas.openxmlformats.org/officeDocument/2006/relationships">
+<p:sld xmlns:a="http://schemas.openxmlformats.org/drawingml/2006/main" xmlns:r="http://schemas.openxmlformats.org/officeDocument/2006/relationships" xmlns:p="http://schemas.openxmlformats.org/presentationml/2006/main">
   <p:cSld>
     <p:bg>
       <p:bgPr>
@@ -13294,7 +12867,14 @@
         <p:cNvGrpSpPr/>
         <p:nvPr/>
       </p:nvGrpSpPr>
-      <p:grpSpPr/>
+      <p:grpSpPr>
+        <a:xfrm>
+          <a:off x="0" y="0"/>
+          <a:ext cx="0" cy="0"/>
+          <a:chOff x="0" y="0"/>
+          <a:chExt cx="0" cy="0"/>
+        </a:xfrm>
+      </p:grpSpPr>
       <p:sp>
         <p:nvSpPr>
           <p:cNvPr id="2" name="Rectangle 1"/>
@@ -13330,7 +12910,7 @@
           </a:fontRef>
         </p:style>
         <p:txBody>
-          <a:bodyPr rtlCol="0" anchor="t" wrap="square" lIns="0" rIns="0" tIns="0" bIns="0"/>
+          <a:bodyPr wrap="square" lIns="0" tIns="0" rIns="0" bIns="0" rtlCol="0" anchor="t"/>
           <a:lstStyle/>
           <a:p>
             <a:pPr algn="l">
@@ -13385,7 +12965,7 @@
           </a:fontRef>
         </p:style>
         <p:txBody>
-          <a:bodyPr rtlCol="0" anchor="t" wrap="square" lIns="0" rIns="0" tIns="0" bIns="0"/>
+          <a:bodyPr wrap="square" lIns="0" tIns="0" rIns="0" bIns="0" rtlCol="0" anchor="t"/>
           <a:lstStyle/>
           <a:p>
             <a:pPr algn="l">
@@ -13449,7 +13029,7 @@
           </a:fontRef>
         </p:style>
         <p:txBody>
-          <a:bodyPr rtlCol="0" anchor="t" wrap="square" lIns="203200" rIns="203200" tIns="203200" bIns="203200"/>
+          <a:bodyPr wrap="square" lIns="203200" tIns="203200" rIns="203200" bIns="203200" rtlCol="0" anchor="t"/>
           <a:lstStyle/>
           <a:p>
             <a:pPr algn="l">
@@ -13545,7 +13125,7 @@
           </a:fontRef>
         </p:style>
         <p:txBody>
-          <a:bodyPr rtlCol="0" anchor="t" wrap="square" lIns="203200" rIns="203200" tIns="203200" bIns="203200"/>
+          <a:bodyPr wrap="square" lIns="203200" tIns="203200" rIns="203200" bIns="203200" rtlCol="0" anchor="t"/>
           <a:lstStyle/>
           <a:p>
             <a:pPr algn="l">
@@ -13641,7 +13221,7 @@
           </a:fontRef>
         </p:style>
         <p:txBody>
-          <a:bodyPr rtlCol="0" anchor="t" wrap="square" lIns="203200" rIns="203200" tIns="203200" bIns="203200"/>
+          <a:bodyPr wrap="square" lIns="203200" tIns="203200" rIns="203200" bIns="203200" rtlCol="0" anchor="t"/>
           <a:lstStyle/>
           <a:p>
             <a:pPr algn="l">
@@ -13735,7 +13315,7 @@
           </a:fontRef>
         </p:style>
         <p:txBody>
-          <a:bodyPr rtlCol="0" anchor="t" wrap="square" lIns="203200" rIns="203200" tIns="203200" bIns="203200"/>
+          <a:bodyPr wrap="square" lIns="203200" tIns="203200" rIns="203200" bIns="203200" rtlCol="0" anchor="t"/>
           <a:lstStyle/>
           <a:p>
             <a:pPr algn="l">
@@ -13825,7 +13405,7 @@
           </a:fontRef>
         </p:style>
         <p:txBody>
-          <a:bodyPr rtlCol="0" anchor="t" wrap="square" lIns="0" rIns="0" tIns="0" bIns="0"/>
+          <a:bodyPr wrap="square" lIns="0" tIns="0" rIns="0" bIns="0" rtlCol="0" anchor="t"/>
           <a:lstStyle/>
           <a:p>
             <a:pPr algn="l">
@@ -13901,14 +13481,14 @@
                             </p:stCondLst>
                             <p:childTnLst>
                               <p:par>
-                                <p:cTn id="7" presetID="22" presetClass="entr" presetSubtype="4" fill="hold" grpId="0" nodeType="afterEffect">
+                                <p:cTn id="5" presetID="22" presetClass="entr" presetSubtype="4" fill="hold" grpId="0" nodeType="afterEffect">
                                   <p:stCondLst>
                                     <p:cond delay="0"/>
                                   </p:stCondLst>
                                   <p:childTnLst>
                                     <p:set>
                                       <p:cBhvr>
-                                        <p:cTn id="5" dur="1" fill="hold">
+                                        <p:cTn id="6" dur="1" fill="hold">
                                           <p:stCondLst>
                                             <p:cond delay="0"/>
                                           </p:stCondLst>
@@ -13926,7 +13506,7 @@
                                     </p:set>
                                     <p:animEffect transition="in" filter="wipe(down)">
                                       <p:cBhvr>
-                                        <p:cTn id="6" dur="500"/>
+                                        <p:cTn id="7" dur="500"/>
                                         <p:tgtEl>
                                           <p:spTgt spid="4"/>
                                         </p:tgtEl>
@@ -13945,14 +13525,14 @@
                             </p:stCondLst>
                             <p:childTnLst>
                               <p:par>
-                                <p:cTn id="11" presetID="22" presetClass="entr" presetSubtype="4" fill="hold" grpId="0" nodeType="afterEffect">
+                                <p:cTn id="9" presetID="22" presetClass="entr" presetSubtype="4" fill="hold" grpId="0" nodeType="afterEffect">
                                   <p:stCondLst>
                                     <p:cond delay="0"/>
                                   </p:stCondLst>
                                   <p:childTnLst>
                                     <p:set>
                                       <p:cBhvr>
-                                        <p:cTn id="9" dur="1" fill="hold">
+                                        <p:cTn id="10" dur="1" fill="hold">
                                           <p:stCondLst>
                                             <p:cond delay="0"/>
                                           </p:stCondLst>
@@ -13970,7 +13550,7 @@
                                     </p:set>
                                     <p:animEffect transition="in" filter="wipe(down)">
                                       <p:cBhvr>
-                                        <p:cTn id="10" dur="500"/>
+                                        <p:cTn id="11" dur="500"/>
                                         <p:tgtEl>
                                           <p:spTgt spid="5"/>
                                         </p:tgtEl>
@@ -13989,14 +13569,14 @@
                             </p:stCondLst>
                             <p:childTnLst>
                               <p:par>
-                                <p:cTn id="15" presetID="22" presetClass="entr" presetSubtype="4" fill="hold" grpId="0" nodeType="afterEffect">
+                                <p:cTn id="13" presetID="22" presetClass="entr" presetSubtype="4" fill="hold" grpId="0" nodeType="afterEffect">
                                   <p:stCondLst>
                                     <p:cond delay="0"/>
                                   </p:stCondLst>
                                   <p:childTnLst>
                                     <p:set>
                                       <p:cBhvr>
-                                        <p:cTn id="13" dur="1" fill="hold">
+                                        <p:cTn id="14" dur="1" fill="hold">
                                           <p:stCondLst>
                                             <p:cond delay="0"/>
                                           </p:stCondLst>
@@ -14014,7 +13594,7 @@
                                     </p:set>
                                     <p:animEffect transition="in" filter="wipe(down)">
                                       <p:cBhvr>
-                                        <p:cTn id="14" dur="500"/>
+                                        <p:cTn id="15" dur="500"/>
                                         <p:tgtEl>
                                           <p:spTgt spid="6"/>
                                         </p:tgtEl>
@@ -14033,14 +13613,14 @@
                             </p:stCondLst>
                             <p:childTnLst>
                               <p:par>
-                                <p:cTn id="21" presetID="53" presetClass="entr" presetSubtype="16" fill="hold" grpId="0" nodeType="afterEffect">
+                                <p:cTn id="17" presetID="53" presetClass="entr" presetSubtype="16" fill="hold" grpId="0" nodeType="afterEffect">
                                   <p:stCondLst>
                                     <p:cond delay="0"/>
                                   </p:stCondLst>
                                   <p:childTnLst>
                                     <p:set>
                                       <p:cBhvr>
-                                        <p:cTn id="17" dur="1" fill="hold">
+                                        <p:cTn id="18" dur="1" fill="hold">
                                           <p:stCondLst>
                                             <p:cond delay="0"/>
                                           </p:stCondLst>
@@ -14058,7 +13638,7 @@
                                     </p:set>
                                     <p:anim calcmode="lin" valueType="num">
                                       <p:cBhvr>
-                                        <p:cTn id="18" dur="500" fill="hold"/>
+                                        <p:cTn id="19" dur="500" fill="hold"/>
                                         <p:tgtEl>
                                           <p:spTgt spid="7"/>
                                         </p:tgtEl>
@@ -14081,7 +13661,7 @@
                                     </p:anim>
                                     <p:anim calcmode="lin" valueType="num">
                                       <p:cBhvr>
-                                        <p:cTn id="19" dur="500" fill="hold"/>
+                                        <p:cTn id="20" dur="500" fill="hold"/>
                                         <p:tgtEl>
                                           <p:spTgt spid="7"/>
                                         </p:tgtEl>
@@ -14104,7 +13684,7 @@
                                     </p:anim>
                                     <p:animEffect transition="in" filter="fade">
                                       <p:cBhvr>
-                                        <p:cTn id="20" dur="500"/>
+                                        <p:cTn id="21" dur="500"/>
                                         <p:tgtEl>
                                           <p:spTgt spid="7"/>
                                         </p:tgtEl>
@@ -14471,7 +14051,7 @@
 </file>
 
 <file path=ppt/theme/theme2.xml><?xml version="1.0" encoding="utf-8"?>
-<a:theme xmlns:a="http://schemas.openxmlformats.org/drawingml/2006/main" name="Office Theme">
+<a:theme xmlns:a="http://schemas.openxmlformats.org/drawingml/2006/main" name="Thème Office">
   <a:themeElements>
     <a:clrScheme name="Office">
       <a:dk1>
@@ -14481,44 +14061,44 @@
         <a:sysClr val="window" lastClr="FFFFFF"/>
       </a:lt1>
       <a:dk2>
-        <a:srgbClr val="1F497D"/>
+        <a:srgbClr val="0E2841"/>
       </a:dk2>
       <a:lt2>
-        <a:srgbClr val="EEECE1"/>
+        <a:srgbClr val="E8E8E8"/>
       </a:lt2>
       <a:accent1>
-        <a:srgbClr val="4F81BD"/>
+        <a:srgbClr val="156082"/>
       </a:accent1>
       <a:accent2>
-        <a:srgbClr val="C0504D"/>
+        <a:srgbClr val="E97132"/>
       </a:accent2>
       <a:accent3>
-        <a:srgbClr val="9BBB59"/>
+        <a:srgbClr val="196B24"/>
       </a:accent3>
       <a:accent4>
-        <a:srgbClr val="8064A2"/>
+        <a:srgbClr val="0F9ED5"/>
       </a:accent4>
       <a:accent5>
-        <a:srgbClr val="4BACC6"/>
+        <a:srgbClr val="A02B93"/>
       </a:accent5>
       <a:accent6>
-        <a:srgbClr val="F79646"/>
+        <a:srgbClr val="4EA72E"/>
       </a:accent6>
       <a:hlink>
-        <a:srgbClr val="0000FF"/>
+        <a:srgbClr val="467886"/>
       </a:hlink>
       <a:folHlink>
-        <a:srgbClr val="800080"/>
+        <a:srgbClr val="96607D"/>
       </a:folHlink>
     </a:clrScheme>
     <a:fontScheme name="Office">
       <a:majorFont>
-        <a:latin typeface="Calibri"/>
+        <a:latin typeface="Aptos Display" panose="02110004020202020204"/>
         <a:ea typeface=""/>
         <a:cs typeface=""/>
-        <a:font script="Jpan" typeface="ＭＳ Ｐゴシック"/>
+        <a:font script="Jpan" typeface="游ゴシック Light"/>
         <a:font script="Hang" typeface="맑은 고딕"/>
-        <a:font script="Hans" typeface="宋体"/>
+        <a:font script="Hans" typeface="等线 Light"/>
         <a:font script="Hant" typeface="新細明體"/>
         <a:font script="Arab" typeface="Times New Roman"/>
         <a:font script="Hebr" typeface="Times New Roman"/>
@@ -14546,14 +14126,31 @@
         <a:font script="Viet" typeface="Times New Roman"/>
         <a:font script="Uigh" typeface="Microsoft Uighur"/>
         <a:font script="Geor" typeface="Sylfaen"/>
+        <a:font script="Armn" typeface="Arial"/>
+        <a:font script="Bugi" typeface="Leelawadee UI"/>
+        <a:font script="Bopo" typeface="Microsoft JhengHei"/>
+        <a:font script="Java" typeface="Javanese Text"/>
+        <a:font script="Lisu" typeface="Segoe UI"/>
+        <a:font script="Mymr" typeface="Myanmar Text"/>
+        <a:font script="Nkoo" typeface="Ebrima"/>
+        <a:font script="Olck" typeface="Nirmala UI"/>
+        <a:font script="Osma" typeface="Ebrima"/>
+        <a:font script="Phag" typeface="Phagspa"/>
+        <a:font script="Syrn" typeface="Estrangelo Edessa"/>
+        <a:font script="Syrj" typeface="Estrangelo Edessa"/>
+        <a:font script="Syre" typeface="Estrangelo Edessa"/>
+        <a:font script="Sora" typeface="Nirmala UI"/>
+        <a:font script="Tale" typeface="Microsoft Tai Le"/>
+        <a:font script="Talu" typeface="Microsoft New Tai Lue"/>
+        <a:font script="Tfng" typeface="Ebrima"/>
       </a:majorFont>
       <a:minorFont>
-        <a:latin typeface="Calibri"/>
+        <a:latin typeface="Aptos" panose="02110004020202020204"/>
         <a:ea typeface=""/>
         <a:cs typeface=""/>
-        <a:font script="Jpan" typeface="ＭＳ Ｐゴシック"/>
+        <a:font script="Jpan" typeface="游ゴシック"/>
         <a:font script="Hang" typeface="맑은 고딕"/>
-        <a:font script="Hans" typeface="宋体"/>
+        <a:font script="Hans" typeface="等线"/>
         <a:font script="Hant" typeface="新細明體"/>
         <a:font script="Arab" typeface="Arial"/>
         <a:font script="Hebr" typeface="Arial"/>
@@ -14581,6 +14178,23 @@
         <a:font script="Viet" typeface="Arial"/>
         <a:font script="Uigh" typeface="Microsoft Uighur"/>
         <a:font script="Geor" typeface="Sylfaen"/>
+        <a:font script="Armn" typeface="Arial"/>
+        <a:font script="Bugi" typeface="Leelawadee UI"/>
+        <a:font script="Bopo" typeface="Microsoft JhengHei"/>
+        <a:font script="Java" typeface="Javanese Text"/>
+        <a:font script="Lisu" typeface="Segoe UI"/>
+        <a:font script="Mymr" typeface="Myanmar Text"/>
+        <a:font script="Nkoo" typeface="Ebrima"/>
+        <a:font script="Olck" typeface="Nirmala UI"/>
+        <a:font script="Osma" typeface="Ebrima"/>
+        <a:font script="Phag" typeface="Phagspa"/>
+        <a:font script="Syrn" typeface="Estrangelo Edessa"/>
+        <a:font script="Syrj" typeface="Estrangelo Edessa"/>
+        <a:font script="Syre" typeface="Estrangelo Edessa"/>
+        <a:font script="Sora" typeface="Nirmala UI"/>
+        <a:font script="Tale" typeface="Microsoft Tai Le"/>
+        <a:font script="Talu" typeface="Microsoft New Tai Lue"/>
+        <a:font script="Tfng" typeface="Ebrima"/>
       </a:minorFont>
     </a:fontScheme>
     <a:fmtScheme name="Office">
@@ -14592,180 +14206,136 @@
           <a:gsLst>
             <a:gs pos="0">
               <a:schemeClr val="phClr">
-                <a:tint val="50000"/>
-                <a:satMod val="300000"/>
+                <a:lumMod val="110000"/>
+                <a:satMod val="105000"/>
+                <a:tint val="67000"/>
               </a:schemeClr>
             </a:gs>
-            <a:gs pos="35000">
+            <a:gs pos="50000">
               <a:schemeClr val="phClr">
-                <a:tint val="37000"/>
-                <a:satMod val="300000"/>
+                <a:lumMod val="105000"/>
+                <a:satMod val="103000"/>
+                <a:tint val="73000"/>
               </a:schemeClr>
             </a:gs>
             <a:gs pos="100000">
               <a:schemeClr val="phClr">
-                <a:tint val="15000"/>
-                <a:satMod val="350000"/>
+                <a:lumMod val="105000"/>
+                <a:satMod val="109000"/>
+                <a:tint val="81000"/>
               </a:schemeClr>
             </a:gs>
           </a:gsLst>
-          <a:lin ang="16200000" scaled="1"/>
+          <a:lin ang="5400000" scaled="0"/>
         </a:gradFill>
         <a:gradFill rotWithShape="1">
           <a:gsLst>
             <a:gs pos="0">
               <a:schemeClr val="phClr">
-                <a:tint val="100000"/>
+                <a:satMod val="103000"/>
+                <a:lumMod val="102000"/>
+                <a:tint val="94000"/>
+              </a:schemeClr>
+            </a:gs>
+            <a:gs pos="50000">
+              <a:schemeClr val="phClr">
+                <a:satMod val="110000"/>
+                <a:lumMod val="100000"/>
                 <a:shade val="100000"/>
-                <a:satMod val="130000"/>
               </a:schemeClr>
             </a:gs>
             <a:gs pos="100000">
               <a:schemeClr val="phClr">
-                <a:tint val="50000"/>
-                <a:shade val="100000"/>
-                <a:satMod val="350000"/>
+                <a:lumMod val="99000"/>
+                <a:satMod val="120000"/>
+                <a:shade val="78000"/>
               </a:schemeClr>
             </a:gs>
           </a:gsLst>
-          <a:lin ang="16200000" scaled="0"/>
+          <a:lin ang="5400000" scaled="0"/>
         </a:gradFill>
       </a:fillStyleLst>
       <a:lnStyleLst>
-        <a:ln w="9525" cap="flat" cmpd="sng" algn="ctr">
+        <a:ln w="12700" cap="flat" cmpd="sng" algn="ctr">
           <a:solidFill>
-            <a:schemeClr val="phClr">
-              <a:shade val="95000"/>
-              <a:satMod val="105000"/>
-            </a:schemeClr>
+            <a:schemeClr val="phClr"/>
           </a:solidFill>
           <a:prstDash val="solid"/>
+          <a:miter lim="800000"/>
+        </a:ln>
+        <a:ln w="19050" cap="flat" cmpd="sng" algn="ctr">
+          <a:solidFill>
+            <a:schemeClr val="phClr"/>
+          </a:solidFill>
+          <a:prstDash val="solid"/>
+          <a:miter lim="800000"/>
         </a:ln>
         <a:ln w="25400" cap="flat" cmpd="sng" algn="ctr">
           <a:solidFill>
             <a:schemeClr val="phClr"/>
           </a:solidFill>
           <a:prstDash val="solid"/>
-        </a:ln>
-        <a:ln w="38100" cap="flat" cmpd="sng" algn="ctr">
-          <a:solidFill>
-            <a:schemeClr val="phClr"/>
-          </a:solidFill>
-          <a:prstDash val="solid"/>
+          <a:miter lim="800000"/>
         </a:ln>
       </a:lnStyleLst>
       <a:effectStyleLst>
         <a:effectStyle>
+          <a:effectLst/>
+        </a:effectStyle>
+        <a:effectStyle>
+          <a:effectLst/>
+        </a:effectStyle>
+        <a:effectStyle>
           <a:effectLst>
-            <a:outerShdw blurRad="40000" dist="20000" dir="5400000" rotWithShape="0">
+            <a:outerShdw blurRad="57150" dist="19050" dir="5400000" algn="ctr" rotWithShape="0">
               <a:srgbClr val="000000">
-                <a:alpha val="38000"/>
+                <a:alpha val="63000"/>
               </a:srgbClr>
             </a:outerShdw>
           </a:effectLst>
-        </a:effectStyle>
-        <a:effectStyle>
-          <a:effectLst>
-            <a:outerShdw blurRad="40000" dist="23000" dir="5400000" rotWithShape="0">
-              <a:srgbClr val="000000">
-                <a:alpha val="35000"/>
-              </a:srgbClr>
-            </a:outerShdw>
-          </a:effectLst>
-        </a:effectStyle>
-        <a:effectStyle>
-          <a:effectLst>
-            <a:outerShdw blurRad="40000" dist="23000" dir="5400000" rotWithShape="0">
-              <a:srgbClr val="000000">
-                <a:alpha val="35000"/>
-              </a:srgbClr>
-            </a:outerShdw>
-          </a:effectLst>
-          <a:scene3d>
-            <a:camera prst="orthographicFront">
-              <a:rot lat="0" lon="0" rev="0"/>
-            </a:camera>
-            <a:lightRig rig="threePt" dir="t">
-              <a:rot lat="0" lon="0" rev="1200000"/>
-            </a:lightRig>
-          </a:scene3d>
-          <a:sp3d>
-            <a:bevelT w="63500" h="25400"/>
-          </a:sp3d>
         </a:effectStyle>
       </a:effectStyleLst>
       <a:bgFillStyleLst>
         <a:solidFill>
           <a:schemeClr val="phClr"/>
         </a:solidFill>
+        <a:solidFill>
+          <a:schemeClr val="phClr">
+            <a:tint val="95000"/>
+            <a:satMod val="170000"/>
+          </a:schemeClr>
+        </a:solidFill>
         <a:gradFill rotWithShape="1">
           <a:gsLst>
             <a:gs pos="0">
               <a:schemeClr val="phClr">
-                <a:tint val="40000"/>
-                <a:satMod val="350000"/>
+                <a:tint val="93000"/>
+                <a:satMod val="150000"/>
+                <a:shade val="98000"/>
+                <a:lumMod val="102000"/>
               </a:schemeClr>
             </a:gs>
-            <a:gs pos="40000">
+            <a:gs pos="50000">
               <a:schemeClr val="phClr">
-                <a:tint val="45000"/>
-                <a:shade val="99000"/>
-                <a:satMod val="350000"/>
+                <a:tint val="98000"/>
+                <a:satMod val="130000"/>
+                <a:shade val="90000"/>
+                <a:lumMod val="103000"/>
               </a:schemeClr>
             </a:gs>
             <a:gs pos="100000">
               <a:schemeClr val="phClr">
-                <a:shade val="20000"/>
-                <a:satMod val="255000"/>
+                <a:shade val="63000"/>
+                <a:satMod val="120000"/>
               </a:schemeClr>
             </a:gs>
           </a:gsLst>
-          <a:path path="circle">
-            <a:fillToRect l="50000" t="-80000" r="50000" b="180000"/>
-          </a:path>
-        </a:gradFill>
-        <a:gradFill rotWithShape="1">
-          <a:gsLst>
-            <a:gs pos="0">
-              <a:schemeClr val="phClr">
-                <a:tint val="80000"/>
-                <a:satMod val="300000"/>
-              </a:schemeClr>
-            </a:gs>
-            <a:gs pos="100000">
-              <a:schemeClr val="phClr">
-                <a:shade val="30000"/>
-                <a:satMod val="200000"/>
-              </a:schemeClr>
-            </a:gs>
-          </a:gsLst>
-          <a:path path="circle">
-            <a:fillToRect l="50000" t="50000" r="50000" b="50000"/>
-          </a:path>
+          <a:lin ang="5400000" scaled="0"/>
         </a:gradFill>
       </a:bgFillStyleLst>
     </a:fmtScheme>
   </a:themeElements>
   <a:objectDefaults>
-    <a:spDef>
-      <a:spPr/>
-      <a:bodyPr/>
-      <a:lstStyle/>
-      <a:style>
-        <a:lnRef idx="1">
-          <a:schemeClr val="accent1"/>
-        </a:lnRef>
-        <a:fillRef idx="3">
-          <a:schemeClr val="accent1"/>
-        </a:fillRef>
-        <a:effectRef idx="2">
-          <a:schemeClr val="accent1"/>
-        </a:effectRef>
-        <a:fontRef idx="minor">
-          <a:schemeClr val="lt1"/>
-        </a:fontRef>
-      </a:style>
-    </a:spDef>
     <a:lnDef>
       <a:spPr/>
       <a:bodyPr/>
@@ -14787,5 +14357,10 @@
     </a:lnDef>
   </a:objectDefaults>
   <a:extraClrSchemeLst/>
+  <a:extLst>
+    <a:ext uri="{05A4C25C-085E-4340-85A3-A5531E510DB2}">
+      <thm15:themeFamily xmlns:thm15="http://schemas.microsoft.com/office/thememl/2012/main" name="Office Theme" id="{2E142A2C-CD16-42D6-873A-C26D2A0506FA}" vid="{1BDDFF52-6CD6-40A5-AB3C-68EB2F1E4D0A}"/>
+    </a:ext>
+  </a:extLst>
 </a:theme>
 </file>